--- a/slides/4-9_pulmonary_risk_assessment/4-9_pulmonary_risk_assessment.pptx
+++ b/slides/4-9_pulmonary_risk_assessment/4-9_pulmonary_risk_assessment.pptx
@@ -2557,11 +2557,11 @@
         <p:spPr>
           <a:xfrm>
             <a:off x="502920" y="1691640"/>
-            <a:ext cx="5477256" cy="3182112"/>
+            <a:ext cx="5477256" cy="3063240"/>
           </a:xfrm>
           <a:prstGeom prst="roundRect">
             <a:avLst>
-              <a:gd name="adj" fmla="val 2299"/>
+              <a:gd name="adj" fmla="val 2388"/>
             </a:avLst>
           </a:prstGeom>
           <a:solidFill>
@@ -2609,144 +2609,500 @@
           </a:p>
         </p:txBody>
       </p:sp>
-      <p:sp>
-        <p:nvSpPr>
-          <p:cNvPr id="13" name="Text 11"/>
-          <p:cNvSpPr txBox="1"/>
-          <p:nvPr/>
-        </p:nvSpPr>
-        <p:spPr>
-          <a:xfrm>
-            <a:off x="630936" y="2249424"/>
-            <a:ext cx="5221224" cy="2514600"/>
-          </a:xfrm>
-          <a:prstGeom prst="rect">
-            <a:avLst/>
-          </a:prstGeom>
-          <a:noFill/>
-          <a:ln/>
-        </p:spPr>
-        <p:txBody>
-          <a:bodyPr wrap="square" lIns="0" tIns="0" rIns="0" bIns="0" rtlCol="0" anchor="t"/>
-          <a:lstStyle/>
-          <a:p>
-            <a:pPr algn="l" marL="254000" indent="-254000">
-              <a:spcAft>
-                <a:spcPts val="800"/>
-              </a:spcAft>
-              <a:buSzPct val="100000"/>
-              <a:buChar char="•"/>
-            </a:pPr>
-            <a:r>
-              <a:rPr lang="ja-JP" altLang="en-US" sz="2200" dirty="0">
-                <a:solidFill>
-                  <a:srgbClr val="262626"/>
-                </a:solidFill>
-                <a:latin typeface="メイリオ" pitchFamily="34" charset="0"/>
-                <a:ea typeface="メイリオ" pitchFamily="34" charset="-122"/>
-                <a:cs typeface="メイリオ" pitchFamily="34" charset="-120"/>
-              </a:rPr>
-              <a:t>高齢（60 歳超で上がる）</a:t>
-            </a:r>
-            <a:endParaRPr lang="ja-JP" sz="2200" dirty="0"/>
-          </a:p>
-          <a:p>
-            <a:pPr algn="l" marL="254000" indent="-254000">
-              <a:spcAft>
-                <a:spcPts val="800"/>
-              </a:spcAft>
-              <a:buSzPct val="100000"/>
-              <a:buChar char="•"/>
-            </a:pPr>
-            <a:r>
-              <a:rPr lang="ja-JP" altLang="en-US" sz="2200" dirty="0">
-                <a:solidFill>
-                  <a:srgbClr val="262626"/>
-                </a:solidFill>
-                <a:latin typeface="メイリオ" pitchFamily="34" charset="0"/>
-                <a:ea typeface="メイリオ" pitchFamily="34" charset="-122"/>
-                <a:cs typeface="メイリオ" pitchFamily="34" charset="-120"/>
-              </a:rPr>
-              <a:t>ASA-PS 2 以上、介助が必要</a:t>
-            </a:r>
-            <a:endParaRPr lang="ja-JP" sz="2200" dirty="0"/>
-          </a:p>
-          <a:p>
-            <a:pPr algn="l" marL="254000" indent="-254000">
-              <a:spcAft>
-                <a:spcPts val="800"/>
-              </a:spcAft>
-              <a:buSzPct val="100000"/>
-              <a:buChar char="•"/>
-            </a:pPr>
-            <a:r>
-              <a:rPr lang="ja-JP" altLang="en-US" sz="2200" dirty="0">
-                <a:solidFill>
-                  <a:srgbClr val="262626"/>
-                </a:solidFill>
-                <a:latin typeface="メイリオ" pitchFamily="34" charset="0"/>
-                <a:ea typeface="メイリオ" pitchFamily="34" charset="-122"/>
-                <a:cs typeface="メイリオ" pitchFamily="34" charset="-120"/>
-              </a:rPr>
-              <a:t>COPD、うっ血性心不全</a:t>
-            </a:r>
-            <a:endParaRPr lang="ja-JP" sz="2200" dirty="0"/>
-          </a:p>
-          <a:p>
-            <a:pPr algn="l" marL="254000" indent="-254000">
-              <a:spcAft>
-                <a:spcPts val="800"/>
-              </a:spcAft>
-              <a:buSzPct val="100000"/>
-              <a:buChar char="•"/>
-            </a:pPr>
-            <a:r>
-              <a:rPr lang="ja-JP" altLang="en-US" sz="2200" dirty="0">
-                <a:solidFill>
-                  <a:srgbClr val="262626"/>
-                </a:solidFill>
-                <a:latin typeface="メイリオ" pitchFamily="34" charset="0"/>
-                <a:ea typeface="メイリオ" pitchFamily="34" charset="-122"/>
-                <a:cs typeface="メイリオ" pitchFamily="34" charset="-120"/>
-              </a:rPr>
-              <a:t>1 か月以内の呼吸器感染</a:t>
-            </a:r>
-            <a:endParaRPr lang="ja-JP" sz="2200" dirty="0"/>
-          </a:p>
-          <a:p>
-            <a:pPr algn="l" marL="254000" indent="-254000">
-              <a:buSzPct val="100000"/>
-              <a:buChar char="•"/>
-            </a:pPr>
-            <a:r>
-              <a:rPr lang="ja-JP" altLang="en-US" sz="2200" dirty="0">
-                <a:solidFill>
-                  <a:srgbClr val="262626"/>
-                </a:solidFill>
-                <a:latin typeface="メイリオ" pitchFamily="34" charset="0"/>
-                <a:ea typeface="メイリオ" pitchFamily="34" charset="-122"/>
-                <a:cs typeface="メイリオ" pitchFamily="34" charset="-120"/>
-              </a:rPr>
-              <a:t>アルブミン 3.0 g/dL 未満、貧血</a:t>
-            </a:r>
-            <a:endParaRPr lang="ja-JP" sz="2200" dirty="0"/>
-          </a:p>
-        </p:txBody>
-      </p:sp>
-      <p:sp>
-        <p:nvSpPr>
-          <p:cNvPr id="14" name="Shape 12"/>
+      <p:graphicFrame>
+        <p:nvGraphicFramePr>
+          <p:cNvPr id="13" name="Table 0"/>
+          <p:cNvGraphicFramePr>
+            <a:graphicFrameLocks noGrp="1"/>
+          </p:cNvGraphicFramePr>
+          <p:nvPr>
+            <p:extLst>
+              <p:ext uri="{D42A27DB-BD31-4B8C-83A1-F6EECF244321}">
+                <p14:modId xmlns:p14="http://schemas.microsoft.com/office/powerpoint/2010/main" val="1579011935"/>
+              </p:ext>
+            </p:extLst>
+          </p:nvPr>
+        </p:nvGraphicFramePr>
+        <p:xfrm>
+          <a:off x="630936" y="2249424"/>
+          <a:ext cx="5221224" cy="914400"/>
+        </p:xfrm>
+        <a:graphic>
+          <a:graphicData uri="http://schemas.openxmlformats.org/drawingml/2006/table">
+            <a:tbl>
+              <a:tblPr/>
+              <a:tblGrid>
+                <a:gridCol w="256032"/>
+                <a:gridCol w="4965192"/>
+              </a:tblGrid>
+              <a:tr h="512978">
+                <a:tc>
+                  <a:txBody>
+                    <a:bodyPr/>
+                    <a:lstStyle/>
+                    <a:p>
+                      <a:pPr algn="l" indent="0" marL="0">
+                        <a:lnSpc>
+                          <a:spcPts val="2640"/>
+                        </a:lnSpc>
+                        <a:buNone/>
+                      </a:pPr>
+                      <a:r>
+                        <a:rPr lang="ja-JP" altLang="en-US" sz="2200" dirty="0">
+                          <a:solidFill>
+                            <a:srgbClr val="262626"/>
+                          </a:solidFill>
+                          <a:latin typeface="メイリオ" pitchFamily="34" charset="0"/>
+                          <a:ea typeface="メイリオ" pitchFamily="34" charset="-122"/>
+                          <a:cs typeface="メイリオ" pitchFamily="34" charset="-120"/>
+                        </a:rPr>
+                        <a:t>•</a:t>
+                      </a:r>
+                      <a:endParaRPr lang="en-US" sz="2200" dirty="0">
+                        <a:latin typeface="メイリオ" charset="0"/>
+                        <a:ea typeface="メイリオ" charset="0"/>
+                        <a:cs typeface="メイリオ" charset="0"/>
+                      </a:endParaRPr>
+                    </a:p>
+                  </a:txBody>
+                  <a:tcPr marL="0" marR="0" marT="0" marB="177394" anchor="t">
+                    <a:lnL w="0" cap="flat" cmpd="sng" algn="ctr">
+                      <a:noFill/>
+                    </a:lnL>
+                    <a:lnR w="0" cap="flat" cmpd="sng" algn="ctr">
+                      <a:noFill/>
+                    </a:lnR>
+                    <a:lnT w="0" cap="flat" cmpd="sng" algn="ctr">
+                      <a:noFill/>
+                    </a:lnT>
+                    <a:lnB w="0" cap="flat" cmpd="sng" algn="ctr">
+                      <a:noFill/>
+                    </a:lnB>
+                  </a:tcPr>
+                </a:tc>
+                <a:tc>
+                  <a:txBody>
+                    <a:bodyPr/>
+                    <a:lstStyle/>
+                    <a:p>
+                      <a:pPr algn="l" indent="0" marL="0">
+                        <a:lnSpc>
+                          <a:spcPts val="2640"/>
+                        </a:lnSpc>
+                        <a:buNone/>
+                      </a:pPr>
+                      <a:r>
+                        <a:rPr lang="ja-JP" altLang="en-US" sz="2200" dirty="0">
+                          <a:solidFill>
+                            <a:srgbClr val="262626"/>
+                          </a:solidFill>
+                          <a:latin typeface="メイリオ" pitchFamily="34" charset="0"/>
+                          <a:ea typeface="メイリオ" pitchFamily="34" charset="-122"/>
+                          <a:cs typeface="メイリオ" pitchFamily="34" charset="-120"/>
+                        </a:rPr>
+                        <a:t>高齢（60 歳超で上がる）</a:t>
+                      </a:r>
+                      <a:endParaRPr lang="en-US" sz="2200" dirty="0">
+                        <a:latin typeface="メイリオ" charset="0"/>
+                        <a:ea typeface="メイリオ" charset="0"/>
+                        <a:cs typeface="メイリオ" charset="0"/>
+                      </a:endParaRPr>
+                    </a:p>
+                  </a:txBody>
+                  <a:tcPr marL="0" marR="0" marT="0" marB="177394" anchor="t">
+                    <a:lnL w="0" cap="flat" cmpd="sng" algn="ctr">
+                      <a:noFill/>
+                    </a:lnL>
+                    <a:lnR w="0" cap="flat" cmpd="sng" algn="ctr">
+                      <a:noFill/>
+                    </a:lnR>
+                    <a:lnT w="0" cap="flat" cmpd="sng" algn="ctr">
+                      <a:noFill/>
+                    </a:lnT>
+                    <a:lnB w="0" cap="flat" cmpd="sng" algn="ctr">
+                      <a:noFill/>
+                    </a:lnB>
+                  </a:tcPr>
+                </a:tc>
+              </a:tr>
+              <a:tr h="512978">
+                <a:tc>
+                  <a:txBody>
+                    <a:bodyPr/>
+                    <a:lstStyle/>
+                    <a:p>
+                      <a:pPr algn="l" indent="0" marL="0">
+                        <a:lnSpc>
+                          <a:spcPts val="2640"/>
+                        </a:lnSpc>
+                        <a:buNone/>
+                      </a:pPr>
+                      <a:r>
+                        <a:rPr lang="ja-JP" altLang="en-US" sz="2200" dirty="0">
+                          <a:solidFill>
+                            <a:srgbClr val="262626"/>
+                          </a:solidFill>
+                          <a:latin typeface="メイリオ" pitchFamily="34" charset="0"/>
+                          <a:ea typeface="メイリオ" pitchFamily="34" charset="-122"/>
+                          <a:cs typeface="メイリオ" pitchFamily="34" charset="-120"/>
+                        </a:rPr>
+                        <a:t>•</a:t>
+                      </a:r>
+                      <a:endParaRPr lang="en-US" sz="2200" dirty="0">
+                        <a:latin typeface="メイリオ" charset="0"/>
+                        <a:ea typeface="メイリオ" charset="0"/>
+                        <a:cs typeface="メイリオ" charset="0"/>
+                      </a:endParaRPr>
+                    </a:p>
+                  </a:txBody>
+                  <a:tcPr marL="0" marR="0" marT="0" marB="177394" anchor="t">
+                    <a:lnL w="0" cap="flat" cmpd="sng" algn="ctr">
+                      <a:noFill/>
+                    </a:lnL>
+                    <a:lnR w="0" cap="flat" cmpd="sng" algn="ctr">
+                      <a:noFill/>
+                    </a:lnR>
+                    <a:lnT w="0" cap="flat" cmpd="sng" algn="ctr">
+                      <a:noFill/>
+                    </a:lnT>
+                    <a:lnB w="0" cap="flat" cmpd="sng" algn="ctr">
+                      <a:noFill/>
+                    </a:lnB>
+                  </a:tcPr>
+                </a:tc>
+                <a:tc>
+                  <a:txBody>
+                    <a:bodyPr/>
+                    <a:lstStyle/>
+                    <a:p>
+                      <a:pPr algn="l" indent="0" marL="0">
+                        <a:lnSpc>
+                          <a:spcPts val="2640"/>
+                        </a:lnSpc>
+                        <a:buNone/>
+                      </a:pPr>
+                      <a:r>
+                        <a:rPr lang="ja-JP" altLang="en-US" sz="2200" dirty="0">
+                          <a:solidFill>
+                            <a:srgbClr val="262626"/>
+                          </a:solidFill>
+                          <a:latin typeface="メイリオ" pitchFamily="34" charset="0"/>
+                          <a:ea typeface="メイリオ" pitchFamily="34" charset="-122"/>
+                          <a:cs typeface="メイリオ" pitchFamily="34" charset="-120"/>
+                        </a:rPr>
+                        <a:t>ASA-PS 2 以上、介助が必要</a:t>
+                      </a:r>
+                      <a:endParaRPr lang="en-US" sz="2200" dirty="0">
+                        <a:latin typeface="メイリオ" charset="0"/>
+                        <a:ea typeface="メイリオ" charset="0"/>
+                        <a:cs typeface="メイリオ" charset="0"/>
+                      </a:endParaRPr>
+                    </a:p>
+                  </a:txBody>
+                  <a:tcPr marL="0" marR="0" marT="0" marB="177394" anchor="t">
+                    <a:lnL w="0" cap="flat" cmpd="sng" algn="ctr">
+                      <a:noFill/>
+                    </a:lnL>
+                    <a:lnR w="0" cap="flat" cmpd="sng" algn="ctr">
+                      <a:noFill/>
+                    </a:lnR>
+                    <a:lnT w="0" cap="flat" cmpd="sng" algn="ctr">
+                      <a:noFill/>
+                    </a:lnT>
+                    <a:lnB w="0" cap="flat" cmpd="sng" algn="ctr">
+                      <a:noFill/>
+                    </a:lnB>
+                  </a:tcPr>
+                </a:tc>
+              </a:tr>
+              <a:tr h="512978">
+                <a:tc>
+                  <a:txBody>
+                    <a:bodyPr/>
+                    <a:lstStyle/>
+                    <a:p>
+                      <a:pPr algn="l" indent="0" marL="0">
+                        <a:lnSpc>
+                          <a:spcPts val="2640"/>
+                        </a:lnSpc>
+                        <a:buNone/>
+                      </a:pPr>
+                      <a:r>
+                        <a:rPr lang="ja-JP" altLang="en-US" sz="2200" dirty="0">
+                          <a:solidFill>
+                            <a:srgbClr val="262626"/>
+                          </a:solidFill>
+                          <a:latin typeface="メイリオ" pitchFamily="34" charset="0"/>
+                          <a:ea typeface="メイリオ" pitchFamily="34" charset="-122"/>
+                          <a:cs typeface="メイリオ" pitchFamily="34" charset="-120"/>
+                        </a:rPr>
+                        <a:t>•</a:t>
+                      </a:r>
+                      <a:endParaRPr lang="en-US" sz="2200" dirty="0">
+                        <a:latin typeface="メイリオ" charset="0"/>
+                        <a:ea typeface="メイリオ" charset="0"/>
+                        <a:cs typeface="メイリオ" charset="0"/>
+                      </a:endParaRPr>
+                    </a:p>
+                  </a:txBody>
+                  <a:tcPr marL="0" marR="0" marT="0" marB="177394" anchor="t">
+                    <a:lnL w="0" cap="flat" cmpd="sng" algn="ctr">
+                      <a:noFill/>
+                    </a:lnL>
+                    <a:lnR w="0" cap="flat" cmpd="sng" algn="ctr">
+                      <a:noFill/>
+                    </a:lnR>
+                    <a:lnT w="0" cap="flat" cmpd="sng" algn="ctr">
+                      <a:noFill/>
+                    </a:lnT>
+                    <a:lnB w="0" cap="flat" cmpd="sng" algn="ctr">
+                      <a:noFill/>
+                    </a:lnB>
+                  </a:tcPr>
+                </a:tc>
+                <a:tc>
+                  <a:txBody>
+                    <a:bodyPr/>
+                    <a:lstStyle/>
+                    <a:p>
+                      <a:pPr algn="l" indent="0" marL="0">
+                        <a:lnSpc>
+                          <a:spcPts val="2640"/>
+                        </a:lnSpc>
+                        <a:buNone/>
+                      </a:pPr>
+                      <a:r>
+                        <a:rPr lang="ja-JP" altLang="en-US" sz="2200" dirty="0">
+                          <a:solidFill>
+                            <a:srgbClr val="262626"/>
+                          </a:solidFill>
+                          <a:latin typeface="メイリオ" pitchFamily="34" charset="0"/>
+                          <a:ea typeface="メイリオ" pitchFamily="34" charset="-122"/>
+                          <a:cs typeface="メイリオ" pitchFamily="34" charset="-120"/>
+                        </a:rPr>
+                        <a:t>COPD、うっ血性心不全</a:t>
+                      </a:r>
+                      <a:endParaRPr lang="en-US" sz="2200" dirty="0">
+                        <a:latin typeface="メイリオ" charset="0"/>
+                        <a:ea typeface="メイリオ" charset="0"/>
+                        <a:cs typeface="メイリオ" charset="0"/>
+                      </a:endParaRPr>
+                    </a:p>
+                  </a:txBody>
+                  <a:tcPr marL="0" marR="0" marT="0" marB="177394" anchor="t">
+                    <a:lnL w="0" cap="flat" cmpd="sng" algn="ctr">
+                      <a:noFill/>
+                    </a:lnL>
+                    <a:lnR w="0" cap="flat" cmpd="sng" algn="ctr">
+                      <a:noFill/>
+                    </a:lnR>
+                    <a:lnT w="0" cap="flat" cmpd="sng" algn="ctr">
+                      <a:noFill/>
+                    </a:lnT>
+                    <a:lnB w="0" cap="flat" cmpd="sng" algn="ctr">
+                      <a:noFill/>
+                    </a:lnB>
+                  </a:tcPr>
+                </a:tc>
+              </a:tr>
+              <a:tr h="512978">
+                <a:tc>
+                  <a:txBody>
+                    <a:bodyPr/>
+                    <a:lstStyle/>
+                    <a:p>
+                      <a:pPr algn="l" indent="0" marL="0">
+                        <a:lnSpc>
+                          <a:spcPts val="2640"/>
+                        </a:lnSpc>
+                        <a:buNone/>
+                      </a:pPr>
+                      <a:r>
+                        <a:rPr lang="ja-JP" altLang="en-US" sz="2200" dirty="0">
+                          <a:solidFill>
+                            <a:srgbClr val="262626"/>
+                          </a:solidFill>
+                          <a:latin typeface="メイリオ" pitchFamily="34" charset="0"/>
+                          <a:ea typeface="メイリオ" pitchFamily="34" charset="-122"/>
+                          <a:cs typeface="メイリオ" pitchFamily="34" charset="-120"/>
+                        </a:rPr>
+                        <a:t>•</a:t>
+                      </a:r>
+                      <a:endParaRPr lang="en-US" sz="2200" dirty="0">
+                        <a:latin typeface="メイリオ" charset="0"/>
+                        <a:ea typeface="メイリオ" charset="0"/>
+                        <a:cs typeface="メイリオ" charset="0"/>
+                      </a:endParaRPr>
+                    </a:p>
+                  </a:txBody>
+                  <a:tcPr marL="0" marR="0" marT="0" marB="177394" anchor="t">
+                    <a:lnL w="0" cap="flat" cmpd="sng" algn="ctr">
+                      <a:noFill/>
+                    </a:lnL>
+                    <a:lnR w="0" cap="flat" cmpd="sng" algn="ctr">
+                      <a:noFill/>
+                    </a:lnR>
+                    <a:lnT w="0" cap="flat" cmpd="sng" algn="ctr">
+                      <a:noFill/>
+                    </a:lnT>
+                    <a:lnB w="0" cap="flat" cmpd="sng" algn="ctr">
+                      <a:noFill/>
+                    </a:lnB>
+                  </a:tcPr>
+                </a:tc>
+                <a:tc>
+                  <a:txBody>
+                    <a:bodyPr/>
+                    <a:lstStyle/>
+                    <a:p>
+                      <a:pPr algn="l" indent="0" marL="0">
+                        <a:lnSpc>
+                          <a:spcPts val="2640"/>
+                        </a:lnSpc>
+                        <a:buNone/>
+                      </a:pPr>
+                      <a:r>
+                        <a:rPr lang="ja-JP" altLang="en-US" sz="2200" dirty="0">
+                          <a:solidFill>
+                            <a:srgbClr val="262626"/>
+                          </a:solidFill>
+                          <a:latin typeface="メイリオ" pitchFamily="34" charset="0"/>
+                          <a:ea typeface="メイリオ" pitchFamily="34" charset="-122"/>
+                          <a:cs typeface="メイリオ" pitchFamily="34" charset="-120"/>
+                        </a:rPr>
+                        <a:t>1 か月以内の呼吸器感染</a:t>
+                      </a:r>
+                      <a:endParaRPr lang="en-US" sz="2200" dirty="0">
+                        <a:latin typeface="メイリオ" charset="0"/>
+                        <a:ea typeface="メイリオ" charset="0"/>
+                        <a:cs typeface="メイリオ" charset="0"/>
+                      </a:endParaRPr>
+                    </a:p>
+                  </a:txBody>
+                  <a:tcPr marL="0" marR="0" marT="0" marB="177394" anchor="t">
+                    <a:lnL w="0" cap="flat" cmpd="sng" algn="ctr">
+                      <a:noFill/>
+                    </a:lnL>
+                    <a:lnR w="0" cap="flat" cmpd="sng" algn="ctr">
+                      <a:noFill/>
+                    </a:lnR>
+                    <a:lnT w="0" cap="flat" cmpd="sng" algn="ctr">
+                      <a:noFill/>
+                    </a:lnT>
+                    <a:lnB w="0" cap="flat" cmpd="sng" algn="ctr">
+                      <a:noFill/>
+                    </a:lnB>
+                  </a:tcPr>
+                </a:tc>
+              </a:tr>
+              <a:tr h="335585">
+                <a:tc>
+                  <a:txBody>
+                    <a:bodyPr/>
+                    <a:lstStyle/>
+                    <a:p>
+                      <a:pPr algn="l" indent="0" marL="0">
+                        <a:lnSpc>
+                          <a:spcPts val="2640"/>
+                        </a:lnSpc>
+                        <a:buNone/>
+                      </a:pPr>
+                      <a:r>
+                        <a:rPr lang="ja-JP" altLang="en-US" sz="2200" dirty="0">
+                          <a:solidFill>
+                            <a:srgbClr val="262626"/>
+                          </a:solidFill>
+                          <a:latin typeface="メイリオ" pitchFamily="34" charset="0"/>
+                          <a:ea typeface="メイリオ" pitchFamily="34" charset="-122"/>
+                          <a:cs typeface="メイリオ" pitchFamily="34" charset="-120"/>
+                        </a:rPr>
+                        <a:t>•</a:t>
+                      </a:r>
+                      <a:endParaRPr lang="en-US" sz="2200" dirty="0">
+                        <a:latin typeface="メイリオ" charset="0"/>
+                        <a:ea typeface="メイリオ" charset="0"/>
+                        <a:cs typeface="メイリオ" charset="0"/>
+                      </a:endParaRPr>
+                    </a:p>
+                  </a:txBody>
+                  <a:tcPr marL="0" marR="0" marT="0" marB="0" anchor="t">
+                    <a:lnL w="0" cap="flat" cmpd="sng" algn="ctr">
+                      <a:noFill/>
+                    </a:lnL>
+                    <a:lnR w="0" cap="flat" cmpd="sng" algn="ctr">
+                      <a:noFill/>
+                    </a:lnR>
+                    <a:lnT w="0" cap="flat" cmpd="sng" algn="ctr">
+                      <a:noFill/>
+                    </a:lnT>
+                    <a:lnB w="0" cap="flat" cmpd="sng" algn="ctr">
+                      <a:noFill/>
+                    </a:lnB>
+                  </a:tcPr>
+                </a:tc>
+                <a:tc>
+                  <a:txBody>
+                    <a:bodyPr/>
+                    <a:lstStyle/>
+                    <a:p>
+                      <a:pPr algn="l" indent="0" marL="0">
+                        <a:lnSpc>
+                          <a:spcPts val="2640"/>
+                        </a:lnSpc>
+                        <a:buNone/>
+                      </a:pPr>
+                      <a:r>
+                        <a:rPr lang="ja-JP" altLang="en-US" sz="2200" dirty="0">
+                          <a:solidFill>
+                            <a:srgbClr val="262626"/>
+                          </a:solidFill>
+                          <a:latin typeface="メイリオ" pitchFamily="34" charset="0"/>
+                          <a:ea typeface="メイリオ" pitchFamily="34" charset="-122"/>
+                          <a:cs typeface="メイリオ" pitchFamily="34" charset="-120"/>
+                        </a:rPr>
+                        <a:t>アルブミン 3.0 g/dL 未満、貧血</a:t>
+                      </a:r>
+                      <a:endParaRPr lang="en-US" sz="2200" dirty="0">
+                        <a:latin typeface="メイリオ" charset="0"/>
+                        <a:ea typeface="メイリオ" charset="0"/>
+                        <a:cs typeface="メイリオ" charset="0"/>
+                      </a:endParaRPr>
+                    </a:p>
+                  </a:txBody>
+                  <a:tcPr marL="0" marR="0" marT="0" marB="0" anchor="t">
+                    <a:lnL w="0" cap="flat" cmpd="sng" algn="ctr">
+                      <a:noFill/>
+                    </a:lnL>
+                    <a:lnR w="0" cap="flat" cmpd="sng" algn="ctr">
+                      <a:noFill/>
+                    </a:lnR>
+                    <a:lnT w="0" cap="flat" cmpd="sng" algn="ctr">
+                      <a:noFill/>
+                    </a:lnT>
+                    <a:lnB w="0" cap="flat" cmpd="sng" algn="ctr">
+                      <a:noFill/>
+                    </a:lnB>
+                  </a:tcPr>
+                </a:tc>
+              </a:tr>
+            </a:tbl>
+          </a:graphicData>
+        </a:graphic>
+      </p:graphicFrame>
+      <p:sp>
+        <p:nvSpPr>
+          <p:cNvPr id="14" name="Shape 11"/>
           <p:cNvSpPr/>
           <p:nvPr/>
         </p:nvSpPr>
         <p:spPr>
           <a:xfrm>
             <a:off x="6208776" y="1691640"/>
-            <a:ext cx="5477256" cy="3182112"/>
+            <a:ext cx="5477256" cy="3063240"/>
           </a:xfrm>
           <a:prstGeom prst="roundRect">
             <a:avLst>
-              <a:gd name="adj" fmla="val 2299"/>
+              <a:gd name="adj" fmla="val 2388"/>
             </a:avLst>
           </a:prstGeom>
           <a:solidFill>
@@ -2757,7 +3113,7 @@
       </p:sp>
       <p:sp>
         <p:nvSpPr>
-          <p:cNvPr id="15" name="Text 13"/>
+          <p:cNvPr id="15" name="Text 12"/>
           <p:cNvSpPr txBox="1"/>
           <p:nvPr/>
         </p:nvSpPr>
@@ -2794,139 +3150,495 @@
           </a:p>
         </p:txBody>
       </p:sp>
-      <p:sp>
-        <p:nvSpPr>
-          <p:cNvPr id="16" name="Text 14"/>
-          <p:cNvSpPr txBox="1"/>
+      <p:graphicFrame>
+        <p:nvGraphicFramePr>
+          <p:cNvPr id="16" name="Table 1"/>
+          <p:cNvGraphicFramePr>
+            <a:graphicFrameLocks noGrp="1"/>
+          </p:cNvGraphicFramePr>
+          <p:nvPr>
+            <p:extLst>
+              <p:ext uri="{D42A27DB-BD31-4B8C-83A1-F6EECF244321}">
+                <p14:modId xmlns:p14="http://schemas.microsoft.com/office/powerpoint/2010/main" val="1579011935"/>
+              </p:ext>
+            </p:extLst>
+          </p:nvPr>
+        </p:nvGraphicFramePr>
+        <p:xfrm>
+          <a:off x="6336792" y="2249424"/>
+          <a:ext cx="5221224" cy="914400"/>
+        </p:xfrm>
+        <a:graphic>
+          <a:graphicData uri="http://schemas.openxmlformats.org/drawingml/2006/table">
+            <a:tbl>
+              <a:tblPr/>
+              <a:tblGrid>
+                <a:gridCol w="256032"/>
+                <a:gridCol w="4965192"/>
+              </a:tblGrid>
+              <a:tr h="512978">
+                <a:tc>
+                  <a:txBody>
+                    <a:bodyPr/>
+                    <a:lstStyle/>
+                    <a:p>
+                      <a:pPr algn="l" indent="0" marL="0">
+                        <a:lnSpc>
+                          <a:spcPts val="2640"/>
+                        </a:lnSpc>
+                        <a:buNone/>
+                      </a:pPr>
+                      <a:r>
+                        <a:rPr lang="ja-JP" altLang="en-US" sz="2200" dirty="0">
+                          <a:solidFill>
+                            <a:srgbClr val="262626"/>
+                          </a:solidFill>
+                          <a:latin typeface="メイリオ" pitchFamily="34" charset="0"/>
+                          <a:ea typeface="メイリオ" pitchFamily="34" charset="-122"/>
+                          <a:cs typeface="メイリオ" pitchFamily="34" charset="-120"/>
+                        </a:rPr>
+                        <a:t>•</a:t>
+                      </a:r>
+                      <a:endParaRPr lang="en-US" sz="2200" dirty="0">
+                        <a:latin typeface="メイリオ" charset="0"/>
+                        <a:ea typeface="メイリオ" charset="0"/>
+                        <a:cs typeface="メイリオ" charset="0"/>
+                      </a:endParaRPr>
+                    </a:p>
+                  </a:txBody>
+                  <a:tcPr marL="0" marR="0" marT="0" marB="177394" anchor="t">
+                    <a:lnL w="0" cap="flat" cmpd="sng" algn="ctr">
+                      <a:noFill/>
+                    </a:lnL>
+                    <a:lnR w="0" cap="flat" cmpd="sng" algn="ctr">
+                      <a:noFill/>
+                    </a:lnR>
+                    <a:lnT w="0" cap="flat" cmpd="sng" algn="ctr">
+                      <a:noFill/>
+                    </a:lnT>
+                    <a:lnB w="0" cap="flat" cmpd="sng" algn="ctr">
+                      <a:noFill/>
+                    </a:lnB>
+                  </a:tcPr>
+                </a:tc>
+                <a:tc>
+                  <a:txBody>
+                    <a:bodyPr/>
+                    <a:lstStyle/>
+                    <a:p>
+                      <a:pPr algn="l" indent="0" marL="0">
+                        <a:lnSpc>
+                          <a:spcPts val="2640"/>
+                        </a:lnSpc>
+                        <a:buNone/>
+                      </a:pPr>
+                      <a:r>
+                        <a:rPr lang="ja-JP" altLang="en-US" sz="2200" dirty="0">
+                          <a:solidFill>
+                            <a:srgbClr val="262626"/>
+                          </a:solidFill>
+                          <a:latin typeface="メイリオ" pitchFamily="34" charset="0"/>
+                          <a:ea typeface="メイリオ" pitchFamily="34" charset="-122"/>
+                          <a:cs typeface="メイリオ" pitchFamily="34" charset="-120"/>
+                        </a:rPr>
+                        <a:t>上腹部・胸腔内の切開</a:t>
+                      </a:r>
+                      <a:endParaRPr lang="en-US" sz="2200" dirty="0">
+                        <a:latin typeface="メイリオ" charset="0"/>
+                        <a:ea typeface="メイリオ" charset="0"/>
+                        <a:cs typeface="メイリオ" charset="0"/>
+                      </a:endParaRPr>
+                    </a:p>
+                  </a:txBody>
+                  <a:tcPr marL="0" marR="0" marT="0" marB="177394" anchor="t">
+                    <a:lnL w="0" cap="flat" cmpd="sng" algn="ctr">
+                      <a:noFill/>
+                    </a:lnL>
+                    <a:lnR w="0" cap="flat" cmpd="sng" algn="ctr">
+                      <a:noFill/>
+                    </a:lnR>
+                    <a:lnT w="0" cap="flat" cmpd="sng" algn="ctr">
+                      <a:noFill/>
+                    </a:lnT>
+                    <a:lnB w="0" cap="flat" cmpd="sng" algn="ctr">
+                      <a:noFill/>
+                    </a:lnB>
+                  </a:tcPr>
+                </a:tc>
+              </a:tr>
+              <a:tr h="512978">
+                <a:tc>
+                  <a:txBody>
+                    <a:bodyPr/>
+                    <a:lstStyle/>
+                    <a:p>
+                      <a:pPr algn="l" indent="0" marL="0">
+                        <a:lnSpc>
+                          <a:spcPts val="2640"/>
+                        </a:lnSpc>
+                        <a:buNone/>
+                      </a:pPr>
+                      <a:r>
+                        <a:rPr lang="ja-JP" altLang="en-US" sz="2200" dirty="0">
+                          <a:solidFill>
+                            <a:srgbClr val="262626"/>
+                          </a:solidFill>
+                          <a:latin typeface="メイリオ" pitchFamily="34" charset="0"/>
+                          <a:ea typeface="メイリオ" pitchFamily="34" charset="-122"/>
+                          <a:cs typeface="メイリオ" pitchFamily="34" charset="-120"/>
+                        </a:rPr>
+                        <a:t>•</a:t>
+                      </a:r>
+                      <a:endParaRPr lang="en-US" sz="2200" dirty="0">
+                        <a:latin typeface="メイリオ" charset="0"/>
+                        <a:ea typeface="メイリオ" charset="0"/>
+                        <a:cs typeface="メイリオ" charset="0"/>
+                      </a:endParaRPr>
+                    </a:p>
+                  </a:txBody>
+                  <a:tcPr marL="0" marR="0" marT="0" marB="177394" anchor="t">
+                    <a:lnL w="0" cap="flat" cmpd="sng" algn="ctr">
+                      <a:noFill/>
+                    </a:lnL>
+                    <a:lnR w="0" cap="flat" cmpd="sng" algn="ctr">
+                      <a:noFill/>
+                    </a:lnR>
+                    <a:lnT w="0" cap="flat" cmpd="sng" algn="ctr">
+                      <a:noFill/>
+                    </a:lnT>
+                    <a:lnB w="0" cap="flat" cmpd="sng" algn="ctr">
+                      <a:noFill/>
+                    </a:lnB>
+                  </a:tcPr>
+                </a:tc>
+                <a:tc>
+                  <a:txBody>
+                    <a:bodyPr/>
+                    <a:lstStyle/>
+                    <a:p>
+                      <a:pPr algn="l" indent="0" marL="0">
+                        <a:lnSpc>
+                          <a:spcPts val="2640"/>
+                        </a:lnSpc>
+                        <a:buNone/>
+                      </a:pPr>
+                      <a:r>
+                        <a:rPr lang="ja-JP" altLang="en-US" sz="2200" dirty="0">
+                          <a:solidFill>
+                            <a:srgbClr val="262626"/>
+                          </a:solidFill>
+                          <a:latin typeface="メイリオ" pitchFamily="34" charset="0"/>
+                          <a:ea typeface="メイリオ" pitchFamily="34" charset="-122"/>
+                          <a:cs typeface="メイリオ" pitchFamily="34" charset="-120"/>
+                        </a:rPr>
+                        <a:t>長時間手術（2 時間超から）</a:t>
+                      </a:r>
+                      <a:endParaRPr lang="en-US" sz="2200" dirty="0">
+                        <a:latin typeface="メイリオ" charset="0"/>
+                        <a:ea typeface="メイリオ" charset="0"/>
+                        <a:cs typeface="メイリオ" charset="0"/>
+                      </a:endParaRPr>
+                    </a:p>
+                  </a:txBody>
+                  <a:tcPr marL="0" marR="0" marT="0" marB="177394" anchor="t">
+                    <a:lnL w="0" cap="flat" cmpd="sng" algn="ctr">
+                      <a:noFill/>
+                    </a:lnL>
+                    <a:lnR w="0" cap="flat" cmpd="sng" algn="ctr">
+                      <a:noFill/>
+                    </a:lnR>
+                    <a:lnT w="0" cap="flat" cmpd="sng" algn="ctr">
+                      <a:noFill/>
+                    </a:lnT>
+                    <a:lnB w="0" cap="flat" cmpd="sng" algn="ctr">
+                      <a:noFill/>
+                    </a:lnB>
+                  </a:tcPr>
+                </a:tc>
+              </a:tr>
+              <a:tr h="512978">
+                <a:tc>
+                  <a:txBody>
+                    <a:bodyPr/>
+                    <a:lstStyle/>
+                    <a:p>
+                      <a:pPr algn="l" indent="0" marL="0">
+                        <a:lnSpc>
+                          <a:spcPts val="2640"/>
+                        </a:lnSpc>
+                        <a:buNone/>
+                      </a:pPr>
+                      <a:r>
+                        <a:rPr lang="ja-JP" altLang="en-US" sz="2200" dirty="0">
+                          <a:solidFill>
+                            <a:srgbClr val="262626"/>
+                          </a:solidFill>
+                          <a:latin typeface="メイリオ" pitchFamily="34" charset="0"/>
+                          <a:ea typeface="メイリオ" pitchFamily="34" charset="-122"/>
+                          <a:cs typeface="メイリオ" pitchFamily="34" charset="-120"/>
+                        </a:rPr>
+                        <a:t>•</a:t>
+                      </a:r>
+                      <a:endParaRPr lang="en-US" sz="2200" dirty="0">
+                        <a:latin typeface="メイリオ" charset="0"/>
+                        <a:ea typeface="メイリオ" charset="0"/>
+                        <a:cs typeface="メイリオ" charset="0"/>
+                      </a:endParaRPr>
+                    </a:p>
+                  </a:txBody>
+                  <a:tcPr marL="0" marR="0" marT="0" marB="177394" anchor="t">
+                    <a:lnL w="0" cap="flat" cmpd="sng" algn="ctr">
+                      <a:noFill/>
+                    </a:lnL>
+                    <a:lnR w="0" cap="flat" cmpd="sng" algn="ctr">
+                      <a:noFill/>
+                    </a:lnR>
+                    <a:lnT w="0" cap="flat" cmpd="sng" algn="ctr">
+                      <a:noFill/>
+                    </a:lnT>
+                    <a:lnB w="0" cap="flat" cmpd="sng" algn="ctr">
+                      <a:noFill/>
+                    </a:lnB>
+                  </a:tcPr>
+                </a:tc>
+                <a:tc>
+                  <a:txBody>
+                    <a:bodyPr/>
+                    <a:lstStyle/>
+                    <a:p>
+                      <a:pPr algn="l" indent="0" marL="0">
+                        <a:lnSpc>
+                          <a:spcPts val="2640"/>
+                        </a:lnSpc>
+                        <a:buNone/>
+                      </a:pPr>
+                      <a:r>
+                        <a:rPr lang="ja-JP" altLang="en-US" sz="2200" dirty="0">
+                          <a:solidFill>
+                            <a:srgbClr val="262626"/>
+                          </a:solidFill>
+                          <a:latin typeface="メイリオ" pitchFamily="34" charset="0"/>
+                          <a:ea typeface="メイリオ" pitchFamily="34" charset="-122"/>
+                          <a:cs typeface="メイリオ" pitchFamily="34" charset="-120"/>
+                        </a:rPr>
+                        <a:t>緊急手術</a:t>
+                      </a:r>
+                      <a:endParaRPr lang="en-US" sz="2200" dirty="0">
+                        <a:latin typeface="メイリオ" charset="0"/>
+                        <a:ea typeface="メイリオ" charset="0"/>
+                        <a:cs typeface="メイリオ" charset="0"/>
+                      </a:endParaRPr>
+                    </a:p>
+                  </a:txBody>
+                  <a:tcPr marL="0" marR="0" marT="0" marB="177394" anchor="t">
+                    <a:lnL w="0" cap="flat" cmpd="sng" algn="ctr">
+                      <a:noFill/>
+                    </a:lnL>
+                    <a:lnR w="0" cap="flat" cmpd="sng" algn="ctr">
+                      <a:noFill/>
+                    </a:lnR>
+                    <a:lnT w="0" cap="flat" cmpd="sng" algn="ctr">
+                      <a:noFill/>
+                    </a:lnT>
+                    <a:lnB w="0" cap="flat" cmpd="sng" algn="ctr">
+                      <a:noFill/>
+                    </a:lnB>
+                  </a:tcPr>
+                </a:tc>
+              </a:tr>
+              <a:tr h="512978">
+                <a:tc>
+                  <a:txBody>
+                    <a:bodyPr/>
+                    <a:lstStyle/>
+                    <a:p>
+                      <a:pPr algn="l" indent="0" marL="0">
+                        <a:lnSpc>
+                          <a:spcPts val="2640"/>
+                        </a:lnSpc>
+                        <a:buNone/>
+                      </a:pPr>
+                      <a:r>
+                        <a:rPr lang="ja-JP" altLang="en-US" sz="2200" dirty="0">
+                          <a:solidFill>
+                            <a:srgbClr val="262626"/>
+                          </a:solidFill>
+                          <a:latin typeface="メイリオ" pitchFamily="34" charset="0"/>
+                          <a:ea typeface="メイリオ" pitchFamily="34" charset="-122"/>
+                          <a:cs typeface="メイリオ" pitchFamily="34" charset="-120"/>
+                        </a:rPr>
+                        <a:t>•</a:t>
+                      </a:r>
+                      <a:endParaRPr lang="en-US" sz="2200" dirty="0">
+                        <a:latin typeface="メイリオ" charset="0"/>
+                        <a:ea typeface="メイリオ" charset="0"/>
+                        <a:cs typeface="メイリオ" charset="0"/>
+                      </a:endParaRPr>
+                    </a:p>
+                  </a:txBody>
+                  <a:tcPr marL="0" marR="0" marT="0" marB="177394" anchor="t">
+                    <a:lnL w="0" cap="flat" cmpd="sng" algn="ctr">
+                      <a:noFill/>
+                    </a:lnL>
+                    <a:lnR w="0" cap="flat" cmpd="sng" algn="ctr">
+                      <a:noFill/>
+                    </a:lnR>
+                    <a:lnT w="0" cap="flat" cmpd="sng" algn="ctr">
+                      <a:noFill/>
+                    </a:lnT>
+                    <a:lnB w="0" cap="flat" cmpd="sng" algn="ctr">
+                      <a:noFill/>
+                    </a:lnB>
+                  </a:tcPr>
+                </a:tc>
+                <a:tc>
+                  <a:txBody>
+                    <a:bodyPr/>
+                    <a:lstStyle/>
+                    <a:p>
+                      <a:pPr algn="l" indent="0" marL="0">
+                        <a:lnSpc>
+                          <a:spcPts val="2640"/>
+                        </a:lnSpc>
+                        <a:buNone/>
+                      </a:pPr>
+                      <a:r>
+                        <a:rPr lang="ja-JP" altLang="en-US" sz="2200" dirty="0">
+                          <a:solidFill>
+                            <a:srgbClr val="262626"/>
+                          </a:solidFill>
+                          <a:latin typeface="メイリオ" pitchFamily="34" charset="0"/>
+                          <a:ea typeface="メイリオ" pitchFamily="34" charset="-122"/>
+                          <a:cs typeface="メイリオ" pitchFamily="34" charset="-120"/>
+                        </a:rPr>
+                        <a:t>全身麻酔（区域麻酔より）</a:t>
+                      </a:r>
+                      <a:endParaRPr lang="en-US" sz="2200" dirty="0">
+                        <a:latin typeface="メイリオ" charset="0"/>
+                        <a:ea typeface="メイリオ" charset="0"/>
+                        <a:cs typeface="メイリオ" charset="0"/>
+                      </a:endParaRPr>
+                    </a:p>
+                  </a:txBody>
+                  <a:tcPr marL="0" marR="0" marT="0" marB="177394" anchor="t">
+                    <a:lnL w="0" cap="flat" cmpd="sng" algn="ctr">
+                      <a:noFill/>
+                    </a:lnL>
+                    <a:lnR w="0" cap="flat" cmpd="sng" algn="ctr">
+                      <a:noFill/>
+                    </a:lnR>
+                    <a:lnT w="0" cap="flat" cmpd="sng" algn="ctr">
+                      <a:noFill/>
+                    </a:lnT>
+                    <a:lnB w="0" cap="flat" cmpd="sng" algn="ctr">
+                      <a:noFill/>
+                    </a:lnB>
+                  </a:tcPr>
+                </a:tc>
+              </a:tr>
+              <a:tr h="335585">
+                <a:tc>
+                  <a:txBody>
+                    <a:bodyPr/>
+                    <a:lstStyle/>
+                    <a:p>
+                      <a:pPr algn="l" indent="0" marL="0">
+                        <a:lnSpc>
+                          <a:spcPts val="2640"/>
+                        </a:lnSpc>
+                        <a:buNone/>
+                      </a:pPr>
+                      <a:r>
+                        <a:rPr lang="ja-JP" altLang="en-US" sz="2200" dirty="0">
+                          <a:solidFill>
+                            <a:srgbClr val="262626"/>
+                          </a:solidFill>
+                          <a:latin typeface="メイリオ" pitchFamily="34" charset="0"/>
+                          <a:ea typeface="メイリオ" pitchFamily="34" charset="-122"/>
+                          <a:cs typeface="メイリオ" pitchFamily="34" charset="-120"/>
+                        </a:rPr>
+                        <a:t>•</a:t>
+                      </a:r>
+                      <a:endParaRPr lang="en-US" sz="2200" dirty="0">
+                        <a:latin typeface="メイリオ" charset="0"/>
+                        <a:ea typeface="メイリオ" charset="0"/>
+                        <a:cs typeface="メイリオ" charset="0"/>
+                      </a:endParaRPr>
+                    </a:p>
+                  </a:txBody>
+                  <a:tcPr marL="0" marR="0" marT="0" marB="0" anchor="t">
+                    <a:lnL w="0" cap="flat" cmpd="sng" algn="ctr">
+                      <a:noFill/>
+                    </a:lnL>
+                    <a:lnR w="0" cap="flat" cmpd="sng" algn="ctr">
+                      <a:noFill/>
+                    </a:lnR>
+                    <a:lnT w="0" cap="flat" cmpd="sng" algn="ctr">
+                      <a:noFill/>
+                    </a:lnT>
+                    <a:lnB w="0" cap="flat" cmpd="sng" algn="ctr">
+                      <a:noFill/>
+                    </a:lnB>
+                  </a:tcPr>
+                </a:tc>
+                <a:tc>
+                  <a:txBody>
+                    <a:bodyPr/>
+                    <a:lstStyle/>
+                    <a:p>
+                      <a:pPr algn="l" indent="0" marL="0">
+                        <a:lnSpc>
+                          <a:spcPts val="2640"/>
+                        </a:lnSpc>
+                        <a:buNone/>
+                      </a:pPr>
+                      <a:r>
+                        <a:rPr lang="ja-JP" altLang="en-US" sz="2200" dirty="0">
+                          <a:solidFill>
+                            <a:srgbClr val="262626"/>
+                          </a:solidFill>
+                          <a:latin typeface="メイリオ" pitchFamily="34" charset="0"/>
+                          <a:ea typeface="メイリオ" pitchFamily="34" charset="-122"/>
+                          <a:cs typeface="メイリオ" pitchFamily="34" charset="-120"/>
+                        </a:rPr>
+                        <a:t>残存筋弛緩（長時間作用型の薬）</a:t>
+                      </a:r>
+                      <a:endParaRPr lang="en-US" sz="2200" dirty="0">
+                        <a:latin typeface="メイリオ" charset="0"/>
+                        <a:ea typeface="メイリオ" charset="0"/>
+                        <a:cs typeface="メイリオ" charset="0"/>
+                      </a:endParaRPr>
+                    </a:p>
+                  </a:txBody>
+                  <a:tcPr marL="0" marR="0" marT="0" marB="0" anchor="t">
+                    <a:lnL w="0" cap="flat" cmpd="sng" algn="ctr">
+                      <a:noFill/>
+                    </a:lnL>
+                    <a:lnR w="0" cap="flat" cmpd="sng" algn="ctr">
+                      <a:noFill/>
+                    </a:lnR>
+                    <a:lnT w="0" cap="flat" cmpd="sng" algn="ctr">
+                      <a:noFill/>
+                    </a:lnT>
+                    <a:lnB w="0" cap="flat" cmpd="sng" algn="ctr">
+                      <a:noFill/>
+                    </a:lnB>
+                  </a:tcPr>
+                </a:tc>
+              </a:tr>
+            </a:tbl>
+          </a:graphicData>
+        </a:graphic>
+      </p:graphicFrame>
+      <p:sp>
+        <p:nvSpPr>
+          <p:cNvPr id="17" name="Shape 13"/>
+          <p:cNvSpPr/>
           <p:nvPr/>
         </p:nvSpPr>
         <p:spPr>
           <a:xfrm>
-            <a:off x="6336792" y="2249424"/>
-            <a:ext cx="5221224" cy="2514600"/>
-          </a:xfrm>
-          <a:prstGeom prst="rect">
-            <a:avLst/>
-          </a:prstGeom>
-          <a:noFill/>
-          <a:ln/>
-        </p:spPr>
-        <p:txBody>
-          <a:bodyPr wrap="square" lIns="0" tIns="0" rIns="0" bIns="0" rtlCol="0" anchor="t"/>
-          <a:lstStyle/>
-          <a:p>
-            <a:pPr algn="l" marL="254000" indent="-254000">
-              <a:spcAft>
-                <a:spcPts val="800"/>
-              </a:spcAft>
-              <a:buSzPct val="100000"/>
-              <a:buChar char="•"/>
-            </a:pPr>
-            <a:r>
-              <a:rPr lang="ja-JP" altLang="en-US" sz="2200" dirty="0">
-                <a:solidFill>
-                  <a:srgbClr val="262626"/>
-                </a:solidFill>
-                <a:latin typeface="メイリオ" pitchFamily="34" charset="0"/>
-                <a:ea typeface="メイリオ" pitchFamily="34" charset="-122"/>
-                <a:cs typeface="メイリオ" pitchFamily="34" charset="-120"/>
-              </a:rPr>
-              <a:t>上腹部・胸腔内の切開</a:t>
-            </a:r>
-            <a:endParaRPr lang="ja-JP" sz="2200" dirty="0"/>
-          </a:p>
-          <a:p>
-            <a:pPr algn="l" marL="254000" indent="-254000">
-              <a:spcAft>
-                <a:spcPts val="800"/>
-              </a:spcAft>
-              <a:buSzPct val="100000"/>
-              <a:buChar char="•"/>
-            </a:pPr>
-            <a:r>
-              <a:rPr lang="ja-JP" altLang="en-US" sz="2200" dirty="0">
-                <a:solidFill>
-                  <a:srgbClr val="262626"/>
-                </a:solidFill>
-                <a:latin typeface="メイリオ" pitchFamily="34" charset="0"/>
-                <a:ea typeface="メイリオ" pitchFamily="34" charset="-122"/>
-                <a:cs typeface="メイリオ" pitchFamily="34" charset="-120"/>
-              </a:rPr>
-              <a:t>長時間手術（2 時間超から）</a:t>
-            </a:r>
-            <a:endParaRPr lang="ja-JP" sz="2200" dirty="0"/>
-          </a:p>
-          <a:p>
-            <a:pPr algn="l" marL="254000" indent="-254000">
-              <a:spcAft>
-                <a:spcPts val="800"/>
-              </a:spcAft>
-              <a:buSzPct val="100000"/>
-              <a:buChar char="•"/>
-            </a:pPr>
-            <a:r>
-              <a:rPr lang="ja-JP" altLang="en-US" sz="2200" dirty="0">
-                <a:solidFill>
-                  <a:srgbClr val="262626"/>
-                </a:solidFill>
-                <a:latin typeface="メイリオ" pitchFamily="34" charset="0"/>
-                <a:ea typeface="メイリオ" pitchFamily="34" charset="-122"/>
-                <a:cs typeface="メイリオ" pitchFamily="34" charset="-120"/>
-              </a:rPr>
-              <a:t>緊急手術</a:t>
-            </a:r>
-            <a:endParaRPr lang="ja-JP" sz="2200" dirty="0"/>
-          </a:p>
-          <a:p>
-            <a:pPr algn="l" marL="254000" indent="-254000">
-              <a:spcAft>
-                <a:spcPts val="800"/>
-              </a:spcAft>
-              <a:buSzPct val="100000"/>
-              <a:buChar char="•"/>
-            </a:pPr>
-            <a:r>
-              <a:rPr lang="ja-JP" altLang="en-US" sz="2200" dirty="0">
-                <a:solidFill>
-                  <a:srgbClr val="262626"/>
-                </a:solidFill>
-                <a:latin typeface="メイリオ" pitchFamily="34" charset="0"/>
-                <a:ea typeface="メイリオ" pitchFamily="34" charset="-122"/>
-                <a:cs typeface="メイリオ" pitchFamily="34" charset="-120"/>
-              </a:rPr>
-              <a:t>全身麻酔（区域麻酔より）</a:t>
-            </a:r>
-            <a:endParaRPr lang="ja-JP" sz="2200" dirty="0"/>
-          </a:p>
-          <a:p>
-            <a:pPr algn="l" marL="254000" indent="-254000">
-              <a:buSzPct val="100000"/>
-              <a:buChar char="•"/>
-            </a:pPr>
-            <a:r>
-              <a:rPr lang="ja-JP" altLang="en-US" sz="2200" dirty="0">
-                <a:solidFill>
-                  <a:srgbClr val="262626"/>
-                </a:solidFill>
-                <a:latin typeface="メイリオ" pitchFamily="34" charset="0"/>
-                <a:ea typeface="メイリオ" pitchFamily="34" charset="-122"/>
-                <a:cs typeface="メイリオ" pitchFamily="34" charset="-120"/>
-              </a:rPr>
-              <a:t>残存筋弛緩（長時間作用型の薬）</a:t>
-            </a:r>
-            <a:endParaRPr lang="ja-JP" sz="2200" dirty="0"/>
-          </a:p>
-        </p:txBody>
-      </p:sp>
-      <p:sp>
-        <p:nvSpPr>
-          <p:cNvPr id="17" name="Shape 15"/>
-          <p:cNvSpPr/>
-          <p:nvPr/>
-        </p:nvSpPr>
-        <p:spPr>
-          <a:xfrm>
-            <a:off x="502920" y="5148072"/>
+            <a:off x="502920" y="5029200"/>
             <a:ext cx="11183112" cy="676656"/>
           </a:xfrm>
           <a:prstGeom prst="roundRect">
@@ -2947,13 +3659,13 @@
       </p:sp>
       <p:sp>
         <p:nvSpPr>
-          <p:cNvPr id="18" name="Text 16"/>
+          <p:cNvPr id="18" name="Text 14"/>
           <p:cNvSpPr txBox="1"/>
           <p:nvPr/>
         </p:nvSpPr>
         <p:spPr>
           <a:xfrm>
-            <a:off x="576072" y="5221224"/>
+            <a:off x="576072" y="5102352"/>
             <a:ext cx="11036808" cy="530352"/>
           </a:xfrm>
           <a:prstGeom prst="rect">
@@ -6384,190 +7096,537 @@
           </a:p>
         </p:txBody>
       </p:sp>
-      <p:sp>
-        <p:nvSpPr>
-          <p:cNvPr id="13" name="Text 11"/>
-          <p:cNvSpPr txBox="1"/>
-          <p:nvPr/>
-        </p:nvSpPr>
-        <p:spPr>
-          <a:xfrm>
-            <a:off x="630936" y="2231136"/>
-            <a:ext cx="5266944" cy="3584448"/>
-          </a:xfrm>
-          <a:prstGeom prst="rect">
-            <a:avLst/>
-          </a:prstGeom>
-          <a:noFill/>
-          <a:ln/>
-        </p:spPr>
-        <p:txBody>
-          <a:bodyPr wrap="square" lIns="0" tIns="0" rIns="0" bIns="0" rtlCol="0" anchor="t"/>
-          <a:lstStyle/>
-          <a:p>
-            <a:pPr algn="l" marL="254000" indent="-254000">
-              <a:lnSpc>
-                <a:spcPct val="80000"/>
-              </a:lnSpc>
-              <a:buSzPct val="100000"/>
-              <a:buChar char="•"/>
-            </a:pPr>
-            <a:r>
-              <a:rPr lang="ja-JP" altLang="en-US" sz="2200" dirty="0">
-                <a:solidFill>
-                  <a:srgbClr val="262626"/>
-                </a:solidFill>
-                <a:latin typeface="メイリオ" pitchFamily="34" charset="0"/>
-                <a:ea typeface="メイリオ" pitchFamily="34" charset="-122"/>
-                <a:cs typeface="メイリオ" pitchFamily="34" charset="-120"/>
-              </a:rPr>
-              <a:t>吸入薬は当日も続ける</a:t>
-            </a:r>
-            <a:endParaRPr lang="ja-JP" sz="2200" dirty="0"/>
-          </a:p>
-          <a:p>
-            <a:pPr algn="l" marL="254000" indent="-254000">
-              <a:lnSpc>
-                <a:spcPct val="80000"/>
-              </a:lnSpc>
-              <a:spcAft>
-                <a:spcPts val="1200"/>
-              </a:spcAft>
-              <a:buSzPct val="100000"/>
-              <a:buChar char="　"/>
-            </a:pPr>
-            <a:r>
-              <a:rPr lang="ja-JP" altLang="en-US" sz="2200" dirty="0">
-                <a:solidFill>
-                  <a:srgbClr val="262626"/>
-                </a:solidFill>
-                <a:latin typeface="メイリオ" pitchFamily="34" charset="0"/>
-                <a:ea typeface="メイリオ" pitchFamily="34" charset="-122"/>
-                <a:cs typeface="メイリオ" pitchFamily="34" charset="-120"/>
-              </a:rPr>
-              <a:t>（持参させる）</a:t>
-            </a:r>
-            <a:endParaRPr lang="ja-JP" sz="2200" dirty="0"/>
-          </a:p>
-          <a:p>
-            <a:pPr algn="l" marL="254000" indent="-254000">
-              <a:lnSpc>
-                <a:spcPct val="80000"/>
-              </a:lnSpc>
-              <a:spcAft>
-                <a:spcPts val="1200"/>
-              </a:spcAft>
-              <a:buSzPct val="100000"/>
-              <a:buChar char="•"/>
-            </a:pPr>
-            <a:r>
-              <a:rPr lang="ja-JP" altLang="en-US" sz="2200" dirty="0">
-                <a:solidFill>
-                  <a:srgbClr val="262626"/>
-                </a:solidFill>
-                <a:latin typeface="メイリオ" pitchFamily="34" charset="0"/>
-                <a:ea typeface="メイリオ" pitchFamily="34" charset="-122"/>
-                <a:cs typeface="メイリオ" pitchFamily="34" charset="-120"/>
-              </a:rPr>
-              <a:t>増悪中は延期。症状が元に戻るまで</a:t>
-            </a:r>
-            <a:endParaRPr lang="ja-JP" sz="2200" dirty="0"/>
-          </a:p>
-          <a:p>
-            <a:pPr algn="l" marL="254000" indent="-254000">
-              <a:lnSpc>
-                <a:spcPct val="80000"/>
-              </a:lnSpc>
-              <a:buSzPct val="100000"/>
-              <a:buChar char="•"/>
-            </a:pPr>
-            <a:r>
-              <a:rPr lang="ja-JP" altLang="en-US" sz="2200" dirty="0">
-                <a:solidFill>
-                  <a:srgbClr val="262626"/>
-                </a:solidFill>
-                <a:latin typeface="メイリオ" pitchFamily="34" charset="0"/>
-                <a:ea typeface="メイリオ" pitchFamily="34" charset="-122"/>
-                <a:cs typeface="メイリオ" pitchFamily="34" charset="-120"/>
-              </a:rPr>
-              <a:t>未治療の COPD は</a:t>
-            </a:r>
-            <a:endParaRPr lang="ja-JP" sz="2200" dirty="0"/>
-          </a:p>
-          <a:p>
-            <a:pPr algn="l" marL="254000" indent="-254000">
-              <a:lnSpc>
-                <a:spcPct val="80000"/>
-              </a:lnSpc>
-              <a:spcAft>
-                <a:spcPts val="1200"/>
-              </a:spcAft>
-              <a:buSzPct val="100000"/>
-              <a:buChar char="　"/>
-            </a:pPr>
-            <a:r>
-              <a:rPr lang="ja-JP" altLang="en-US" sz="2200" dirty="0">
-                <a:solidFill>
-                  <a:srgbClr val="262626"/>
-                </a:solidFill>
-                <a:latin typeface="メイリオ" pitchFamily="34" charset="0"/>
-                <a:ea typeface="メイリオ" pitchFamily="34" charset="-122"/>
-                <a:cs typeface="メイリオ" pitchFamily="34" charset="-120"/>
-              </a:rPr>
-              <a:t>術前に治療を始める</a:t>
-            </a:r>
-            <a:endParaRPr lang="ja-JP" sz="2200" dirty="0"/>
-          </a:p>
-          <a:p>
-            <a:pPr algn="l" marL="254000" indent="-254000">
-              <a:lnSpc>
-                <a:spcPct val="80000"/>
-              </a:lnSpc>
-              <a:spcAft>
-                <a:spcPts val="1200"/>
-              </a:spcAft>
-              <a:buSzPct val="100000"/>
-              <a:buChar char="•"/>
-            </a:pPr>
-            <a:r>
-              <a:rPr lang="ja-JP" altLang="en-US" sz="2200" dirty="0">
-                <a:solidFill>
-                  <a:srgbClr val="262626"/>
-                </a:solidFill>
-                <a:latin typeface="メイリオ" pitchFamily="34" charset="0"/>
-                <a:ea typeface="メイリオ" pitchFamily="34" charset="-122"/>
-                <a:cs typeface="メイリオ" pitchFamily="34" charset="-120"/>
-              </a:rPr>
-              <a:t>肺機能検査はルーチンには不要</a:t>
-            </a:r>
-            <a:endParaRPr lang="ja-JP" sz="2200" dirty="0"/>
-          </a:p>
-          <a:p>
-            <a:pPr algn="l" marL="254000" indent="-254000">
-              <a:lnSpc>
-                <a:spcPct val="80000"/>
-              </a:lnSpc>
-              <a:buSzPct val="100000"/>
-              <a:buChar char="•"/>
-            </a:pPr>
-            <a:r>
-              <a:rPr lang="ja-JP" altLang="en-US" sz="2200" dirty="0">
-                <a:solidFill>
-                  <a:srgbClr val="262626"/>
-                </a:solidFill>
-                <a:latin typeface="メイリオ" pitchFamily="34" charset="0"/>
-                <a:ea typeface="メイリオ" pitchFamily="34" charset="-122"/>
-                <a:cs typeface="メイリオ" pitchFamily="34" charset="-120"/>
-              </a:rPr>
-              <a:t>上腹部・長時間手術でリスクが高い</a:t>
-            </a:r>
-            <a:endParaRPr lang="ja-JP" sz="2200" dirty="0"/>
-          </a:p>
-        </p:txBody>
-      </p:sp>
-      <p:sp>
-        <p:nvSpPr>
-          <p:cNvPr id="14" name="Shape 12"/>
+      <p:graphicFrame>
+        <p:nvGraphicFramePr>
+          <p:cNvPr id="13" name="Table 0"/>
+          <p:cNvGraphicFramePr>
+            <a:graphicFrameLocks noGrp="1"/>
+          </p:cNvGraphicFramePr>
+          <p:nvPr>
+            <p:extLst>
+              <p:ext uri="{D42A27DB-BD31-4B8C-83A1-F6EECF244321}">
+                <p14:modId xmlns:p14="http://schemas.microsoft.com/office/powerpoint/2010/main" val="1579011935"/>
+              </p:ext>
+            </p:extLst>
+          </p:nvPr>
+        </p:nvGraphicFramePr>
+        <p:xfrm>
+          <a:off x="630936" y="2231136"/>
+          <a:ext cx="5266944" cy="914400"/>
+        </p:xfrm>
+        <a:graphic>
+          <a:graphicData uri="http://schemas.openxmlformats.org/drawingml/2006/table">
+            <a:tbl>
+              <a:tblPr/>
+              <a:tblGrid>
+                <a:gridCol w="256032"/>
+                <a:gridCol w="5010912"/>
+              </a:tblGrid>
+              <a:tr h="822960">
+                <a:tc>
+                  <a:txBody>
+                    <a:bodyPr/>
+                    <a:lstStyle/>
+                    <a:p>
+                      <a:pPr algn="l" indent="0" marL="0">
+                        <a:lnSpc>
+                          <a:spcPts val="2640"/>
+                        </a:lnSpc>
+                        <a:buNone/>
+                      </a:pPr>
+                      <a:r>
+                        <a:rPr lang="ja-JP" altLang="en-US" sz="2200" dirty="0">
+                          <a:solidFill>
+                            <a:srgbClr val="262626"/>
+                          </a:solidFill>
+                          <a:latin typeface="メイリオ" pitchFamily="34" charset="0"/>
+                          <a:ea typeface="メイリオ" pitchFamily="34" charset="-122"/>
+                          <a:cs typeface="メイリオ" pitchFamily="34" charset="-120"/>
+                        </a:rPr>
+                        <a:t>•</a:t>
+                      </a:r>
+                      <a:endParaRPr lang="en-US" sz="2200" dirty="0">
+                        <a:latin typeface="メイリオ" charset="0"/>
+                        <a:ea typeface="メイリオ" charset="0"/>
+                        <a:cs typeface="メイリオ" charset="0"/>
+                      </a:endParaRPr>
+                    </a:p>
+                  </a:txBody>
+                  <a:tcPr marL="0" marR="0" marT="0" marB="152705" anchor="t">
+                    <a:lnL w="0" cap="flat" cmpd="sng" algn="ctr">
+                      <a:noFill/>
+                    </a:lnL>
+                    <a:lnR w="0" cap="flat" cmpd="sng" algn="ctr">
+                      <a:noFill/>
+                    </a:lnR>
+                    <a:lnT w="0" cap="flat" cmpd="sng" algn="ctr">
+                      <a:noFill/>
+                    </a:lnT>
+                    <a:lnB w="0" cap="flat" cmpd="sng" algn="ctr">
+                      <a:noFill/>
+                    </a:lnB>
+                  </a:tcPr>
+                </a:tc>
+                <a:tc>
+                  <a:txBody>
+                    <a:bodyPr/>
+                    <a:lstStyle/>
+                    <a:p>
+                      <a:pPr algn="l" indent="0" marL="0">
+                        <a:lnSpc>
+                          <a:spcPts val="2640"/>
+                        </a:lnSpc>
+                        <a:buNone/>
+                      </a:pPr>
+                      <a:r>
+                        <a:rPr lang="ja-JP" altLang="en-US" sz="2200" dirty="0">
+                          <a:solidFill>
+                            <a:srgbClr val="262626"/>
+                          </a:solidFill>
+                          <a:latin typeface="メイリオ" pitchFamily="34" charset="0"/>
+                          <a:ea typeface="メイリオ" pitchFamily="34" charset="-122"/>
+                          <a:cs typeface="メイリオ" pitchFamily="34" charset="-120"/>
+                        </a:rPr>
+                        <a:t>吸入薬は当日も続ける</a:t>
+                      </a:r>
+                      <a:endParaRPr lang="en-US" sz="2200" dirty="0">
+                        <a:latin typeface="メイリオ" charset="0"/>
+                        <a:ea typeface="メイリオ" charset="0"/>
+                        <a:cs typeface="メイリオ" charset="0"/>
+                      </a:endParaRPr>
+                    </a:p>
+                    <a:p>
+                      <a:pPr algn="l" indent="0" marL="0">
+                        <a:lnSpc>
+                          <a:spcPts val="2640"/>
+                        </a:lnSpc>
+                        <a:buNone/>
+                      </a:pPr>
+                      <a:r>
+                        <a:rPr lang="ja-JP" altLang="en-US" sz="2200" dirty="0">
+                          <a:solidFill>
+                            <a:srgbClr val="262626"/>
+                          </a:solidFill>
+                          <a:latin typeface="メイリオ" pitchFamily="34" charset="0"/>
+                          <a:ea typeface="メイリオ" pitchFamily="34" charset="-122"/>
+                          <a:cs typeface="メイリオ" pitchFamily="34" charset="-120"/>
+                        </a:rPr>
+                        <a:t>（持参させる）</a:t>
+                      </a:r>
+                      <a:endParaRPr lang="en-US" sz="2200" dirty="0">
+                        <a:latin typeface="メイリオ" charset="0"/>
+                        <a:ea typeface="メイリオ" charset="0"/>
+                        <a:cs typeface="メイリオ" charset="0"/>
+                      </a:endParaRPr>
+                    </a:p>
+                  </a:txBody>
+                  <a:tcPr marL="0" marR="0" marT="0" marB="152705" anchor="t">
+                    <a:lnL w="0" cap="flat" cmpd="sng" algn="ctr">
+                      <a:noFill/>
+                    </a:lnL>
+                    <a:lnR w="0" cap="flat" cmpd="sng" algn="ctr">
+                      <a:noFill/>
+                    </a:lnR>
+                    <a:lnT w="0" cap="flat" cmpd="sng" algn="ctr">
+                      <a:noFill/>
+                    </a:lnT>
+                    <a:lnB w="0" cap="flat" cmpd="sng" algn="ctr">
+                      <a:noFill/>
+                    </a:lnB>
+                  </a:tcPr>
+                </a:tc>
+              </a:tr>
+              <a:tr h="488290">
+                <a:tc>
+                  <a:txBody>
+                    <a:bodyPr/>
+                    <a:lstStyle/>
+                    <a:p>
+                      <a:pPr algn="l" indent="0" marL="0">
+                        <a:lnSpc>
+                          <a:spcPts val="2640"/>
+                        </a:lnSpc>
+                        <a:buNone/>
+                      </a:pPr>
+                      <a:r>
+                        <a:rPr lang="ja-JP" altLang="en-US" sz="2200" dirty="0">
+                          <a:solidFill>
+                            <a:srgbClr val="262626"/>
+                          </a:solidFill>
+                          <a:latin typeface="メイリオ" pitchFamily="34" charset="0"/>
+                          <a:ea typeface="メイリオ" pitchFamily="34" charset="-122"/>
+                          <a:cs typeface="メイリオ" pitchFamily="34" charset="-120"/>
+                        </a:rPr>
+                        <a:t>•</a:t>
+                      </a:r>
+                      <a:endParaRPr lang="en-US" sz="2200" dirty="0">
+                        <a:latin typeface="メイリオ" charset="0"/>
+                        <a:ea typeface="メイリオ" charset="0"/>
+                        <a:cs typeface="メイリオ" charset="0"/>
+                      </a:endParaRPr>
+                    </a:p>
+                  </a:txBody>
+                  <a:tcPr marL="0" marR="0" marT="0" marB="152705" anchor="t">
+                    <a:lnL w="0" cap="flat" cmpd="sng" algn="ctr">
+                      <a:noFill/>
+                    </a:lnL>
+                    <a:lnR w="0" cap="flat" cmpd="sng" algn="ctr">
+                      <a:noFill/>
+                    </a:lnR>
+                    <a:lnT w="0" cap="flat" cmpd="sng" algn="ctr">
+                      <a:noFill/>
+                    </a:lnT>
+                    <a:lnB w="0" cap="flat" cmpd="sng" algn="ctr">
+                      <a:noFill/>
+                    </a:lnB>
+                  </a:tcPr>
+                </a:tc>
+                <a:tc>
+                  <a:txBody>
+                    <a:bodyPr/>
+                    <a:lstStyle/>
+                    <a:p>
+                      <a:pPr algn="l" indent="0" marL="0">
+                        <a:lnSpc>
+                          <a:spcPts val="2640"/>
+                        </a:lnSpc>
+                        <a:buNone/>
+                      </a:pPr>
+                      <a:r>
+                        <a:rPr lang="ja-JP" altLang="en-US" sz="2200" dirty="0">
+                          <a:solidFill>
+                            <a:srgbClr val="262626"/>
+                          </a:solidFill>
+                          <a:latin typeface="メイリオ" pitchFamily="34" charset="0"/>
+                          <a:ea typeface="メイリオ" pitchFamily="34" charset="-122"/>
+                          <a:cs typeface="メイリオ" pitchFamily="34" charset="-120"/>
+                        </a:rPr>
+                        <a:t>増悪中は延期。症状が元に戻るまで</a:t>
+                      </a:r>
+                      <a:endParaRPr lang="en-US" sz="2200" dirty="0">
+                        <a:latin typeface="メイリオ" charset="0"/>
+                        <a:ea typeface="メイリオ" charset="0"/>
+                        <a:cs typeface="メイリオ" charset="0"/>
+                      </a:endParaRPr>
+                    </a:p>
+                  </a:txBody>
+                  <a:tcPr marL="0" marR="0" marT="0" marB="152705" anchor="t">
+                    <a:lnL w="0" cap="flat" cmpd="sng" algn="ctr">
+                      <a:noFill/>
+                    </a:lnL>
+                    <a:lnR w="0" cap="flat" cmpd="sng" algn="ctr">
+                      <a:noFill/>
+                    </a:lnR>
+                    <a:lnT w="0" cap="flat" cmpd="sng" algn="ctr">
+                      <a:noFill/>
+                    </a:lnT>
+                    <a:lnB w="0" cap="flat" cmpd="sng" algn="ctr">
+                      <a:noFill/>
+                    </a:lnB>
+                  </a:tcPr>
+                </a:tc>
+              </a:tr>
+              <a:tr h="822960">
+                <a:tc>
+                  <a:txBody>
+                    <a:bodyPr/>
+                    <a:lstStyle/>
+                    <a:p>
+                      <a:pPr algn="l" indent="0" marL="0">
+                        <a:lnSpc>
+                          <a:spcPts val="2640"/>
+                        </a:lnSpc>
+                        <a:buNone/>
+                      </a:pPr>
+                      <a:r>
+                        <a:rPr lang="ja-JP" altLang="en-US" sz="2200" dirty="0">
+                          <a:solidFill>
+                            <a:srgbClr val="262626"/>
+                          </a:solidFill>
+                          <a:latin typeface="メイリオ" pitchFamily="34" charset="0"/>
+                          <a:ea typeface="メイリオ" pitchFamily="34" charset="-122"/>
+                          <a:cs typeface="メイリオ" pitchFamily="34" charset="-120"/>
+                        </a:rPr>
+                        <a:t>•</a:t>
+                      </a:r>
+                      <a:endParaRPr lang="en-US" sz="2200" dirty="0">
+                        <a:latin typeface="メイリオ" charset="0"/>
+                        <a:ea typeface="メイリオ" charset="0"/>
+                        <a:cs typeface="メイリオ" charset="0"/>
+                      </a:endParaRPr>
+                    </a:p>
+                  </a:txBody>
+                  <a:tcPr marL="0" marR="0" marT="0" marB="152705" anchor="t">
+                    <a:lnL w="0" cap="flat" cmpd="sng" algn="ctr">
+                      <a:noFill/>
+                    </a:lnL>
+                    <a:lnR w="0" cap="flat" cmpd="sng" algn="ctr">
+                      <a:noFill/>
+                    </a:lnR>
+                    <a:lnT w="0" cap="flat" cmpd="sng" algn="ctr">
+                      <a:noFill/>
+                    </a:lnT>
+                    <a:lnB w="0" cap="flat" cmpd="sng" algn="ctr">
+                      <a:noFill/>
+                    </a:lnB>
+                  </a:tcPr>
+                </a:tc>
+                <a:tc>
+                  <a:txBody>
+                    <a:bodyPr/>
+                    <a:lstStyle/>
+                    <a:p>
+                      <a:pPr algn="l" indent="0" marL="0">
+                        <a:lnSpc>
+                          <a:spcPts val="2640"/>
+                        </a:lnSpc>
+                        <a:buNone/>
+                      </a:pPr>
+                      <a:r>
+                        <a:rPr lang="ja-JP" altLang="en-US" sz="2200" dirty="0">
+                          <a:solidFill>
+                            <a:srgbClr val="262626"/>
+                          </a:solidFill>
+                          <a:latin typeface="メイリオ" pitchFamily="34" charset="0"/>
+                          <a:ea typeface="メイリオ" pitchFamily="34" charset="-122"/>
+                          <a:cs typeface="メイリオ" pitchFamily="34" charset="-120"/>
+                        </a:rPr>
+                        <a:t>未治療の COPD は</a:t>
+                      </a:r>
+                      <a:endParaRPr lang="en-US" sz="2200" dirty="0">
+                        <a:latin typeface="メイリオ" charset="0"/>
+                        <a:ea typeface="メイリオ" charset="0"/>
+                        <a:cs typeface="メイリオ" charset="0"/>
+                      </a:endParaRPr>
+                    </a:p>
+                    <a:p>
+                      <a:pPr algn="l" indent="0" marL="0">
+                        <a:lnSpc>
+                          <a:spcPts val="2640"/>
+                        </a:lnSpc>
+                        <a:buNone/>
+                      </a:pPr>
+                      <a:r>
+                        <a:rPr lang="ja-JP" altLang="en-US" sz="2200" dirty="0">
+                          <a:solidFill>
+                            <a:srgbClr val="262626"/>
+                          </a:solidFill>
+                          <a:latin typeface="メイリオ" pitchFamily="34" charset="0"/>
+                          <a:ea typeface="メイリオ" pitchFamily="34" charset="-122"/>
+                          <a:cs typeface="メイリオ" pitchFamily="34" charset="-120"/>
+                        </a:rPr>
+                        <a:t>術前に治療を始める</a:t>
+                      </a:r>
+                      <a:endParaRPr lang="en-US" sz="2200" dirty="0">
+                        <a:latin typeface="メイリオ" charset="0"/>
+                        <a:ea typeface="メイリオ" charset="0"/>
+                        <a:cs typeface="メイリオ" charset="0"/>
+                      </a:endParaRPr>
+                    </a:p>
+                  </a:txBody>
+                  <a:tcPr marL="0" marR="0" marT="0" marB="152705" anchor="t">
+                    <a:lnL w="0" cap="flat" cmpd="sng" algn="ctr">
+                      <a:noFill/>
+                    </a:lnL>
+                    <a:lnR w="0" cap="flat" cmpd="sng" algn="ctr">
+                      <a:noFill/>
+                    </a:lnR>
+                    <a:lnT w="0" cap="flat" cmpd="sng" algn="ctr">
+                      <a:noFill/>
+                    </a:lnT>
+                    <a:lnB w="0" cap="flat" cmpd="sng" algn="ctr">
+                      <a:noFill/>
+                    </a:lnB>
+                  </a:tcPr>
+                </a:tc>
+              </a:tr>
+              <a:tr h="488290">
+                <a:tc>
+                  <a:txBody>
+                    <a:bodyPr/>
+                    <a:lstStyle/>
+                    <a:p>
+                      <a:pPr algn="l" indent="0" marL="0">
+                        <a:lnSpc>
+                          <a:spcPts val="2640"/>
+                        </a:lnSpc>
+                        <a:buNone/>
+                      </a:pPr>
+                      <a:r>
+                        <a:rPr lang="ja-JP" altLang="en-US" sz="2200" dirty="0">
+                          <a:solidFill>
+                            <a:srgbClr val="262626"/>
+                          </a:solidFill>
+                          <a:latin typeface="メイリオ" pitchFamily="34" charset="0"/>
+                          <a:ea typeface="メイリオ" pitchFamily="34" charset="-122"/>
+                          <a:cs typeface="メイリオ" pitchFamily="34" charset="-120"/>
+                        </a:rPr>
+                        <a:t>•</a:t>
+                      </a:r>
+                      <a:endParaRPr lang="en-US" sz="2200" dirty="0">
+                        <a:latin typeface="メイリオ" charset="0"/>
+                        <a:ea typeface="メイリオ" charset="0"/>
+                        <a:cs typeface="メイリオ" charset="0"/>
+                      </a:endParaRPr>
+                    </a:p>
+                  </a:txBody>
+                  <a:tcPr marL="0" marR="0" marT="0" marB="152705" anchor="t">
+                    <a:lnL w="0" cap="flat" cmpd="sng" algn="ctr">
+                      <a:noFill/>
+                    </a:lnL>
+                    <a:lnR w="0" cap="flat" cmpd="sng" algn="ctr">
+                      <a:noFill/>
+                    </a:lnR>
+                    <a:lnT w="0" cap="flat" cmpd="sng" algn="ctr">
+                      <a:noFill/>
+                    </a:lnT>
+                    <a:lnB w="0" cap="flat" cmpd="sng" algn="ctr">
+                      <a:noFill/>
+                    </a:lnB>
+                  </a:tcPr>
+                </a:tc>
+                <a:tc>
+                  <a:txBody>
+                    <a:bodyPr/>
+                    <a:lstStyle/>
+                    <a:p>
+                      <a:pPr algn="l" indent="0" marL="0">
+                        <a:lnSpc>
+                          <a:spcPts val="2640"/>
+                        </a:lnSpc>
+                        <a:buNone/>
+                      </a:pPr>
+                      <a:r>
+                        <a:rPr lang="ja-JP" altLang="en-US" sz="2200" dirty="0">
+                          <a:solidFill>
+                            <a:srgbClr val="262626"/>
+                          </a:solidFill>
+                          <a:latin typeface="メイリオ" pitchFamily="34" charset="0"/>
+                          <a:ea typeface="メイリオ" pitchFamily="34" charset="-122"/>
+                          <a:cs typeface="メイリオ" pitchFamily="34" charset="-120"/>
+                        </a:rPr>
+                        <a:t>肺機能検査はルーチンには不要</a:t>
+                      </a:r>
+                      <a:endParaRPr lang="en-US" sz="2200" dirty="0">
+                        <a:latin typeface="メイリオ" charset="0"/>
+                        <a:ea typeface="メイリオ" charset="0"/>
+                        <a:cs typeface="メイリオ" charset="0"/>
+                      </a:endParaRPr>
+                    </a:p>
+                  </a:txBody>
+                  <a:tcPr marL="0" marR="0" marT="0" marB="152705" anchor="t">
+                    <a:lnL w="0" cap="flat" cmpd="sng" algn="ctr">
+                      <a:noFill/>
+                    </a:lnL>
+                    <a:lnR w="0" cap="flat" cmpd="sng" algn="ctr">
+                      <a:noFill/>
+                    </a:lnR>
+                    <a:lnT w="0" cap="flat" cmpd="sng" algn="ctr">
+                      <a:noFill/>
+                    </a:lnT>
+                    <a:lnB w="0" cap="flat" cmpd="sng" algn="ctr">
+                      <a:noFill/>
+                    </a:lnB>
+                  </a:tcPr>
+                </a:tc>
+              </a:tr>
+              <a:tr h="335585">
+                <a:tc>
+                  <a:txBody>
+                    <a:bodyPr/>
+                    <a:lstStyle/>
+                    <a:p>
+                      <a:pPr algn="l" indent="0" marL="0">
+                        <a:lnSpc>
+                          <a:spcPts val="2640"/>
+                        </a:lnSpc>
+                        <a:buNone/>
+                      </a:pPr>
+                      <a:r>
+                        <a:rPr lang="ja-JP" altLang="en-US" sz="2200" dirty="0">
+                          <a:solidFill>
+                            <a:srgbClr val="262626"/>
+                          </a:solidFill>
+                          <a:latin typeface="メイリオ" pitchFamily="34" charset="0"/>
+                          <a:ea typeface="メイリオ" pitchFamily="34" charset="-122"/>
+                          <a:cs typeface="メイリオ" pitchFamily="34" charset="-120"/>
+                        </a:rPr>
+                        <a:t>•</a:t>
+                      </a:r>
+                      <a:endParaRPr lang="en-US" sz="2200" dirty="0">
+                        <a:latin typeface="メイリオ" charset="0"/>
+                        <a:ea typeface="メイリオ" charset="0"/>
+                        <a:cs typeface="メイリオ" charset="0"/>
+                      </a:endParaRPr>
+                    </a:p>
+                  </a:txBody>
+                  <a:tcPr marL="0" marR="0" marT="0" marB="0" anchor="t">
+                    <a:lnL w="0" cap="flat" cmpd="sng" algn="ctr">
+                      <a:noFill/>
+                    </a:lnL>
+                    <a:lnR w="0" cap="flat" cmpd="sng" algn="ctr">
+                      <a:noFill/>
+                    </a:lnR>
+                    <a:lnT w="0" cap="flat" cmpd="sng" algn="ctr">
+                      <a:noFill/>
+                    </a:lnT>
+                    <a:lnB w="0" cap="flat" cmpd="sng" algn="ctr">
+                      <a:noFill/>
+                    </a:lnB>
+                  </a:tcPr>
+                </a:tc>
+                <a:tc>
+                  <a:txBody>
+                    <a:bodyPr/>
+                    <a:lstStyle/>
+                    <a:p>
+                      <a:pPr algn="l" indent="0" marL="0">
+                        <a:lnSpc>
+                          <a:spcPts val="2640"/>
+                        </a:lnSpc>
+                        <a:buNone/>
+                      </a:pPr>
+                      <a:r>
+                        <a:rPr lang="ja-JP" altLang="en-US" sz="2200" dirty="0">
+                          <a:solidFill>
+                            <a:srgbClr val="262626"/>
+                          </a:solidFill>
+                          <a:latin typeface="メイリオ" pitchFamily="34" charset="0"/>
+                          <a:ea typeface="メイリオ" pitchFamily="34" charset="-122"/>
+                          <a:cs typeface="メイリオ" pitchFamily="34" charset="-120"/>
+                        </a:rPr>
+                        <a:t>上腹部・長時間手術でリスクが高い</a:t>
+                      </a:r>
+                      <a:endParaRPr lang="en-US" sz="2200" dirty="0">
+                        <a:latin typeface="メイリオ" charset="0"/>
+                        <a:ea typeface="メイリオ" charset="0"/>
+                        <a:cs typeface="メイリオ" charset="0"/>
+                      </a:endParaRPr>
+                    </a:p>
+                  </a:txBody>
+                  <a:tcPr marL="0" marR="0" marT="0" marB="0" anchor="t">
+                    <a:lnL w="0" cap="flat" cmpd="sng" algn="ctr">
+                      <a:noFill/>
+                    </a:lnL>
+                    <a:lnR w="0" cap="flat" cmpd="sng" algn="ctr">
+                      <a:noFill/>
+                    </a:lnR>
+                    <a:lnT w="0" cap="flat" cmpd="sng" algn="ctr">
+                      <a:noFill/>
+                    </a:lnT>
+                    <a:lnB w="0" cap="flat" cmpd="sng" algn="ctr">
+                      <a:noFill/>
+                    </a:lnB>
+                  </a:tcPr>
+                </a:tc>
+              </a:tr>
+            </a:tbl>
+          </a:graphicData>
+        </a:graphic>
+      </p:graphicFrame>
+      <p:sp>
+        <p:nvSpPr>
+          <p:cNvPr id="14" name="Shape 11"/>
           <p:cNvSpPr/>
           <p:nvPr/>
         </p:nvSpPr>
@@ -6589,7 +7648,7 @@
       </p:sp>
       <p:sp>
         <p:nvSpPr>
-          <p:cNvPr id="15" name="Text 13"/>
+          <p:cNvPr id="15" name="Text 12"/>
           <p:cNvSpPr txBox="1"/>
           <p:nvPr/>
         </p:nvSpPr>
@@ -6626,250 +7685,606 @@
           </a:p>
         </p:txBody>
       </p:sp>
-      <p:sp>
-        <p:nvSpPr>
-          <p:cNvPr id="16" name="Text 14"/>
-          <p:cNvSpPr txBox="1"/>
-          <p:nvPr/>
-        </p:nvSpPr>
-        <p:spPr>
-          <a:xfrm>
-            <a:off x="6382512" y="2231136"/>
-            <a:ext cx="5175504" cy="3584448"/>
-          </a:xfrm>
-          <a:prstGeom prst="rect">
-            <a:avLst/>
-          </a:prstGeom>
-          <a:noFill/>
-          <a:ln/>
-        </p:spPr>
-        <p:txBody>
-          <a:bodyPr wrap="square" lIns="0" tIns="0" rIns="0" bIns="0" rtlCol="0" anchor="t"/>
-          <a:lstStyle/>
-          <a:p>
-            <a:pPr algn="l" marL="254000" indent="-254000">
-              <a:lnSpc>
-                <a:spcPct val="80000"/>
-              </a:lnSpc>
-              <a:buSzPct val="100000"/>
-              <a:buChar char="•"/>
-            </a:pPr>
-            <a:r>
-              <a:rPr lang="ja-JP" altLang="en-US" sz="2200" dirty="0">
-                <a:solidFill>
-                  <a:srgbClr val="262626"/>
-                </a:solidFill>
-                <a:latin typeface="メイリオ" pitchFamily="34" charset="0"/>
-                <a:ea typeface="メイリオ" pitchFamily="34" charset="-122"/>
-                <a:cs typeface="メイリオ" pitchFamily="34" charset="-120"/>
-              </a:rPr>
-              <a:t>コントロール良好な時期に手術。</a:t>
-            </a:r>
-            <a:endParaRPr lang="ja-JP" sz="2200" dirty="0"/>
-          </a:p>
-          <a:p>
-            <a:pPr algn="l" marL="254000" indent="-254000">
-              <a:lnSpc>
-                <a:spcPct val="80000"/>
-              </a:lnSpc>
-              <a:spcAft>
-                <a:spcPts val="400"/>
-              </a:spcAft>
-              <a:buSzPct val="100000"/>
-              <a:buChar char="　"/>
-            </a:pPr>
-            <a:r>
-              <a:rPr lang="ja-JP" altLang="en-US" sz="2200" dirty="0">
-                <a:solidFill>
-                  <a:srgbClr val="262626"/>
-                </a:solidFill>
-                <a:latin typeface="メイリオ" pitchFamily="34" charset="0"/>
-                <a:ea typeface="メイリオ" pitchFamily="34" charset="-122"/>
-                <a:cs typeface="メイリオ" pitchFamily="34" charset="-120"/>
-              </a:rPr>
-              <a:t>ICS は続ける</a:t>
-            </a:r>
-            <a:endParaRPr lang="ja-JP" sz="2200" dirty="0"/>
-          </a:p>
-          <a:p>
-            <a:pPr algn="l" marL="254000" indent="-254000">
-              <a:lnSpc>
-                <a:spcPct val="80000"/>
-              </a:lnSpc>
-              <a:spcAft>
-                <a:spcPts val="400"/>
-              </a:spcAft>
-              <a:buSzPct val="100000"/>
-              <a:buChar char="•"/>
-            </a:pPr>
-            <a:r>
-              <a:rPr lang="ja-JP" altLang="en-US" sz="2200" dirty="0">
-                <a:solidFill>
-                  <a:srgbClr val="262626"/>
-                </a:solidFill>
-                <a:latin typeface="メイリオ" pitchFamily="34" charset="0"/>
-                <a:ea typeface="メイリオ" pitchFamily="34" charset="-122"/>
-                <a:cs typeface="メイリオ" pitchFamily="34" charset="-120"/>
-              </a:rPr>
-              <a:t>不良なら延期して呼吸器内科へ</a:t>
-            </a:r>
-            <a:endParaRPr lang="ja-JP" sz="2200" dirty="0"/>
-          </a:p>
-          <a:p>
-            <a:pPr algn="l" marL="254000" indent="-254000">
-              <a:lnSpc>
-                <a:spcPct val="80000"/>
-              </a:lnSpc>
-              <a:buSzPct val="100000"/>
-              <a:buChar char="•"/>
-            </a:pPr>
-            <a:r>
-              <a:rPr lang="ja-JP" altLang="en-US" sz="2200" dirty="0">
-                <a:solidFill>
-                  <a:srgbClr val="262626"/>
-                </a:solidFill>
-                <a:latin typeface="メイリオ" pitchFamily="34" charset="0"/>
-                <a:ea typeface="メイリオ" pitchFamily="34" charset="-122"/>
-                <a:cs typeface="メイリオ" pitchFamily="34" charset="-120"/>
-              </a:rPr>
-              <a:t>延期できなければ術前 5 日の</a:t>
-            </a:r>
-            <a:endParaRPr lang="ja-JP" sz="2200" dirty="0"/>
-          </a:p>
-          <a:p>
-            <a:pPr algn="l" marL="254000" indent="-254000">
-              <a:lnSpc>
-                <a:spcPct val="80000"/>
-              </a:lnSpc>
-              <a:spcAft>
-                <a:spcPts val="400"/>
-              </a:spcAft>
-              <a:buSzPct val="100000"/>
-              <a:buChar char="　"/>
-            </a:pPr>
-            <a:r>
-              <a:rPr lang="ja-JP" altLang="en-US" sz="2200" dirty="0">
-                <a:solidFill>
-                  <a:srgbClr val="262626"/>
-                </a:solidFill>
-                <a:latin typeface="メイリオ" pitchFamily="34" charset="0"/>
-                <a:ea typeface="メイリオ" pitchFamily="34" charset="-122"/>
-                <a:cs typeface="メイリオ" pitchFamily="34" charset="-120"/>
-              </a:rPr>
-              <a:t>全身ステロイド＋β2 刺激薬</a:t>
-            </a:r>
-            <a:endParaRPr lang="ja-JP" sz="2200" dirty="0"/>
-          </a:p>
-          <a:p>
-            <a:pPr algn="l" marL="254000" indent="-254000">
-              <a:lnSpc>
-                <a:spcPct val="80000"/>
-              </a:lnSpc>
-              <a:buSzPct val="100000"/>
-              <a:buChar char="•"/>
-            </a:pPr>
-            <a:r>
-              <a:rPr lang="ja-JP" altLang="en-US" sz="2200" b="1" dirty="0">
-                <a:solidFill>
-                  <a:srgbClr val="C00000"/>
-                </a:solidFill>
-                <a:latin typeface="メイリオ" pitchFamily="34" charset="0"/>
-                <a:ea typeface="メイリオ" pitchFamily="34" charset="-122"/>
-                <a:cs typeface="メイリオ" pitchFamily="34" charset="-120"/>
-              </a:rPr>
-              <a:t>NSAIDs 過敏喘息：</a:t>
-            </a:r>
-            <a:endParaRPr lang="ja-JP" sz="2200" dirty="0"/>
-          </a:p>
-          <a:p>
-            <a:pPr algn="l" marL="254000" indent="-254000">
-              <a:lnSpc>
-                <a:spcPct val="80000"/>
-              </a:lnSpc>
-              <a:buSzPct val="100000"/>
-              <a:buChar char="　"/>
-            </a:pPr>
-            <a:r>
-              <a:rPr lang="ja-JP" altLang="en-US" sz="2200" dirty="0">
-                <a:solidFill>
-                  <a:srgbClr val="262626"/>
-                </a:solidFill>
-                <a:latin typeface="メイリオ" pitchFamily="34" charset="0"/>
-                <a:ea typeface="メイリオ" pitchFamily="34" charset="-122"/>
-                <a:cs typeface="メイリオ" pitchFamily="34" charset="-120"/>
-              </a:rPr>
-              <a:t>NSAIDs とコハク酸エステル型</a:t>
-            </a:r>
-            <a:endParaRPr lang="ja-JP" sz="2200" dirty="0"/>
-          </a:p>
-          <a:p>
-            <a:pPr algn="l" marL="254000" indent="-254000">
-              <a:lnSpc>
-                <a:spcPct val="80000"/>
-              </a:lnSpc>
-              <a:spcAft>
-                <a:spcPts val="400"/>
-              </a:spcAft>
-              <a:buSzPct val="100000"/>
-              <a:buChar char="　"/>
-            </a:pPr>
-            <a:r>
-              <a:rPr lang="ja-JP" altLang="en-US" sz="2200" dirty="0">
-                <a:solidFill>
-                  <a:srgbClr val="262626"/>
-                </a:solidFill>
-                <a:latin typeface="メイリオ" pitchFamily="34" charset="0"/>
-                <a:ea typeface="メイリオ" pitchFamily="34" charset="-122"/>
-                <a:cs typeface="メイリオ" pitchFamily="34" charset="-120"/>
-              </a:rPr>
-              <a:t>ステロイドの急速静注を避ける</a:t>
-            </a:r>
-            <a:endParaRPr lang="ja-JP" sz="2200" dirty="0"/>
-          </a:p>
-          <a:p>
-            <a:pPr algn="l" marL="254000" indent="-254000">
-              <a:lnSpc>
-                <a:spcPct val="80000"/>
-              </a:lnSpc>
-              <a:buSzPct val="100000"/>
-              <a:buChar char="•"/>
-            </a:pPr>
-            <a:r>
-              <a:rPr lang="ja-JP" altLang="en-US" sz="2200" dirty="0">
-                <a:solidFill>
-                  <a:srgbClr val="262626"/>
-                </a:solidFill>
-                <a:latin typeface="メイリオ" pitchFamily="34" charset="0"/>
-                <a:ea typeface="メイリオ" pitchFamily="34" charset="-122"/>
-                <a:cs typeface="メイリオ" pitchFamily="34" charset="-120"/>
-              </a:rPr>
-              <a:t>できれば挿管を避ける</a:t>
-            </a:r>
-            <a:endParaRPr lang="ja-JP" sz="2200" dirty="0"/>
-          </a:p>
-          <a:p>
-            <a:pPr algn="l" marL="254000" indent="-254000">
-              <a:lnSpc>
-                <a:spcPct val="80000"/>
-              </a:lnSpc>
-              <a:buSzPct val="100000"/>
-              <a:buChar char="　"/>
-            </a:pPr>
-            <a:r>
-              <a:rPr lang="ja-JP" altLang="en-US" sz="2200" dirty="0">
-                <a:solidFill>
-                  <a:srgbClr val="262626"/>
-                </a:solidFill>
-                <a:latin typeface="メイリオ" pitchFamily="34" charset="0"/>
-                <a:ea typeface="メイリオ" pitchFamily="34" charset="-122"/>
-                <a:cs typeface="メイリオ" pitchFamily="34" charset="-120"/>
-              </a:rPr>
-              <a:t>（区域麻酔、声門上器具）</a:t>
-            </a:r>
-            <a:endParaRPr lang="ja-JP" sz="2200" dirty="0"/>
-          </a:p>
-        </p:txBody>
-      </p:sp>
+      <p:graphicFrame>
+        <p:nvGraphicFramePr>
+          <p:cNvPr id="16" name="Table 1"/>
+          <p:cNvGraphicFramePr>
+            <a:graphicFrameLocks noGrp="1"/>
+          </p:cNvGraphicFramePr>
+          <p:nvPr>
+            <p:extLst>
+              <p:ext uri="{D42A27DB-BD31-4B8C-83A1-F6EECF244321}">
+                <p14:modId xmlns:p14="http://schemas.microsoft.com/office/powerpoint/2010/main" val="1579011935"/>
+              </p:ext>
+            </p:extLst>
+          </p:nvPr>
+        </p:nvGraphicFramePr>
+        <p:xfrm>
+          <a:off x="6382512" y="2231136"/>
+          <a:ext cx="5175504" cy="914400"/>
+        </p:xfrm>
+        <a:graphic>
+          <a:graphicData uri="http://schemas.openxmlformats.org/drawingml/2006/table">
+            <a:tbl>
+              <a:tblPr/>
+              <a:tblGrid>
+                <a:gridCol w="256032"/>
+                <a:gridCol w="4919472"/>
+              </a:tblGrid>
+              <a:tr h="721462">
+                <a:tc>
+                  <a:txBody>
+                    <a:bodyPr/>
+                    <a:lstStyle/>
+                    <a:p>
+                      <a:pPr algn="l" indent="0" marL="0">
+                        <a:lnSpc>
+                          <a:spcPts val="2640"/>
+                        </a:lnSpc>
+                        <a:buNone/>
+                      </a:pPr>
+                      <a:r>
+                        <a:rPr lang="ja-JP" altLang="en-US" sz="2200" dirty="0">
+                          <a:solidFill>
+                            <a:srgbClr val="262626"/>
+                          </a:solidFill>
+                          <a:latin typeface="メイリオ" pitchFamily="34" charset="0"/>
+                          <a:ea typeface="メイリオ" pitchFamily="34" charset="-122"/>
+                          <a:cs typeface="メイリオ" pitchFamily="34" charset="-120"/>
+                        </a:rPr>
+                        <a:t>•</a:t>
+                      </a:r>
+                      <a:endParaRPr lang="en-US" sz="2200" dirty="0">
+                        <a:latin typeface="メイリオ" charset="0"/>
+                        <a:ea typeface="メイリオ" charset="0"/>
+                        <a:cs typeface="メイリオ" charset="0"/>
+                      </a:endParaRPr>
+                    </a:p>
+                  </a:txBody>
+                  <a:tcPr marL="0" marR="0" marT="0" marB="51206" anchor="t">
+                    <a:lnL w="0" cap="flat" cmpd="sng" algn="ctr">
+                      <a:noFill/>
+                    </a:lnL>
+                    <a:lnR w="0" cap="flat" cmpd="sng" algn="ctr">
+                      <a:noFill/>
+                    </a:lnR>
+                    <a:lnT w="0" cap="flat" cmpd="sng" algn="ctr">
+                      <a:noFill/>
+                    </a:lnT>
+                    <a:lnB w="0" cap="flat" cmpd="sng" algn="ctr">
+                      <a:noFill/>
+                    </a:lnB>
+                  </a:tcPr>
+                </a:tc>
+                <a:tc>
+                  <a:txBody>
+                    <a:bodyPr/>
+                    <a:lstStyle/>
+                    <a:p>
+                      <a:pPr algn="l" indent="0" marL="0">
+                        <a:lnSpc>
+                          <a:spcPts val="2640"/>
+                        </a:lnSpc>
+                        <a:buNone/>
+                      </a:pPr>
+                      <a:r>
+                        <a:rPr lang="ja-JP" altLang="en-US" sz="2200" dirty="0">
+                          <a:solidFill>
+                            <a:srgbClr val="262626"/>
+                          </a:solidFill>
+                          <a:latin typeface="メイリオ" pitchFamily="34" charset="0"/>
+                          <a:ea typeface="メイリオ" pitchFamily="34" charset="-122"/>
+                          <a:cs typeface="メイリオ" pitchFamily="34" charset="-120"/>
+                        </a:rPr>
+                        <a:t>コントロール良好な時期に手術。</a:t>
+                      </a:r>
+                      <a:endParaRPr lang="en-US" sz="2200" dirty="0">
+                        <a:latin typeface="メイリオ" charset="0"/>
+                        <a:ea typeface="メイリオ" charset="0"/>
+                        <a:cs typeface="メイリオ" charset="0"/>
+                      </a:endParaRPr>
+                    </a:p>
+                    <a:p>
+                      <a:pPr algn="l" indent="0" marL="0">
+                        <a:lnSpc>
+                          <a:spcPts val="2640"/>
+                        </a:lnSpc>
+                        <a:buNone/>
+                      </a:pPr>
+                      <a:r>
+                        <a:rPr lang="ja-JP" altLang="en-US" sz="2200" dirty="0">
+                          <a:solidFill>
+                            <a:srgbClr val="262626"/>
+                          </a:solidFill>
+                          <a:latin typeface="メイリオ" pitchFamily="34" charset="0"/>
+                          <a:ea typeface="メイリオ" pitchFamily="34" charset="-122"/>
+                          <a:cs typeface="メイリオ" pitchFamily="34" charset="-120"/>
+                        </a:rPr>
+                        <a:t>ICS は続ける</a:t>
+                      </a:r>
+                      <a:endParaRPr lang="en-US" sz="2200" dirty="0">
+                        <a:latin typeface="メイリオ" charset="0"/>
+                        <a:ea typeface="メイリオ" charset="0"/>
+                        <a:cs typeface="メイリオ" charset="0"/>
+                      </a:endParaRPr>
+                    </a:p>
+                  </a:txBody>
+                  <a:tcPr marL="0" marR="0" marT="0" marB="51206" anchor="t">
+                    <a:lnL w="0" cap="flat" cmpd="sng" algn="ctr">
+                      <a:noFill/>
+                    </a:lnL>
+                    <a:lnR w="0" cap="flat" cmpd="sng" algn="ctr">
+                      <a:noFill/>
+                    </a:lnR>
+                    <a:lnT w="0" cap="flat" cmpd="sng" algn="ctr">
+                      <a:noFill/>
+                    </a:lnT>
+                    <a:lnB w="0" cap="flat" cmpd="sng" algn="ctr">
+                      <a:noFill/>
+                    </a:lnB>
+                  </a:tcPr>
+                </a:tc>
+              </a:tr>
+              <a:tr h="386791">
+                <a:tc>
+                  <a:txBody>
+                    <a:bodyPr/>
+                    <a:lstStyle/>
+                    <a:p>
+                      <a:pPr algn="l" indent="0" marL="0">
+                        <a:lnSpc>
+                          <a:spcPts val="2640"/>
+                        </a:lnSpc>
+                        <a:buNone/>
+                      </a:pPr>
+                      <a:r>
+                        <a:rPr lang="ja-JP" altLang="en-US" sz="2200" dirty="0">
+                          <a:solidFill>
+                            <a:srgbClr val="262626"/>
+                          </a:solidFill>
+                          <a:latin typeface="メイリオ" pitchFamily="34" charset="0"/>
+                          <a:ea typeface="メイリオ" pitchFamily="34" charset="-122"/>
+                          <a:cs typeface="メイリオ" pitchFamily="34" charset="-120"/>
+                        </a:rPr>
+                        <a:t>•</a:t>
+                      </a:r>
+                      <a:endParaRPr lang="en-US" sz="2200" dirty="0">
+                        <a:latin typeface="メイリオ" charset="0"/>
+                        <a:ea typeface="メイリオ" charset="0"/>
+                        <a:cs typeface="メイリオ" charset="0"/>
+                      </a:endParaRPr>
+                    </a:p>
+                  </a:txBody>
+                  <a:tcPr marL="0" marR="0" marT="0" marB="51206" anchor="t">
+                    <a:lnL w="0" cap="flat" cmpd="sng" algn="ctr">
+                      <a:noFill/>
+                    </a:lnL>
+                    <a:lnR w="0" cap="flat" cmpd="sng" algn="ctr">
+                      <a:noFill/>
+                    </a:lnR>
+                    <a:lnT w="0" cap="flat" cmpd="sng" algn="ctr">
+                      <a:noFill/>
+                    </a:lnT>
+                    <a:lnB w="0" cap="flat" cmpd="sng" algn="ctr">
+                      <a:noFill/>
+                    </a:lnB>
+                  </a:tcPr>
+                </a:tc>
+                <a:tc>
+                  <a:txBody>
+                    <a:bodyPr/>
+                    <a:lstStyle/>
+                    <a:p>
+                      <a:pPr algn="l" indent="0" marL="0">
+                        <a:lnSpc>
+                          <a:spcPts val="2640"/>
+                        </a:lnSpc>
+                        <a:buNone/>
+                      </a:pPr>
+                      <a:r>
+                        <a:rPr lang="ja-JP" altLang="en-US" sz="2200" dirty="0">
+                          <a:solidFill>
+                            <a:srgbClr val="262626"/>
+                          </a:solidFill>
+                          <a:latin typeface="メイリオ" pitchFamily="34" charset="0"/>
+                          <a:ea typeface="メイリオ" pitchFamily="34" charset="-122"/>
+                          <a:cs typeface="メイリオ" pitchFamily="34" charset="-120"/>
+                        </a:rPr>
+                        <a:t>不良なら延期して呼吸器内科へ</a:t>
+                      </a:r>
+                      <a:endParaRPr lang="en-US" sz="2200" dirty="0">
+                        <a:latin typeface="メイリオ" charset="0"/>
+                        <a:ea typeface="メイリオ" charset="0"/>
+                        <a:cs typeface="メイリオ" charset="0"/>
+                      </a:endParaRPr>
+                    </a:p>
+                  </a:txBody>
+                  <a:tcPr marL="0" marR="0" marT="0" marB="51206" anchor="t">
+                    <a:lnL w="0" cap="flat" cmpd="sng" algn="ctr">
+                      <a:noFill/>
+                    </a:lnL>
+                    <a:lnR w="0" cap="flat" cmpd="sng" algn="ctr">
+                      <a:noFill/>
+                    </a:lnR>
+                    <a:lnT w="0" cap="flat" cmpd="sng" algn="ctr">
+                      <a:noFill/>
+                    </a:lnT>
+                    <a:lnB w="0" cap="flat" cmpd="sng" algn="ctr">
+                      <a:noFill/>
+                    </a:lnB>
+                  </a:tcPr>
+                </a:tc>
+              </a:tr>
+              <a:tr h="721462">
+                <a:tc>
+                  <a:txBody>
+                    <a:bodyPr/>
+                    <a:lstStyle/>
+                    <a:p>
+                      <a:pPr algn="l" indent="0" marL="0">
+                        <a:lnSpc>
+                          <a:spcPts val="2640"/>
+                        </a:lnSpc>
+                        <a:buNone/>
+                      </a:pPr>
+                      <a:r>
+                        <a:rPr lang="ja-JP" altLang="en-US" sz="2200" dirty="0">
+                          <a:solidFill>
+                            <a:srgbClr val="262626"/>
+                          </a:solidFill>
+                          <a:latin typeface="メイリオ" pitchFamily="34" charset="0"/>
+                          <a:ea typeface="メイリオ" pitchFamily="34" charset="-122"/>
+                          <a:cs typeface="メイリオ" pitchFamily="34" charset="-120"/>
+                        </a:rPr>
+                        <a:t>•</a:t>
+                      </a:r>
+                      <a:endParaRPr lang="en-US" sz="2200" dirty="0">
+                        <a:latin typeface="メイリオ" charset="0"/>
+                        <a:ea typeface="メイリオ" charset="0"/>
+                        <a:cs typeface="メイリオ" charset="0"/>
+                      </a:endParaRPr>
+                    </a:p>
+                  </a:txBody>
+                  <a:tcPr marL="0" marR="0" marT="0" marB="51206" anchor="t">
+                    <a:lnL w="0" cap="flat" cmpd="sng" algn="ctr">
+                      <a:noFill/>
+                    </a:lnL>
+                    <a:lnR w="0" cap="flat" cmpd="sng" algn="ctr">
+                      <a:noFill/>
+                    </a:lnR>
+                    <a:lnT w="0" cap="flat" cmpd="sng" algn="ctr">
+                      <a:noFill/>
+                    </a:lnT>
+                    <a:lnB w="0" cap="flat" cmpd="sng" algn="ctr">
+                      <a:noFill/>
+                    </a:lnB>
+                  </a:tcPr>
+                </a:tc>
+                <a:tc>
+                  <a:txBody>
+                    <a:bodyPr/>
+                    <a:lstStyle/>
+                    <a:p>
+                      <a:pPr algn="l" indent="0" marL="0">
+                        <a:lnSpc>
+                          <a:spcPts val="2640"/>
+                        </a:lnSpc>
+                        <a:buNone/>
+                      </a:pPr>
+                      <a:r>
+                        <a:rPr lang="ja-JP" altLang="en-US" sz="2200" dirty="0">
+                          <a:solidFill>
+                            <a:srgbClr val="262626"/>
+                          </a:solidFill>
+                          <a:latin typeface="メイリオ" pitchFamily="34" charset="0"/>
+                          <a:ea typeface="メイリオ" pitchFamily="34" charset="-122"/>
+                          <a:cs typeface="メイリオ" pitchFamily="34" charset="-120"/>
+                        </a:rPr>
+                        <a:t>延期できなければ術前 5 日の</a:t>
+                      </a:r>
+                      <a:endParaRPr lang="en-US" sz="2200" dirty="0">
+                        <a:latin typeface="メイリオ" charset="0"/>
+                        <a:ea typeface="メイリオ" charset="0"/>
+                        <a:cs typeface="メイリオ" charset="0"/>
+                      </a:endParaRPr>
+                    </a:p>
+                    <a:p>
+                      <a:pPr algn="l" indent="0" marL="0">
+                        <a:lnSpc>
+                          <a:spcPts val="2640"/>
+                        </a:lnSpc>
+                        <a:buNone/>
+                      </a:pPr>
+                      <a:r>
+                        <a:rPr lang="ja-JP" altLang="en-US" sz="2200" dirty="0">
+                          <a:solidFill>
+                            <a:srgbClr val="262626"/>
+                          </a:solidFill>
+                          <a:latin typeface="メイリオ" pitchFamily="34" charset="0"/>
+                          <a:ea typeface="メイリオ" pitchFamily="34" charset="-122"/>
+                          <a:cs typeface="メイリオ" pitchFamily="34" charset="-120"/>
+                        </a:rPr>
+                        <a:t>全身ステロイド＋β2 刺激薬</a:t>
+                      </a:r>
+                      <a:endParaRPr lang="en-US" sz="2200" dirty="0">
+                        <a:latin typeface="メイリオ" charset="0"/>
+                        <a:ea typeface="メイリオ" charset="0"/>
+                        <a:cs typeface="メイリオ" charset="0"/>
+                      </a:endParaRPr>
+                    </a:p>
+                  </a:txBody>
+                  <a:tcPr marL="0" marR="0" marT="0" marB="51206" anchor="t">
+                    <a:lnL w="0" cap="flat" cmpd="sng" algn="ctr">
+                      <a:noFill/>
+                    </a:lnL>
+                    <a:lnR w="0" cap="flat" cmpd="sng" algn="ctr">
+                      <a:noFill/>
+                    </a:lnR>
+                    <a:lnT w="0" cap="flat" cmpd="sng" algn="ctr">
+                      <a:noFill/>
+                    </a:lnT>
+                    <a:lnB w="0" cap="flat" cmpd="sng" algn="ctr">
+                      <a:noFill/>
+                    </a:lnB>
+                  </a:tcPr>
+                </a:tc>
+              </a:tr>
+              <a:tr h="1057046">
+                <a:tc>
+                  <a:txBody>
+                    <a:bodyPr/>
+                    <a:lstStyle/>
+                    <a:p>
+                      <a:pPr algn="l" indent="0" marL="0">
+                        <a:lnSpc>
+                          <a:spcPts val="2640"/>
+                        </a:lnSpc>
+                        <a:buNone/>
+                      </a:pPr>
+                      <a:r>
+                        <a:rPr lang="ja-JP" altLang="en-US" sz="2200" dirty="0">
+                          <a:solidFill>
+                            <a:srgbClr val="262626"/>
+                          </a:solidFill>
+                          <a:latin typeface="メイリオ" pitchFamily="34" charset="0"/>
+                          <a:ea typeface="メイリオ" pitchFamily="34" charset="-122"/>
+                          <a:cs typeface="メイリオ" pitchFamily="34" charset="-120"/>
+                        </a:rPr>
+                        <a:t>•</a:t>
+                      </a:r>
+                      <a:endParaRPr lang="en-US" sz="2200" dirty="0">
+                        <a:latin typeface="メイリオ" charset="0"/>
+                        <a:ea typeface="メイリオ" charset="0"/>
+                        <a:cs typeface="メイリオ" charset="0"/>
+                      </a:endParaRPr>
+                    </a:p>
+                  </a:txBody>
+                  <a:tcPr marL="0" marR="0" marT="0" marB="51206" anchor="t">
+                    <a:lnL w="0" cap="flat" cmpd="sng" algn="ctr">
+                      <a:noFill/>
+                    </a:lnL>
+                    <a:lnR w="0" cap="flat" cmpd="sng" algn="ctr">
+                      <a:noFill/>
+                    </a:lnR>
+                    <a:lnT w="0" cap="flat" cmpd="sng" algn="ctr">
+                      <a:noFill/>
+                    </a:lnT>
+                    <a:lnB w="0" cap="flat" cmpd="sng" algn="ctr">
+                      <a:noFill/>
+                    </a:lnB>
+                  </a:tcPr>
+                </a:tc>
+                <a:tc>
+                  <a:txBody>
+                    <a:bodyPr/>
+                    <a:lstStyle/>
+                    <a:p>
+                      <a:pPr algn="l" indent="0" marL="0">
+                        <a:lnSpc>
+                          <a:spcPts val="2640"/>
+                        </a:lnSpc>
+                        <a:buNone/>
+                      </a:pPr>
+                      <a:r>
+                        <a:rPr lang="ja-JP" altLang="en-US" sz="2200" b="1" dirty="0">
+                          <a:solidFill>
+                            <a:srgbClr val="C00000"/>
+                          </a:solidFill>
+                          <a:latin typeface="メイリオ" pitchFamily="34" charset="0"/>
+                          <a:ea typeface="メイリオ" pitchFamily="34" charset="-122"/>
+                          <a:cs typeface="メイリオ" pitchFamily="34" charset="-120"/>
+                        </a:rPr>
+                        <a:t>NSAIDs 過敏喘息：</a:t>
+                      </a:r>
+                      <a:endParaRPr lang="en-US" sz="2200" dirty="0">
+                        <a:latin typeface="メイリオ" charset="0"/>
+                        <a:ea typeface="メイリオ" charset="0"/>
+                        <a:cs typeface="メイリオ" charset="0"/>
+                      </a:endParaRPr>
+                    </a:p>
+                    <a:p>
+                      <a:pPr algn="l" indent="0" marL="0">
+                        <a:lnSpc>
+                          <a:spcPts val="2640"/>
+                        </a:lnSpc>
+                        <a:buNone/>
+                      </a:pPr>
+                      <a:r>
+                        <a:rPr lang="ja-JP" altLang="en-US" sz="2200" dirty="0">
+                          <a:solidFill>
+                            <a:srgbClr val="262626"/>
+                          </a:solidFill>
+                          <a:latin typeface="メイリオ" pitchFamily="34" charset="0"/>
+                          <a:ea typeface="メイリオ" pitchFamily="34" charset="-122"/>
+                          <a:cs typeface="メイリオ" pitchFamily="34" charset="-120"/>
+                        </a:rPr>
+                        <a:t>NSAIDs とコハク酸エステル型</a:t>
+                      </a:r>
+                      <a:endParaRPr lang="en-US" sz="2200" dirty="0">
+                        <a:latin typeface="メイリオ" charset="0"/>
+                        <a:ea typeface="メイリオ" charset="0"/>
+                        <a:cs typeface="メイリオ" charset="0"/>
+                      </a:endParaRPr>
+                    </a:p>
+                    <a:p>
+                      <a:pPr algn="l" indent="0" marL="0">
+                        <a:lnSpc>
+                          <a:spcPts val="2640"/>
+                        </a:lnSpc>
+                        <a:buNone/>
+                      </a:pPr>
+                      <a:r>
+                        <a:rPr lang="ja-JP" altLang="en-US" sz="2200" dirty="0">
+                          <a:solidFill>
+                            <a:srgbClr val="262626"/>
+                          </a:solidFill>
+                          <a:latin typeface="メイリオ" pitchFamily="34" charset="0"/>
+                          <a:ea typeface="メイリオ" pitchFamily="34" charset="-122"/>
+                          <a:cs typeface="メイリオ" pitchFamily="34" charset="-120"/>
+                        </a:rPr>
+                        <a:t>ステロイドの急速静注を避ける</a:t>
+                      </a:r>
+                      <a:endParaRPr lang="en-US" sz="2200" dirty="0">
+                        <a:latin typeface="メイリオ" charset="0"/>
+                        <a:ea typeface="メイリオ" charset="0"/>
+                        <a:cs typeface="メイリオ" charset="0"/>
+                      </a:endParaRPr>
+                    </a:p>
+                  </a:txBody>
+                  <a:tcPr marL="0" marR="0" marT="0" marB="51206" anchor="t">
+                    <a:lnL w="0" cap="flat" cmpd="sng" algn="ctr">
+                      <a:noFill/>
+                    </a:lnL>
+                    <a:lnR w="0" cap="flat" cmpd="sng" algn="ctr">
+                      <a:noFill/>
+                    </a:lnR>
+                    <a:lnT w="0" cap="flat" cmpd="sng" algn="ctr">
+                      <a:noFill/>
+                    </a:lnT>
+                    <a:lnB w="0" cap="flat" cmpd="sng" algn="ctr">
+                      <a:noFill/>
+                    </a:lnB>
+                  </a:tcPr>
+                </a:tc>
+              </a:tr>
+              <a:tr h="670255">
+                <a:tc>
+                  <a:txBody>
+                    <a:bodyPr/>
+                    <a:lstStyle/>
+                    <a:p>
+                      <a:pPr algn="l" indent="0" marL="0">
+                        <a:lnSpc>
+                          <a:spcPts val="2640"/>
+                        </a:lnSpc>
+                        <a:buNone/>
+                      </a:pPr>
+                      <a:r>
+                        <a:rPr lang="ja-JP" altLang="en-US" sz="2200" dirty="0">
+                          <a:solidFill>
+                            <a:srgbClr val="262626"/>
+                          </a:solidFill>
+                          <a:latin typeface="メイリオ" pitchFamily="34" charset="0"/>
+                          <a:ea typeface="メイリオ" pitchFamily="34" charset="-122"/>
+                          <a:cs typeface="メイリオ" pitchFamily="34" charset="-120"/>
+                        </a:rPr>
+                        <a:t>•</a:t>
+                      </a:r>
+                      <a:endParaRPr lang="en-US" sz="2200" dirty="0">
+                        <a:latin typeface="メイリオ" charset="0"/>
+                        <a:ea typeface="メイリオ" charset="0"/>
+                        <a:cs typeface="メイリオ" charset="0"/>
+                      </a:endParaRPr>
+                    </a:p>
+                  </a:txBody>
+                  <a:tcPr marL="0" marR="0" marT="0" marB="0" anchor="t">
+                    <a:lnL w="0" cap="flat" cmpd="sng" algn="ctr">
+                      <a:noFill/>
+                    </a:lnL>
+                    <a:lnR w="0" cap="flat" cmpd="sng" algn="ctr">
+                      <a:noFill/>
+                    </a:lnR>
+                    <a:lnT w="0" cap="flat" cmpd="sng" algn="ctr">
+                      <a:noFill/>
+                    </a:lnT>
+                    <a:lnB w="0" cap="flat" cmpd="sng" algn="ctr">
+                      <a:noFill/>
+                    </a:lnB>
+                  </a:tcPr>
+                </a:tc>
+                <a:tc>
+                  <a:txBody>
+                    <a:bodyPr/>
+                    <a:lstStyle/>
+                    <a:p>
+                      <a:pPr algn="l" indent="0" marL="0">
+                        <a:lnSpc>
+                          <a:spcPts val="2640"/>
+                        </a:lnSpc>
+                        <a:buNone/>
+                      </a:pPr>
+                      <a:r>
+                        <a:rPr lang="ja-JP" altLang="en-US" sz="2200" dirty="0">
+                          <a:solidFill>
+                            <a:srgbClr val="262626"/>
+                          </a:solidFill>
+                          <a:latin typeface="メイリオ" pitchFamily="34" charset="0"/>
+                          <a:ea typeface="メイリオ" pitchFamily="34" charset="-122"/>
+                          <a:cs typeface="メイリオ" pitchFamily="34" charset="-120"/>
+                        </a:rPr>
+                        <a:t>できれば挿管を避ける</a:t>
+                      </a:r>
+                      <a:endParaRPr lang="en-US" sz="2200" dirty="0">
+                        <a:latin typeface="メイリオ" charset="0"/>
+                        <a:ea typeface="メイリオ" charset="0"/>
+                        <a:cs typeface="メイリオ" charset="0"/>
+                      </a:endParaRPr>
+                    </a:p>
+                    <a:p>
+                      <a:pPr algn="l" indent="0" marL="0">
+                        <a:lnSpc>
+                          <a:spcPts val="2640"/>
+                        </a:lnSpc>
+                        <a:buNone/>
+                      </a:pPr>
+                      <a:r>
+                        <a:rPr lang="ja-JP" altLang="en-US" sz="2200" dirty="0">
+                          <a:solidFill>
+                            <a:srgbClr val="262626"/>
+                          </a:solidFill>
+                          <a:latin typeface="メイリオ" pitchFamily="34" charset="0"/>
+                          <a:ea typeface="メイリオ" pitchFamily="34" charset="-122"/>
+                          <a:cs typeface="メイリオ" pitchFamily="34" charset="-120"/>
+                        </a:rPr>
+                        <a:t>（区域麻酔、声門上器具）</a:t>
+                      </a:r>
+                      <a:endParaRPr lang="en-US" sz="2200" dirty="0">
+                        <a:latin typeface="メイリオ" charset="0"/>
+                        <a:ea typeface="メイリオ" charset="0"/>
+                        <a:cs typeface="メイリオ" charset="0"/>
+                      </a:endParaRPr>
+                    </a:p>
+                  </a:txBody>
+                  <a:tcPr marL="0" marR="0" marT="0" marB="0" anchor="t">
+                    <a:lnL w="0" cap="flat" cmpd="sng" algn="ctr">
+                      <a:noFill/>
+                    </a:lnL>
+                    <a:lnR w="0" cap="flat" cmpd="sng" algn="ctr">
+                      <a:noFill/>
+                    </a:lnR>
+                    <a:lnT w="0" cap="flat" cmpd="sng" algn="ctr">
+                      <a:noFill/>
+                    </a:lnT>
+                    <a:lnB w="0" cap="flat" cmpd="sng" algn="ctr">
+                      <a:noFill/>
+                    </a:lnB>
+                  </a:tcPr>
+                </a:tc>
+              </a:tr>
+            </a:tbl>
+          </a:graphicData>
+        </a:graphic>
+      </p:graphicFrame>
     </p:spTree>
   </p:cSld>
   <p:clrMapOvr>
@@ -7956,237 +9371,527 @@
           </a:p>
         </p:txBody>
       </p:sp>
-      <p:sp>
-        <p:nvSpPr>
-          <p:cNvPr id="28" name="Text 26"/>
-          <p:cNvSpPr txBox="1"/>
-          <p:nvPr/>
-        </p:nvSpPr>
-        <p:spPr>
-          <a:xfrm>
-            <a:off x="5980176" y="1947672"/>
-            <a:ext cx="5705856" cy="3712464"/>
-          </a:xfrm>
-          <a:prstGeom prst="rect">
-            <a:avLst/>
-          </a:prstGeom>
-          <a:noFill/>
-          <a:ln/>
-        </p:spPr>
-        <p:txBody>
-          <a:bodyPr wrap="square" lIns="0" tIns="0" rIns="0" bIns="0" rtlCol="0" anchor="t"/>
-          <a:lstStyle/>
-          <a:p>
-            <a:pPr algn="l" marL="254000" indent="-254000">
-              <a:lnSpc>
-                <a:spcPct val="80000"/>
-              </a:lnSpc>
-              <a:buSzPct val="100000"/>
-              <a:buChar char="•"/>
-            </a:pPr>
-            <a:r>
-              <a:rPr lang="ja-JP" altLang="en-US" sz="2200" b="1" dirty="0">
-                <a:solidFill>
-                  <a:srgbClr val="0072B2"/>
-                </a:solidFill>
-                <a:latin typeface="メイリオ" pitchFamily="34" charset="0"/>
-                <a:ea typeface="メイリオ" pitchFamily="34" charset="-122"/>
-                <a:cs typeface="メイリオ" pitchFamily="34" charset="-120"/>
-              </a:rPr>
-              <a:t>3 点以上</a:t>
-            </a:r>
-            <a:r>
-              <a:rPr lang="ja-JP" altLang="en-US" sz="2200" dirty="0">
-                <a:solidFill>
-                  <a:srgbClr val="262626"/>
-                </a:solidFill>
-                <a:latin typeface="メイリオ" pitchFamily="34" charset="0"/>
-                <a:ea typeface="メイリオ" pitchFamily="34" charset="-122"/>
-                <a:cs typeface="メイリオ" pitchFamily="34" charset="-120"/>
-              </a:rPr>
-              <a:t>で OSA の可能性、</a:t>
-            </a:r>
-            <a:endParaRPr lang="ja-JP" sz="2200" dirty="0"/>
-          </a:p>
-          <a:p>
-            <a:pPr algn="l" marL="254000" indent="-254000">
-              <a:lnSpc>
-                <a:spcPct val="80000"/>
-              </a:lnSpc>
-              <a:spcAft>
-                <a:spcPts val="1800"/>
-              </a:spcAft>
-              <a:buSzPct val="100000"/>
-              <a:buChar char="　"/>
-            </a:pPr>
-            <a:r>
-              <a:rPr lang="ja-JP" altLang="en-US" sz="2200" b="1" dirty="0">
-                <a:solidFill>
-                  <a:srgbClr val="D55E00"/>
-                </a:solidFill>
-                <a:latin typeface="メイリオ" pitchFamily="34" charset="0"/>
-                <a:ea typeface="メイリオ" pitchFamily="34" charset="-122"/>
-                <a:cs typeface="メイリオ" pitchFamily="34" charset="-120"/>
-              </a:rPr>
-              <a:t>5 点以上で高リスク</a:t>
-            </a:r>
-            <a:endParaRPr lang="ja-JP" sz="2200" dirty="0"/>
-          </a:p>
-          <a:p>
-            <a:pPr algn="l" marL="254000" indent="-254000">
-              <a:lnSpc>
-                <a:spcPct val="80000"/>
-              </a:lnSpc>
-              <a:buSzPct val="100000"/>
-              <a:buChar char="•"/>
-            </a:pPr>
-            <a:r>
-              <a:rPr lang="ja-JP" altLang="en-US" sz="2200" dirty="0">
-                <a:solidFill>
-                  <a:srgbClr val="262626"/>
-                </a:solidFill>
-                <a:latin typeface="メイリオ" pitchFamily="34" charset="0"/>
-                <a:ea typeface="メイリオ" pitchFamily="34" charset="-122"/>
-                <a:cs typeface="メイリオ" pitchFamily="34" charset="-120"/>
-              </a:rPr>
-              <a:t>OSA で呼吸不全（オッズ比 2.4）、</a:t>
-            </a:r>
-            <a:endParaRPr lang="ja-JP" sz="2200" dirty="0"/>
-          </a:p>
-          <a:p>
-            <a:pPr algn="l" marL="254000" indent="-254000">
-              <a:lnSpc>
-                <a:spcPct val="80000"/>
-              </a:lnSpc>
-              <a:spcAft>
-                <a:spcPts val="1800"/>
-              </a:spcAft>
-              <a:buSzPct val="100000"/>
-              <a:buChar char="　"/>
-            </a:pPr>
-            <a:r>
-              <a:rPr lang="ja-JP" altLang="en-US" sz="2200" dirty="0">
-                <a:solidFill>
-                  <a:srgbClr val="262626"/>
-                </a:solidFill>
-                <a:latin typeface="メイリオ" pitchFamily="34" charset="0"/>
-                <a:ea typeface="メイリオ" pitchFamily="34" charset="-122"/>
-                <a:cs typeface="メイリオ" pitchFamily="34" charset="-120"/>
-              </a:rPr>
-              <a:t>ICU 転床（2.8）</a:t>
-            </a:r>
-            <a:endParaRPr lang="ja-JP" sz="2200" dirty="0"/>
-          </a:p>
-          <a:p>
-            <a:pPr algn="l" marL="254000" indent="-254000">
-              <a:lnSpc>
-                <a:spcPct val="80000"/>
-              </a:lnSpc>
-              <a:buSzPct val="100000"/>
-              <a:buChar char="•"/>
-            </a:pPr>
-            <a:r>
-              <a:rPr lang="ja-JP" altLang="en-US" sz="2200" dirty="0">
-                <a:solidFill>
-                  <a:srgbClr val="262626"/>
-                </a:solidFill>
-                <a:latin typeface="メイリオ" pitchFamily="34" charset="0"/>
-                <a:ea typeface="メイリオ" pitchFamily="34" charset="-122"/>
-                <a:cs typeface="メイリオ" pitchFamily="34" charset="-120"/>
-              </a:rPr>
-              <a:t>疑いだけでは延期しない。</a:t>
-            </a:r>
-            <a:endParaRPr lang="ja-JP" sz="2200" dirty="0"/>
-          </a:p>
-          <a:p>
-            <a:pPr algn="l" marL="254000" indent="-254000">
-              <a:lnSpc>
-                <a:spcPct val="80000"/>
-              </a:lnSpc>
-              <a:buSzPct val="100000"/>
-              <a:buChar char="　"/>
-            </a:pPr>
-            <a:r>
-              <a:rPr lang="ja-JP" altLang="en-US" sz="2200" dirty="0">
-                <a:solidFill>
-                  <a:srgbClr val="262626"/>
-                </a:solidFill>
-                <a:latin typeface="メイリオ" pitchFamily="34" charset="0"/>
-                <a:ea typeface="メイリオ" pitchFamily="34" charset="-122"/>
-                <a:cs typeface="メイリオ" pitchFamily="34" charset="-120"/>
-              </a:rPr>
-              <a:t>低換気・重症肺高血圧・</a:t>
-            </a:r>
-            <a:endParaRPr lang="ja-JP" sz="2200" dirty="0"/>
-          </a:p>
-          <a:p>
-            <a:pPr algn="l" marL="254000" indent="-254000">
-              <a:lnSpc>
-                <a:spcPct val="80000"/>
-              </a:lnSpc>
-              <a:spcAft>
-                <a:spcPts val="1800"/>
-              </a:spcAft>
-              <a:buSzPct val="100000"/>
-              <a:buChar char="　"/>
-            </a:pPr>
-            <a:r>
-              <a:rPr lang="ja-JP" altLang="en-US" sz="2200" dirty="0">
-                <a:solidFill>
-                  <a:srgbClr val="262626"/>
-                </a:solidFill>
-                <a:latin typeface="メイリオ" pitchFamily="34" charset="0"/>
-                <a:ea typeface="メイリオ" pitchFamily="34" charset="-122"/>
-                <a:cs typeface="メイリオ" pitchFamily="34" charset="-120"/>
-              </a:rPr>
-              <a:t>原因不明の安静時低酸素なら追加評価</a:t>
-            </a:r>
-            <a:endParaRPr lang="ja-JP" sz="2200" dirty="0"/>
-          </a:p>
-          <a:p>
-            <a:pPr algn="l" marL="254000" indent="-254000">
-              <a:lnSpc>
-                <a:spcPct val="80000"/>
-              </a:lnSpc>
-              <a:buSzPct val="100000"/>
-              <a:buChar char="•"/>
-            </a:pPr>
-            <a:r>
-              <a:rPr lang="ja-JP" altLang="en-US" sz="2200" dirty="0">
-                <a:solidFill>
-                  <a:srgbClr val="262626"/>
-                </a:solidFill>
-                <a:latin typeface="メイリオ" pitchFamily="34" charset="0"/>
-                <a:ea typeface="メイリオ" pitchFamily="34" charset="-122"/>
-                <a:cs typeface="メイリオ" pitchFamily="34" charset="-120"/>
-              </a:rPr>
-              <a:t>CPAP は持参。</a:t>
-            </a:r>
-            <a:endParaRPr lang="ja-JP" sz="2200" dirty="0"/>
-          </a:p>
-          <a:p>
-            <a:pPr algn="l" marL="254000" indent="-254000">
-              <a:lnSpc>
-                <a:spcPct val="80000"/>
-              </a:lnSpc>
-              <a:buSzPct val="100000"/>
-              <a:buChar char="　"/>
-            </a:pPr>
-            <a:r>
-              <a:rPr lang="ja-JP" altLang="en-US" sz="2200" dirty="0">
-                <a:solidFill>
-                  <a:srgbClr val="262626"/>
-                </a:solidFill>
-                <a:latin typeface="メイリオ" pitchFamily="34" charset="0"/>
-                <a:ea typeface="メイリオ" pitchFamily="34" charset="-122"/>
-                <a:cs typeface="メイリオ" pitchFamily="34" charset="-120"/>
-              </a:rPr>
-              <a:t>困難気道として備え、区域麻酔を優先</a:t>
-            </a:r>
-            <a:endParaRPr lang="ja-JP" sz="2200" dirty="0"/>
-          </a:p>
-        </p:txBody>
-      </p:sp>
+      <p:graphicFrame>
+        <p:nvGraphicFramePr>
+          <p:cNvPr id="28" name="Table 0"/>
+          <p:cNvGraphicFramePr>
+            <a:graphicFrameLocks noGrp="1"/>
+          </p:cNvGraphicFramePr>
+          <p:nvPr>
+            <p:extLst>
+              <p:ext uri="{D42A27DB-BD31-4B8C-83A1-F6EECF244321}">
+                <p14:modId xmlns:p14="http://schemas.microsoft.com/office/powerpoint/2010/main" val="1579011935"/>
+              </p:ext>
+            </p:extLst>
+          </p:nvPr>
+        </p:nvGraphicFramePr>
+        <p:xfrm>
+          <a:off x="5980176" y="1947672"/>
+          <a:ext cx="5705856" cy="914400"/>
+        </p:xfrm>
+        <a:graphic>
+          <a:graphicData uri="http://schemas.openxmlformats.org/drawingml/2006/table">
+            <a:tbl>
+              <a:tblPr/>
+              <a:tblGrid>
+                <a:gridCol w="256032"/>
+                <a:gridCol w="5449824"/>
+              </a:tblGrid>
+              <a:tr h="898855">
+                <a:tc>
+                  <a:txBody>
+                    <a:bodyPr/>
+                    <a:lstStyle/>
+                    <a:p>
+                      <a:pPr algn="l" indent="0" marL="0">
+                        <a:lnSpc>
+                          <a:spcPts val="2640"/>
+                        </a:lnSpc>
+                        <a:buNone/>
+                      </a:pPr>
+                      <a:r>
+                        <a:rPr lang="ja-JP" altLang="en-US" sz="2200" dirty="0">
+                          <a:solidFill>
+                            <a:srgbClr val="262626"/>
+                          </a:solidFill>
+                          <a:latin typeface="メイリオ" pitchFamily="34" charset="0"/>
+                          <a:ea typeface="メイリオ" pitchFamily="34" charset="-122"/>
+                          <a:cs typeface="メイリオ" pitchFamily="34" charset="-120"/>
+                        </a:rPr>
+                        <a:t>•</a:t>
+                      </a:r>
+                      <a:endParaRPr lang="en-US" sz="2200" dirty="0">
+                        <a:latin typeface="メイリオ" charset="0"/>
+                        <a:ea typeface="メイリオ" charset="0"/>
+                        <a:cs typeface="メイリオ" charset="0"/>
+                      </a:endParaRPr>
+                    </a:p>
+                  </a:txBody>
+                  <a:tcPr marL="0" marR="0" marT="0" marB="228600" anchor="t">
+                    <a:lnL w="0" cap="flat" cmpd="sng" algn="ctr">
+                      <a:noFill/>
+                    </a:lnL>
+                    <a:lnR w="0" cap="flat" cmpd="sng" algn="ctr">
+                      <a:noFill/>
+                    </a:lnR>
+                    <a:lnT w="0" cap="flat" cmpd="sng" algn="ctr">
+                      <a:noFill/>
+                    </a:lnT>
+                    <a:lnB w="0" cap="flat" cmpd="sng" algn="ctr">
+                      <a:noFill/>
+                    </a:lnB>
+                  </a:tcPr>
+                </a:tc>
+                <a:tc>
+                  <a:txBody>
+                    <a:bodyPr/>
+                    <a:lstStyle/>
+                    <a:p>
+                      <a:pPr algn="l" indent="0" marL="0">
+                        <a:lnSpc>
+                          <a:spcPts val="2640"/>
+                        </a:lnSpc>
+                        <a:buNone/>
+                      </a:pPr>
+                      <a:r>
+                        <a:rPr lang="ja-JP" altLang="en-US" sz="2200" b="1" dirty="0">
+                          <a:solidFill>
+                            <a:srgbClr val="0072B2"/>
+                          </a:solidFill>
+                          <a:latin typeface="メイリオ" pitchFamily="34" charset="0"/>
+                          <a:ea typeface="メイリオ" pitchFamily="34" charset="-122"/>
+                          <a:cs typeface="メイリオ" pitchFamily="34" charset="-120"/>
+                        </a:rPr>
+                        <a:t>3 点以上</a:t>
+                      </a:r>
+                      <a:r>
+                        <a:rPr lang="ja-JP" altLang="en-US" sz="2200" dirty="0">
+                          <a:solidFill>
+                            <a:srgbClr val="262626"/>
+                          </a:solidFill>
+                          <a:latin typeface="メイリオ" pitchFamily="34" charset="0"/>
+                          <a:ea typeface="メイリオ" pitchFamily="34" charset="-122"/>
+                          <a:cs typeface="メイリオ" pitchFamily="34" charset="-120"/>
+                        </a:rPr>
+                        <a:t>で OSA の可能性、</a:t>
+                      </a:r>
+                      <a:endParaRPr lang="en-US" sz="2200" dirty="0">
+                        <a:latin typeface="メイリオ" charset="0"/>
+                        <a:ea typeface="メイリオ" charset="0"/>
+                        <a:cs typeface="メイリオ" charset="0"/>
+                      </a:endParaRPr>
+                    </a:p>
+                    <a:p>
+                      <a:pPr algn="l" indent="0" marL="0">
+                        <a:lnSpc>
+                          <a:spcPts val="2640"/>
+                        </a:lnSpc>
+                        <a:buNone/>
+                      </a:pPr>
+                      <a:r>
+                        <a:rPr lang="ja-JP" altLang="en-US" sz="2200" b="1" dirty="0">
+                          <a:solidFill>
+                            <a:srgbClr val="D55E00"/>
+                          </a:solidFill>
+                          <a:latin typeface="メイリオ" pitchFamily="34" charset="0"/>
+                          <a:ea typeface="メイリオ" pitchFamily="34" charset="-122"/>
+                          <a:cs typeface="メイリオ" pitchFamily="34" charset="-120"/>
+                        </a:rPr>
+                        <a:t>5 点以上で高リスク</a:t>
+                      </a:r>
+                      <a:endParaRPr lang="en-US" sz="2200" dirty="0">
+                        <a:latin typeface="メイリオ" charset="0"/>
+                        <a:ea typeface="メイリオ" charset="0"/>
+                        <a:cs typeface="メイリオ" charset="0"/>
+                      </a:endParaRPr>
+                    </a:p>
+                  </a:txBody>
+                  <a:tcPr marL="0" marR="0" marT="0" marB="228600" anchor="t">
+                    <a:lnL w="0" cap="flat" cmpd="sng" algn="ctr">
+                      <a:noFill/>
+                    </a:lnL>
+                    <a:lnR w="0" cap="flat" cmpd="sng" algn="ctr">
+                      <a:noFill/>
+                    </a:lnR>
+                    <a:lnT w="0" cap="flat" cmpd="sng" algn="ctr">
+                      <a:noFill/>
+                    </a:lnT>
+                    <a:lnB w="0" cap="flat" cmpd="sng" algn="ctr">
+                      <a:noFill/>
+                    </a:lnB>
+                  </a:tcPr>
+                </a:tc>
+              </a:tr>
+              <a:tr h="898855">
+                <a:tc>
+                  <a:txBody>
+                    <a:bodyPr/>
+                    <a:lstStyle/>
+                    <a:p>
+                      <a:pPr algn="l" indent="0" marL="0">
+                        <a:lnSpc>
+                          <a:spcPts val="2640"/>
+                        </a:lnSpc>
+                        <a:buNone/>
+                      </a:pPr>
+                      <a:r>
+                        <a:rPr lang="ja-JP" altLang="en-US" sz="2200" dirty="0">
+                          <a:solidFill>
+                            <a:srgbClr val="262626"/>
+                          </a:solidFill>
+                          <a:latin typeface="メイリオ" pitchFamily="34" charset="0"/>
+                          <a:ea typeface="メイリオ" pitchFamily="34" charset="-122"/>
+                          <a:cs typeface="メイリオ" pitchFamily="34" charset="-120"/>
+                        </a:rPr>
+                        <a:t>•</a:t>
+                      </a:r>
+                      <a:endParaRPr lang="en-US" sz="2200" dirty="0">
+                        <a:latin typeface="メイリオ" charset="0"/>
+                        <a:ea typeface="メイリオ" charset="0"/>
+                        <a:cs typeface="メイリオ" charset="0"/>
+                      </a:endParaRPr>
+                    </a:p>
+                  </a:txBody>
+                  <a:tcPr marL="0" marR="0" marT="0" marB="228600" anchor="t">
+                    <a:lnL w="0" cap="flat" cmpd="sng" algn="ctr">
+                      <a:noFill/>
+                    </a:lnL>
+                    <a:lnR w="0" cap="flat" cmpd="sng" algn="ctr">
+                      <a:noFill/>
+                    </a:lnR>
+                    <a:lnT w="0" cap="flat" cmpd="sng" algn="ctr">
+                      <a:noFill/>
+                    </a:lnT>
+                    <a:lnB w="0" cap="flat" cmpd="sng" algn="ctr">
+                      <a:noFill/>
+                    </a:lnB>
+                  </a:tcPr>
+                </a:tc>
+                <a:tc>
+                  <a:txBody>
+                    <a:bodyPr/>
+                    <a:lstStyle/>
+                    <a:p>
+                      <a:pPr algn="l" indent="0" marL="0">
+                        <a:lnSpc>
+                          <a:spcPts val="2640"/>
+                        </a:lnSpc>
+                        <a:buNone/>
+                      </a:pPr>
+                      <a:r>
+                        <a:rPr lang="ja-JP" altLang="en-US" sz="2200" dirty="0">
+                          <a:solidFill>
+                            <a:srgbClr val="262626"/>
+                          </a:solidFill>
+                          <a:latin typeface="メイリオ" pitchFamily="34" charset="0"/>
+                          <a:ea typeface="メイリオ" pitchFamily="34" charset="-122"/>
+                          <a:cs typeface="メイリオ" pitchFamily="34" charset="-120"/>
+                        </a:rPr>
+                        <a:t>OSA で呼吸不全（オッズ比 2.4）、</a:t>
+                      </a:r>
+                      <a:endParaRPr lang="en-US" sz="2200" dirty="0">
+                        <a:latin typeface="メイリオ" charset="0"/>
+                        <a:ea typeface="メイリオ" charset="0"/>
+                        <a:cs typeface="メイリオ" charset="0"/>
+                      </a:endParaRPr>
+                    </a:p>
+                    <a:p>
+                      <a:pPr algn="l" indent="0" marL="0">
+                        <a:lnSpc>
+                          <a:spcPts val="2640"/>
+                        </a:lnSpc>
+                        <a:buNone/>
+                      </a:pPr>
+                      <a:r>
+                        <a:rPr lang="ja-JP" altLang="en-US" sz="2200" dirty="0">
+                          <a:solidFill>
+                            <a:srgbClr val="262626"/>
+                          </a:solidFill>
+                          <a:latin typeface="メイリオ" pitchFamily="34" charset="0"/>
+                          <a:ea typeface="メイリオ" pitchFamily="34" charset="-122"/>
+                          <a:cs typeface="メイリオ" pitchFamily="34" charset="-120"/>
+                        </a:rPr>
+                        <a:t>ICU 転床（2.8）</a:t>
+                      </a:r>
+                      <a:endParaRPr lang="en-US" sz="2200" dirty="0">
+                        <a:latin typeface="メイリオ" charset="0"/>
+                        <a:ea typeface="メイリオ" charset="0"/>
+                        <a:cs typeface="メイリオ" charset="0"/>
+                      </a:endParaRPr>
+                    </a:p>
+                  </a:txBody>
+                  <a:tcPr marL="0" marR="0" marT="0" marB="228600" anchor="t">
+                    <a:lnL w="0" cap="flat" cmpd="sng" algn="ctr">
+                      <a:noFill/>
+                    </a:lnL>
+                    <a:lnR w="0" cap="flat" cmpd="sng" algn="ctr">
+                      <a:noFill/>
+                    </a:lnR>
+                    <a:lnT w="0" cap="flat" cmpd="sng" algn="ctr">
+                      <a:noFill/>
+                    </a:lnT>
+                    <a:lnB w="0" cap="flat" cmpd="sng" algn="ctr">
+                      <a:noFill/>
+                    </a:lnB>
+                  </a:tcPr>
+                </a:tc>
+              </a:tr>
+              <a:tr h="1234440">
+                <a:tc>
+                  <a:txBody>
+                    <a:bodyPr/>
+                    <a:lstStyle/>
+                    <a:p>
+                      <a:pPr algn="l" indent="0" marL="0">
+                        <a:lnSpc>
+                          <a:spcPts val="2640"/>
+                        </a:lnSpc>
+                        <a:buNone/>
+                      </a:pPr>
+                      <a:r>
+                        <a:rPr lang="ja-JP" altLang="en-US" sz="2200" dirty="0">
+                          <a:solidFill>
+                            <a:srgbClr val="262626"/>
+                          </a:solidFill>
+                          <a:latin typeface="メイリオ" pitchFamily="34" charset="0"/>
+                          <a:ea typeface="メイリオ" pitchFamily="34" charset="-122"/>
+                          <a:cs typeface="メイリオ" pitchFamily="34" charset="-120"/>
+                        </a:rPr>
+                        <a:t>•</a:t>
+                      </a:r>
+                      <a:endParaRPr lang="en-US" sz="2200" dirty="0">
+                        <a:latin typeface="メイリオ" charset="0"/>
+                        <a:ea typeface="メイリオ" charset="0"/>
+                        <a:cs typeface="メイリオ" charset="0"/>
+                      </a:endParaRPr>
+                    </a:p>
+                  </a:txBody>
+                  <a:tcPr marL="0" marR="0" marT="0" marB="228600" anchor="t">
+                    <a:lnL w="0" cap="flat" cmpd="sng" algn="ctr">
+                      <a:noFill/>
+                    </a:lnL>
+                    <a:lnR w="0" cap="flat" cmpd="sng" algn="ctr">
+                      <a:noFill/>
+                    </a:lnR>
+                    <a:lnT w="0" cap="flat" cmpd="sng" algn="ctr">
+                      <a:noFill/>
+                    </a:lnT>
+                    <a:lnB w="0" cap="flat" cmpd="sng" algn="ctr">
+                      <a:noFill/>
+                    </a:lnB>
+                  </a:tcPr>
+                </a:tc>
+                <a:tc>
+                  <a:txBody>
+                    <a:bodyPr/>
+                    <a:lstStyle/>
+                    <a:p>
+                      <a:pPr algn="l" indent="0" marL="0">
+                        <a:lnSpc>
+                          <a:spcPts val="2640"/>
+                        </a:lnSpc>
+                        <a:buNone/>
+                      </a:pPr>
+                      <a:r>
+                        <a:rPr lang="ja-JP" altLang="en-US" sz="2200" dirty="0">
+                          <a:solidFill>
+                            <a:srgbClr val="262626"/>
+                          </a:solidFill>
+                          <a:latin typeface="メイリオ" pitchFamily="34" charset="0"/>
+                          <a:ea typeface="メイリオ" pitchFamily="34" charset="-122"/>
+                          <a:cs typeface="メイリオ" pitchFamily="34" charset="-120"/>
+                        </a:rPr>
+                        <a:t>疑いだけでは延期しない。</a:t>
+                      </a:r>
+                      <a:endParaRPr lang="en-US" sz="2200" dirty="0">
+                        <a:latin typeface="メイリオ" charset="0"/>
+                        <a:ea typeface="メイリオ" charset="0"/>
+                        <a:cs typeface="メイリオ" charset="0"/>
+                      </a:endParaRPr>
+                    </a:p>
+                    <a:p>
+                      <a:pPr algn="l" indent="0" marL="0">
+                        <a:lnSpc>
+                          <a:spcPts val="2640"/>
+                        </a:lnSpc>
+                        <a:buNone/>
+                      </a:pPr>
+                      <a:r>
+                        <a:rPr lang="ja-JP" altLang="en-US" sz="2200" dirty="0">
+                          <a:solidFill>
+                            <a:srgbClr val="262626"/>
+                          </a:solidFill>
+                          <a:latin typeface="メイリオ" pitchFamily="34" charset="0"/>
+                          <a:ea typeface="メイリオ" pitchFamily="34" charset="-122"/>
+                          <a:cs typeface="メイリオ" pitchFamily="34" charset="-120"/>
+                        </a:rPr>
+                        <a:t>低換気・重症肺高血圧・</a:t>
+                      </a:r>
+                      <a:endParaRPr lang="en-US" sz="2200" dirty="0">
+                        <a:latin typeface="メイリオ" charset="0"/>
+                        <a:ea typeface="メイリオ" charset="0"/>
+                        <a:cs typeface="メイリオ" charset="0"/>
+                      </a:endParaRPr>
+                    </a:p>
+                    <a:p>
+                      <a:pPr algn="l" indent="0" marL="0">
+                        <a:lnSpc>
+                          <a:spcPts val="2640"/>
+                        </a:lnSpc>
+                        <a:buNone/>
+                      </a:pPr>
+                      <a:r>
+                        <a:rPr lang="ja-JP" altLang="en-US" sz="2200" dirty="0">
+                          <a:solidFill>
+                            <a:srgbClr val="262626"/>
+                          </a:solidFill>
+                          <a:latin typeface="メイリオ" pitchFamily="34" charset="0"/>
+                          <a:ea typeface="メイリオ" pitchFamily="34" charset="-122"/>
+                          <a:cs typeface="メイリオ" pitchFamily="34" charset="-120"/>
+                        </a:rPr>
+                        <a:t>原因不明の安静時低酸素なら追加評価</a:t>
+                      </a:r>
+                      <a:endParaRPr lang="en-US" sz="2200" dirty="0">
+                        <a:latin typeface="メイリオ" charset="0"/>
+                        <a:ea typeface="メイリオ" charset="0"/>
+                        <a:cs typeface="メイリオ" charset="0"/>
+                      </a:endParaRPr>
+                    </a:p>
+                  </a:txBody>
+                  <a:tcPr marL="0" marR="0" marT="0" marB="228600" anchor="t">
+                    <a:lnL w="0" cap="flat" cmpd="sng" algn="ctr">
+                      <a:noFill/>
+                    </a:lnL>
+                    <a:lnR w="0" cap="flat" cmpd="sng" algn="ctr">
+                      <a:noFill/>
+                    </a:lnR>
+                    <a:lnT w="0" cap="flat" cmpd="sng" algn="ctr">
+                      <a:noFill/>
+                    </a:lnT>
+                    <a:lnB w="0" cap="flat" cmpd="sng" algn="ctr">
+                      <a:noFill/>
+                    </a:lnB>
+                  </a:tcPr>
+                </a:tc>
+              </a:tr>
+              <a:tr h="670255">
+                <a:tc>
+                  <a:txBody>
+                    <a:bodyPr/>
+                    <a:lstStyle/>
+                    <a:p>
+                      <a:pPr algn="l" indent="0" marL="0">
+                        <a:lnSpc>
+                          <a:spcPts val="2640"/>
+                        </a:lnSpc>
+                        <a:buNone/>
+                      </a:pPr>
+                      <a:r>
+                        <a:rPr lang="ja-JP" altLang="en-US" sz="2200" dirty="0">
+                          <a:solidFill>
+                            <a:srgbClr val="262626"/>
+                          </a:solidFill>
+                          <a:latin typeface="メイリオ" pitchFamily="34" charset="0"/>
+                          <a:ea typeface="メイリオ" pitchFamily="34" charset="-122"/>
+                          <a:cs typeface="メイリオ" pitchFamily="34" charset="-120"/>
+                        </a:rPr>
+                        <a:t>•</a:t>
+                      </a:r>
+                      <a:endParaRPr lang="en-US" sz="2200" dirty="0">
+                        <a:latin typeface="メイリオ" charset="0"/>
+                        <a:ea typeface="メイリオ" charset="0"/>
+                        <a:cs typeface="メイリオ" charset="0"/>
+                      </a:endParaRPr>
+                    </a:p>
+                  </a:txBody>
+                  <a:tcPr marL="0" marR="0" marT="0" marB="0" anchor="t">
+                    <a:lnL w="0" cap="flat" cmpd="sng" algn="ctr">
+                      <a:noFill/>
+                    </a:lnL>
+                    <a:lnR w="0" cap="flat" cmpd="sng" algn="ctr">
+                      <a:noFill/>
+                    </a:lnR>
+                    <a:lnT w="0" cap="flat" cmpd="sng" algn="ctr">
+                      <a:noFill/>
+                    </a:lnT>
+                    <a:lnB w="0" cap="flat" cmpd="sng" algn="ctr">
+                      <a:noFill/>
+                    </a:lnB>
+                  </a:tcPr>
+                </a:tc>
+                <a:tc>
+                  <a:txBody>
+                    <a:bodyPr/>
+                    <a:lstStyle/>
+                    <a:p>
+                      <a:pPr algn="l" indent="0" marL="0">
+                        <a:lnSpc>
+                          <a:spcPts val="2640"/>
+                        </a:lnSpc>
+                        <a:buNone/>
+                      </a:pPr>
+                      <a:r>
+                        <a:rPr lang="ja-JP" altLang="en-US" sz="2200" dirty="0">
+                          <a:solidFill>
+                            <a:srgbClr val="262626"/>
+                          </a:solidFill>
+                          <a:latin typeface="メイリオ" pitchFamily="34" charset="0"/>
+                          <a:ea typeface="メイリオ" pitchFamily="34" charset="-122"/>
+                          <a:cs typeface="メイリオ" pitchFamily="34" charset="-120"/>
+                        </a:rPr>
+                        <a:t>CPAP は持参。</a:t>
+                      </a:r>
+                      <a:endParaRPr lang="en-US" sz="2200" dirty="0">
+                        <a:latin typeface="メイリオ" charset="0"/>
+                        <a:ea typeface="メイリオ" charset="0"/>
+                        <a:cs typeface="メイリオ" charset="0"/>
+                      </a:endParaRPr>
+                    </a:p>
+                    <a:p>
+                      <a:pPr algn="l" indent="0" marL="0">
+                        <a:lnSpc>
+                          <a:spcPts val="2640"/>
+                        </a:lnSpc>
+                        <a:buNone/>
+                      </a:pPr>
+                      <a:r>
+                        <a:rPr lang="ja-JP" altLang="en-US" sz="2200" dirty="0">
+                          <a:solidFill>
+                            <a:srgbClr val="262626"/>
+                          </a:solidFill>
+                          <a:latin typeface="メイリオ" pitchFamily="34" charset="0"/>
+                          <a:ea typeface="メイリオ" pitchFamily="34" charset="-122"/>
+                          <a:cs typeface="メイリオ" pitchFamily="34" charset="-120"/>
+                        </a:rPr>
+                        <a:t>困難気道として備え、区域麻酔を優先</a:t>
+                      </a:r>
+                      <a:endParaRPr lang="en-US" sz="2200" dirty="0">
+                        <a:latin typeface="メイリオ" charset="0"/>
+                        <a:ea typeface="メイリオ" charset="0"/>
+                        <a:cs typeface="メイリオ" charset="0"/>
+                      </a:endParaRPr>
+                    </a:p>
+                  </a:txBody>
+                  <a:tcPr marL="0" marR="0" marT="0" marB="0" anchor="t">
+                    <a:lnL w="0" cap="flat" cmpd="sng" algn="ctr">
+                      <a:noFill/>
+                    </a:lnL>
+                    <a:lnR w="0" cap="flat" cmpd="sng" algn="ctr">
+                      <a:noFill/>
+                    </a:lnR>
+                    <a:lnT w="0" cap="flat" cmpd="sng" algn="ctr">
+                      <a:noFill/>
+                    </a:lnT>
+                    <a:lnB w="0" cap="flat" cmpd="sng" algn="ctr">
+                      <a:noFill/>
+                    </a:lnB>
+                  </a:tcPr>
+                </a:tc>
+              </a:tr>
+            </a:tbl>
+          </a:graphicData>
+        </a:graphic>
+      </p:graphicFrame>
     </p:spTree>
   </p:cSld>
   <p:clrMapOvr>
@@ -8688,169 +10393,513 @@
           </a:p>
         </p:txBody>
       </p:sp>
-      <p:sp>
-        <p:nvSpPr>
-          <p:cNvPr id="13" name="Text 11"/>
-          <p:cNvSpPr txBox="1"/>
-          <p:nvPr/>
-        </p:nvSpPr>
-        <p:spPr>
-          <a:xfrm>
-            <a:off x="630936" y="2212848"/>
-            <a:ext cx="5166360" cy="2587752"/>
-          </a:xfrm>
-          <a:prstGeom prst="rect">
-            <a:avLst/>
-          </a:prstGeom>
-          <a:noFill/>
-          <a:ln/>
-        </p:spPr>
-        <p:txBody>
-          <a:bodyPr wrap="square" lIns="0" tIns="0" rIns="0" bIns="0" rtlCol="0" anchor="t"/>
-          <a:lstStyle/>
-          <a:p>
-            <a:pPr algn="l" marL="254000" indent="-254000">
-              <a:lnSpc>
-                <a:spcPct val="80000"/>
-              </a:lnSpc>
-              <a:spcAft>
-                <a:spcPts val="800"/>
-              </a:spcAft>
-              <a:buSzPct val="100000"/>
-              <a:buChar char="•"/>
-            </a:pPr>
-            <a:r>
-              <a:rPr lang="ja-JP" altLang="en-US" sz="2200" dirty="0">
-                <a:solidFill>
-                  <a:srgbClr val="262626"/>
-                </a:solidFill>
-                <a:latin typeface="メイリオ" pitchFamily="34" charset="0"/>
-                <a:ea typeface="メイリオ" pitchFamily="34" charset="-122"/>
-                <a:cs typeface="メイリオ" pitchFamily="34" charset="-120"/>
-              </a:rPr>
-              <a:t>38℃ 超の発熱、ぐったりしている</a:t>
-            </a:r>
-            <a:endParaRPr lang="ja-JP" sz="2200" dirty="0"/>
-          </a:p>
-          <a:p>
-            <a:pPr algn="l" marL="254000" indent="-254000">
-              <a:lnSpc>
-                <a:spcPct val="80000"/>
-              </a:lnSpc>
-              <a:spcAft>
-                <a:spcPts val="800"/>
-              </a:spcAft>
-              <a:buSzPct val="100000"/>
-              <a:buChar char="•"/>
-            </a:pPr>
-            <a:r>
-              <a:rPr lang="ja-JP" altLang="en-US" sz="2200" dirty="0">
-                <a:solidFill>
-                  <a:srgbClr val="262626"/>
-                </a:solidFill>
-                <a:latin typeface="メイリオ" pitchFamily="34" charset="0"/>
-                <a:ea typeface="メイリオ" pitchFamily="34" charset="-122"/>
-                <a:cs typeface="メイリオ" pitchFamily="34" charset="-120"/>
-              </a:rPr>
-              <a:t>膿性鼻汁、湿性咳嗽</a:t>
-            </a:r>
-            <a:endParaRPr lang="ja-JP" sz="2200" dirty="0"/>
-          </a:p>
-          <a:p>
-            <a:pPr algn="l" marL="254000" indent="-254000">
-              <a:lnSpc>
-                <a:spcPct val="80000"/>
-              </a:lnSpc>
-              <a:spcAft>
-                <a:spcPts val="800"/>
-              </a:spcAft>
-              <a:buSzPct val="100000"/>
-              <a:buChar char="•"/>
-            </a:pPr>
-            <a:r>
-              <a:rPr lang="ja-JP" altLang="en-US" sz="2200" dirty="0">
-                <a:solidFill>
-                  <a:srgbClr val="262626"/>
-                </a:solidFill>
-                <a:latin typeface="メイリオ" pitchFamily="34" charset="0"/>
-                <a:ea typeface="メイリオ" pitchFamily="34" charset="-122"/>
-                <a:cs typeface="メイリオ" pitchFamily="34" charset="-120"/>
-              </a:rPr>
-              <a:t>喘鳴・ラ音（下気道の所見）</a:t>
-            </a:r>
-            <a:endParaRPr lang="ja-JP" sz="2200" dirty="0"/>
-          </a:p>
-          <a:p>
-            <a:pPr algn="l" marL="254000" indent="-254000">
-              <a:lnSpc>
-                <a:spcPct val="80000"/>
-              </a:lnSpc>
-              <a:buSzPct val="100000"/>
-              <a:buChar char="•"/>
-            </a:pPr>
-            <a:r>
-              <a:rPr lang="ja-JP" altLang="en-US" sz="2200" dirty="0">
-                <a:solidFill>
-                  <a:srgbClr val="262626"/>
-                </a:solidFill>
-                <a:latin typeface="メイリオ" pitchFamily="34" charset="0"/>
-                <a:ea typeface="メイリオ" pitchFamily="34" charset="-122"/>
-                <a:cs typeface="メイリオ" pitchFamily="34" charset="-120"/>
-              </a:rPr>
-              <a:t>上気道炎が今ある、または</a:t>
-            </a:r>
-            <a:endParaRPr lang="ja-JP" sz="2200" dirty="0"/>
-          </a:p>
-          <a:p>
-            <a:pPr algn="l" marL="254000" indent="-254000">
-              <a:lnSpc>
-                <a:spcPct val="80000"/>
-              </a:lnSpc>
-              <a:spcAft>
-                <a:spcPts val="800"/>
-              </a:spcAft>
-              <a:buSzPct val="100000"/>
-              <a:buChar char="　"/>
-            </a:pPr>
-            <a:r>
-              <a:rPr lang="ja-JP" altLang="en-US" sz="2200" dirty="0">
-                <a:solidFill>
-                  <a:srgbClr val="262626"/>
-                </a:solidFill>
-                <a:latin typeface="メイリオ" pitchFamily="34" charset="0"/>
-                <a:ea typeface="メイリオ" pitchFamily="34" charset="-122"/>
-                <a:cs typeface="メイリオ" pitchFamily="34" charset="-120"/>
-              </a:rPr>
-              <a:t>2 週以内ならリスク約 2 倍</a:t>
-            </a:r>
-            <a:endParaRPr lang="ja-JP" sz="2200" dirty="0"/>
-          </a:p>
-          <a:p>
-            <a:pPr algn="l" marL="254000" indent="-254000">
-              <a:lnSpc>
-                <a:spcPct val="80000"/>
-              </a:lnSpc>
-              <a:buSzPct val="100000"/>
-              <a:buChar char="•"/>
-            </a:pPr>
-            <a:r>
-              <a:rPr lang="ja-JP" altLang="en-US" sz="2200" dirty="0">
-                <a:solidFill>
-                  <a:srgbClr val="262626"/>
-                </a:solidFill>
-                <a:latin typeface="メイリオ" pitchFamily="34" charset="0"/>
-                <a:ea typeface="メイリオ" pitchFamily="34" charset="-122"/>
-                <a:cs typeface="メイリオ" pitchFamily="34" charset="-120"/>
-              </a:rPr>
-              <a:t>気管挿管が要る、気道の手術</a:t>
-            </a:r>
-            <a:endParaRPr lang="ja-JP" sz="2200" dirty="0"/>
-          </a:p>
-        </p:txBody>
-      </p:sp>
-      <p:sp>
-        <p:nvSpPr>
-          <p:cNvPr id="14" name="Shape 12"/>
+      <p:graphicFrame>
+        <p:nvGraphicFramePr>
+          <p:cNvPr id="13" name="Table 0"/>
+          <p:cNvGraphicFramePr>
+            <a:graphicFrameLocks noGrp="1"/>
+          </p:cNvGraphicFramePr>
+          <p:nvPr>
+            <p:extLst>
+              <p:ext uri="{D42A27DB-BD31-4B8C-83A1-F6EECF244321}">
+                <p14:modId xmlns:p14="http://schemas.microsoft.com/office/powerpoint/2010/main" val="1579011935"/>
+              </p:ext>
+            </p:extLst>
+          </p:nvPr>
+        </p:nvGraphicFramePr>
+        <p:xfrm>
+          <a:off x="630936" y="2212848"/>
+          <a:ext cx="5166360" cy="914400"/>
+        </p:xfrm>
+        <a:graphic>
+          <a:graphicData uri="http://schemas.openxmlformats.org/drawingml/2006/table">
+            <a:tbl>
+              <a:tblPr/>
+              <a:tblGrid>
+                <a:gridCol w="256032"/>
+                <a:gridCol w="4910328"/>
+              </a:tblGrid>
+              <a:tr h="437083">
+                <a:tc>
+                  <a:txBody>
+                    <a:bodyPr/>
+                    <a:lstStyle/>
+                    <a:p>
+                      <a:pPr algn="l" indent="0" marL="0">
+                        <a:lnSpc>
+                          <a:spcPts val="2640"/>
+                        </a:lnSpc>
+                        <a:buNone/>
+                      </a:pPr>
+                      <a:r>
+                        <a:rPr lang="ja-JP" altLang="en-US" sz="2200" dirty="0">
+                          <a:solidFill>
+                            <a:srgbClr val="262626"/>
+                          </a:solidFill>
+                          <a:latin typeface="メイリオ" pitchFamily="34" charset="0"/>
+                          <a:ea typeface="メイリオ" pitchFamily="34" charset="-122"/>
+                          <a:cs typeface="メイリオ" pitchFamily="34" charset="-120"/>
+                        </a:rPr>
+                        <a:t>•</a:t>
+                      </a:r>
+                      <a:endParaRPr lang="en-US" sz="2200" dirty="0">
+                        <a:latin typeface="メイリオ" charset="0"/>
+                        <a:ea typeface="メイリオ" charset="0"/>
+                        <a:cs typeface="メイリオ" charset="0"/>
+                      </a:endParaRPr>
+                    </a:p>
+                  </a:txBody>
+                  <a:tcPr marL="0" marR="0" marT="0" marB="101498" anchor="t">
+                    <a:lnL w="0" cap="flat" cmpd="sng" algn="ctr">
+                      <a:noFill/>
+                    </a:lnL>
+                    <a:lnR w="0" cap="flat" cmpd="sng" algn="ctr">
+                      <a:noFill/>
+                    </a:lnR>
+                    <a:lnT w="0" cap="flat" cmpd="sng" algn="ctr">
+                      <a:noFill/>
+                    </a:lnT>
+                    <a:lnB w="0" cap="flat" cmpd="sng" algn="ctr">
+                      <a:noFill/>
+                    </a:lnB>
+                  </a:tcPr>
+                </a:tc>
+                <a:tc>
+                  <a:txBody>
+                    <a:bodyPr/>
+                    <a:lstStyle/>
+                    <a:p>
+                      <a:pPr algn="l" indent="0" marL="0">
+                        <a:lnSpc>
+                          <a:spcPts val="2640"/>
+                        </a:lnSpc>
+                        <a:buNone/>
+                      </a:pPr>
+                      <a:r>
+                        <a:rPr lang="ja-JP" altLang="en-US" sz="2200" dirty="0">
+                          <a:solidFill>
+                            <a:srgbClr val="262626"/>
+                          </a:solidFill>
+                          <a:latin typeface="メイリオ" pitchFamily="34" charset="0"/>
+                          <a:ea typeface="メイリオ" pitchFamily="34" charset="-122"/>
+                          <a:cs typeface="メイリオ" pitchFamily="34" charset="-120"/>
+                        </a:rPr>
+                        <a:t>38℃ 超の発熱、ぐったりしている</a:t>
+                      </a:r>
+                      <a:endParaRPr lang="en-US" sz="2200" dirty="0">
+                        <a:latin typeface="メイリオ" charset="0"/>
+                        <a:ea typeface="メイリオ" charset="0"/>
+                        <a:cs typeface="メイリオ" charset="0"/>
+                      </a:endParaRPr>
+                    </a:p>
+                  </a:txBody>
+                  <a:tcPr marL="0" marR="0" marT="0" marB="101498" anchor="t">
+                    <a:lnL w="0" cap="flat" cmpd="sng" algn="ctr">
+                      <a:noFill/>
+                    </a:lnL>
+                    <a:lnR w="0" cap="flat" cmpd="sng" algn="ctr">
+                      <a:noFill/>
+                    </a:lnR>
+                    <a:lnT w="0" cap="flat" cmpd="sng" algn="ctr">
+                      <a:noFill/>
+                    </a:lnT>
+                    <a:lnB w="0" cap="flat" cmpd="sng" algn="ctr">
+                      <a:noFill/>
+                    </a:lnB>
+                  </a:tcPr>
+                </a:tc>
+              </a:tr>
+              <a:tr h="437083">
+                <a:tc>
+                  <a:txBody>
+                    <a:bodyPr/>
+                    <a:lstStyle/>
+                    <a:p>
+                      <a:pPr algn="l" indent="0" marL="0">
+                        <a:lnSpc>
+                          <a:spcPts val="2640"/>
+                        </a:lnSpc>
+                        <a:buNone/>
+                      </a:pPr>
+                      <a:r>
+                        <a:rPr lang="ja-JP" altLang="en-US" sz="2200" dirty="0">
+                          <a:solidFill>
+                            <a:srgbClr val="262626"/>
+                          </a:solidFill>
+                          <a:latin typeface="メイリオ" pitchFamily="34" charset="0"/>
+                          <a:ea typeface="メイリオ" pitchFamily="34" charset="-122"/>
+                          <a:cs typeface="メイリオ" pitchFamily="34" charset="-120"/>
+                        </a:rPr>
+                        <a:t>•</a:t>
+                      </a:r>
+                      <a:endParaRPr lang="en-US" sz="2200" dirty="0">
+                        <a:latin typeface="メイリオ" charset="0"/>
+                        <a:ea typeface="メイリオ" charset="0"/>
+                        <a:cs typeface="メイリオ" charset="0"/>
+                      </a:endParaRPr>
+                    </a:p>
+                  </a:txBody>
+                  <a:tcPr marL="0" marR="0" marT="0" marB="101498" anchor="t">
+                    <a:lnL w="0" cap="flat" cmpd="sng" algn="ctr">
+                      <a:noFill/>
+                    </a:lnL>
+                    <a:lnR w="0" cap="flat" cmpd="sng" algn="ctr">
+                      <a:noFill/>
+                    </a:lnR>
+                    <a:lnT w="0" cap="flat" cmpd="sng" algn="ctr">
+                      <a:noFill/>
+                    </a:lnT>
+                    <a:lnB w="0" cap="flat" cmpd="sng" algn="ctr">
+                      <a:noFill/>
+                    </a:lnB>
+                  </a:tcPr>
+                </a:tc>
+                <a:tc>
+                  <a:txBody>
+                    <a:bodyPr/>
+                    <a:lstStyle/>
+                    <a:p>
+                      <a:pPr algn="l" indent="0" marL="0">
+                        <a:lnSpc>
+                          <a:spcPts val="2640"/>
+                        </a:lnSpc>
+                        <a:buNone/>
+                      </a:pPr>
+                      <a:r>
+                        <a:rPr lang="ja-JP" altLang="en-US" sz="2200" dirty="0">
+                          <a:solidFill>
+                            <a:srgbClr val="262626"/>
+                          </a:solidFill>
+                          <a:latin typeface="メイリオ" pitchFamily="34" charset="0"/>
+                          <a:ea typeface="メイリオ" pitchFamily="34" charset="-122"/>
+                          <a:cs typeface="メイリオ" pitchFamily="34" charset="-120"/>
+                        </a:rPr>
+                        <a:t>膿性鼻汁、湿性咳嗽</a:t>
+                      </a:r>
+                      <a:endParaRPr lang="en-US" sz="2200" dirty="0">
+                        <a:latin typeface="メイリオ" charset="0"/>
+                        <a:ea typeface="メイリオ" charset="0"/>
+                        <a:cs typeface="メイリオ" charset="0"/>
+                      </a:endParaRPr>
+                    </a:p>
+                  </a:txBody>
+                  <a:tcPr marL="0" marR="0" marT="0" marB="101498" anchor="t">
+                    <a:lnL w="0" cap="flat" cmpd="sng" algn="ctr">
+                      <a:noFill/>
+                    </a:lnL>
+                    <a:lnR w="0" cap="flat" cmpd="sng" algn="ctr">
+                      <a:noFill/>
+                    </a:lnR>
+                    <a:lnT w="0" cap="flat" cmpd="sng" algn="ctr">
+                      <a:noFill/>
+                    </a:lnT>
+                    <a:lnB w="0" cap="flat" cmpd="sng" algn="ctr">
+                      <a:noFill/>
+                    </a:lnB>
+                  </a:tcPr>
+                </a:tc>
+              </a:tr>
+              <a:tr h="437083">
+                <a:tc>
+                  <a:txBody>
+                    <a:bodyPr/>
+                    <a:lstStyle/>
+                    <a:p>
+                      <a:pPr algn="l" indent="0" marL="0">
+                        <a:lnSpc>
+                          <a:spcPts val="2640"/>
+                        </a:lnSpc>
+                        <a:buNone/>
+                      </a:pPr>
+                      <a:r>
+                        <a:rPr lang="ja-JP" altLang="en-US" sz="2200" dirty="0">
+                          <a:solidFill>
+                            <a:srgbClr val="262626"/>
+                          </a:solidFill>
+                          <a:latin typeface="メイリオ" pitchFamily="34" charset="0"/>
+                          <a:ea typeface="メイリオ" pitchFamily="34" charset="-122"/>
+                          <a:cs typeface="メイリオ" pitchFamily="34" charset="-120"/>
+                        </a:rPr>
+                        <a:t>•</a:t>
+                      </a:r>
+                      <a:endParaRPr lang="en-US" sz="2200" dirty="0">
+                        <a:latin typeface="メイリオ" charset="0"/>
+                        <a:ea typeface="メイリオ" charset="0"/>
+                        <a:cs typeface="メイリオ" charset="0"/>
+                      </a:endParaRPr>
+                    </a:p>
+                  </a:txBody>
+                  <a:tcPr marL="0" marR="0" marT="0" marB="101498" anchor="t">
+                    <a:lnL w="0" cap="flat" cmpd="sng" algn="ctr">
+                      <a:noFill/>
+                    </a:lnL>
+                    <a:lnR w="0" cap="flat" cmpd="sng" algn="ctr">
+                      <a:noFill/>
+                    </a:lnR>
+                    <a:lnT w="0" cap="flat" cmpd="sng" algn="ctr">
+                      <a:noFill/>
+                    </a:lnT>
+                    <a:lnB w="0" cap="flat" cmpd="sng" algn="ctr">
+                      <a:noFill/>
+                    </a:lnB>
+                  </a:tcPr>
+                </a:tc>
+                <a:tc>
+                  <a:txBody>
+                    <a:bodyPr/>
+                    <a:lstStyle/>
+                    <a:p>
+                      <a:pPr algn="l" indent="0" marL="0">
+                        <a:lnSpc>
+                          <a:spcPts val="2640"/>
+                        </a:lnSpc>
+                        <a:buNone/>
+                      </a:pPr>
+                      <a:r>
+                        <a:rPr lang="ja-JP" altLang="en-US" sz="2200" dirty="0">
+                          <a:solidFill>
+                            <a:srgbClr val="262626"/>
+                          </a:solidFill>
+                          <a:latin typeface="メイリオ" pitchFamily="34" charset="0"/>
+                          <a:ea typeface="メイリオ" pitchFamily="34" charset="-122"/>
+                          <a:cs typeface="メイリオ" pitchFamily="34" charset="-120"/>
+                        </a:rPr>
+                        <a:t>喘鳴・ラ音（下気道の所見）</a:t>
+                      </a:r>
+                      <a:endParaRPr lang="en-US" sz="2200" dirty="0">
+                        <a:latin typeface="メイリオ" charset="0"/>
+                        <a:ea typeface="メイリオ" charset="0"/>
+                        <a:cs typeface="メイリオ" charset="0"/>
+                      </a:endParaRPr>
+                    </a:p>
+                  </a:txBody>
+                  <a:tcPr marL="0" marR="0" marT="0" marB="101498" anchor="t">
+                    <a:lnL w="0" cap="flat" cmpd="sng" algn="ctr">
+                      <a:noFill/>
+                    </a:lnL>
+                    <a:lnR w="0" cap="flat" cmpd="sng" algn="ctr">
+                      <a:noFill/>
+                    </a:lnR>
+                    <a:lnT w="0" cap="flat" cmpd="sng" algn="ctr">
+                      <a:noFill/>
+                    </a:lnT>
+                    <a:lnB w="0" cap="flat" cmpd="sng" algn="ctr">
+                      <a:noFill/>
+                    </a:lnB>
+                  </a:tcPr>
+                </a:tc>
+              </a:tr>
+              <a:tr h="771754">
+                <a:tc>
+                  <a:txBody>
+                    <a:bodyPr/>
+                    <a:lstStyle/>
+                    <a:p>
+                      <a:pPr algn="l" indent="0" marL="0">
+                        <a:lnSpc>
+                          <a:spcPts val="2640"/>
+                        </a:lnSpc>
+                        <a:buNone/>
+                      </a:pPr>
+                      <a:r>
+                        <a:rPr lang="ja-JP" altLang="en-US" sz="2200" dirty="0">
+                          <a:solidFill>
+                            <a:srgbClr val="262626"/>
+                          </a:solidFill>
+                          <a:latin typeface="メイリオ" pitchFamily="34" charset="0"/>
+                          <a:ea typeface="メイリオ" pitchFamily="34" charset="-122"/>
+                          <a:cs typeface="メイリオ" pitchFamily="34" charset="-120"/>
+                        </a:rPr>
+                        <a:t>•</a:t>
+                      </a:r>
+                      <a:endParaRPr lang="en-US" sz="2200" dirty="0">
+                        <a:latin typeface="メイリオ" charset="0"/>
+                        <a:ea typeface="メイリオ" charset="0"/>
+                        <a:cs typeface="メイリオ" charset="0"/>
+                      </a:endParaRPr>
+                    </a:p>
+                  </a:txBody>
+                  <a:tcPr marL="0" marR="0" marT="0" marB="101498" anchor="t">
+                    <a:lnL w="0" cap="flat" cmpd="sng" algn="ctr">
+                      <a:noFill/>
+                    </a:lnL>
+                    <a:lnR w="0" cap="flat" cmpd="sng" algn="ctr">
+                      <a:noFill/>
+                    </a:lnR>
+                    <a:lnT w="0" cap="flat" cmpd="sng" algn="ctr">
+                      <a:noFill/>
+                    </a:lnT>
+                    <a:lnB w="0" cap="flat" cmpd="sng" algn="ctr">
+                      <a:noFill/>
+                    </a:lnB>
+                  </a:tcPr>
+                </a:tc>
+                <a:tc>
+                  <a:txBody>
+                    <a:bodyPr/>
+                    <a:lstStyle/>
+                    <a:p>
+                      <a:pPr algn="l" indent="0" marL="0">
+                        <a:lnSpc>
+                          <a:spcPts val="2640"/>
+                        </a:lnSpc>
+                        <a:buNone/>
+                      </a:pPr>
+                      <a:r>
+                        <a:rPr lang="ja-JP" altLang="en-US" sz="2200" dirty="0">
+                          <a:solidFill>
+                            <a:srgbClr val="262626"/>
+                          </a:solidFill>
+                          <a:latin typeface="メイリオ" pitchFamily="34" charset="0"/>
+                          <a:ea typeface="メイリオ" pitchFamily="34" charset="-122"/>
+                          <a:cs typeface="メイリオ" pitchFamily="34" charset="-120"/>
+                        </a:rPr>
+                        <a:t>上気道炎が今ある、または</a:t>
+                      </a:r>
+                      <a:endParaRPr lang="en-US" sz="2200" dirty="0">
+                        <a:latin typeface="メイリオ" charset="0"/>
+                        <a:ea typeface="メイリオ" charset="0"/>
+                        <a:cs typeface="メイリオ" charset="0"/>
+                      </a:endParaRPr>
+                    </a:p>
+                    <a:p>
+                      <a:pPr algn="l" indent="0" marL="0">
+                        <a:lnSpc>
+                          <a:spcPts val="2640"/>
+                        </a:lnSpc>
+                        <a:buNone/>
+                      </a:pPr>
+                      <a:r>
+                        <a:rPr lang="ja-JP" altLang="en-US" sz="2200" dirty="0">
+                          <a:solidFill>
+                            <a:srgbClr val="262626"/>
+                          </a:solidFill>
+                          <a:latin typeface="メイリオ" pitchFamily="34" charset="0"/>
+                          <a:ea typeface="メイリオ" pitchFamily="34" charset="-122"/>
+                          <a:cs typeface="メイリオ" pitchFamily="34" charset="-120"/>
+                        </a:rPr>
+                        <a:t>2 週以内ならリスク約 2 倍</a:t>
+                      </a:r>
+                      <a:endParaRPr lang="en-US" sz="2200" dirty="0">
+                        <a:latin typeface="メイリオ" charset="0"/>
+                        <a:ea typeface="メイリオ" charset="0"/>
+                        <a:cs typeface="メイリオ" charset="0"/>
+                      </a:endParaRPr>
+                    </a:p>
+                  </a:txBody>
+                  <a:tcPr marL="0" marR="0" marT="0" marB="101498" anchor="t">
+                    <a:lnL w="0" cap="flat" cmpd="sng" algn="ctr">
+                      <a:noFill/>
+                    </a:lnL>
+                    <a:lnR w="0" cap="flat" cmpd="sng" algn="ctr">
+                      <a:noFill/>
+                    </a:lnR>
+                    <a:lnT w="0" cap="flat" cmpd="sng" algn="ctr">
+                      <a:noFill/>
+                    </a:lnT>
+                    <a:lnB w="0" cap="flat" cmpd="sng" algn="ctr">
+                      <a:noFill/>
+                    </a:lnB>
+                  </a:tcPr>
+                </a:tc>
+              </a:tr>
+              <a:tr h="335585">
+                <a:tc>
+                  <a:txBody>
+                    <a:bodyPr/>
+                    <a:lstStyle/>
+                    <a:p>
+                      <a:pPr algn="l" indent="0" marL="0">
+                        <a:lnSpc>
+                          <a:spcPts val="2640"/>
+                        </a:lnSpc>
+                        <a:buNone/>
+                      </a:pPr>
+                      <a:r>
+                        <a:rPr lang="ja-JP" altLang="en-US" sz="2200" dirty="0">
+                          <a:solidFill>
+                            <a:srgbClr val="262626"/>
+                          </a:solidFill>
+                          <a:latin typeface="メイリオ" pitchFamily="34" charset="0"/>
+                          <a:ea typeface="メイリオ" pitchFamily="34" charset="-122"/>
+                          <a:cs typeface="メイリオ" pitchFamily="34" charset="-120"/>
+                        </a:rPr>
+                        <a:t>•</a:t>
+                      </a:r>
+                      <a:endParaRPr lang="en-US" sz="2200" dirty="0">
+                        <a:latin typeface="メイリオ" charset="0"/>
+                        <a:ea typeface="メイリオ" charset="0"/>
+                        <a:cs typeface="メイリオ" charset="0"/>
+                      </a:endParaRPr>
+                    </a:p>
+                  </a:txBody>
+                  <a:tcPr marL="0" marR="0" marT="0" marB="0" anchor="t">
+                    <a:lnL w="0" cap="flat" cmpd="sng" algn="ctr">
+                      <a:noFill/>
+                    </a:lnL>
+                    <a:lnR w="0" cap="flat" cmpd="sng" algn="ctr">
+                      <a:noFill/>
+                    </a:lnR>
+                    <a:lnT w="0" cap="flat" cmpd="sng" algn="ctr">
+                      <a:noFill/>
+                    </a:lnT>
+                    <a:lnB w="0" cap="flat" cmpd="sng" algn="ctr">
+                      <a:noFill/>
+                    </a:lnB>
+                  </a:tcPr>
+                </a:tc>
+                <a:tc>
+                  <a:txBody>
+                    <a:bodyPr/>
+                    <a:lstStyle/>
+                    <a:p>
+                      <a:pPr algn="l" indent="0" marL="0">
+                        <a:lnSpc>
+                          <a:spcPts val="2640"/>
+                        </a:lnSpc>
+                        <a:buNone/>
+                      </a:pPr>
+                      <a:r>
+                        <a:rPr lang="ja-JP" altLang="en-US" sz="2200" dirty="0">
+                          <a:solidFill>
+                            <a:srgbClr val="262626"/>
+                          </a:solidFill>
+                          <a:latin typeface="メイリオ" pitchFamily="34" charset="0"/>
+                          <a:ea typeface="メイリオ" pitchFamily="34" charset="-122"/>
+                          <a:cs typeface="メイリオ" pitchFamily="34" charset="-120"/>
+                        </a:rPr>
+                        <a:t>気管挿管が要る、気道の手術</a:t>
+                      </a:r>
+                      <a:endParaRPr lang="en-US" sz="2200" dirty="0">
+                        <a:latin typeface="メイリオ" charset="0"/>
+                        <a:ea typeface="メイリオ" charset="0"/>
+                        <a:cs typeface="メイリオ" charset="0"/>
+                      </a:endParaRPr>
+                    </a:p>
+                  </a:txBody>
+                  <a:tcPr marL="0" marR="0" marT="0" marB="0" anchor="t">
+                    <a:lnL w="0" cap="flat" cmpd="sng" algn="ctr">
+                      <a:noFill/>
+                    </a:lnL>
+                    <a:lnR w="0" cap="flat" cmpd="sng" algn="ctr">
+                      <a:noFill/>
+                    </a:lnR>
+                    <a:lnT w="0" cap="flat" cmpd="sng" algn="ctr">
+                      <a:noFill/>
+                    </a:lnT>
+                    <a:lnB w="0" cap="flat" cmpd="sng" algn="ctr">
+                      <a:noFill/>
+                    </a:lnB>
+                  </a:tcPr>
+                </a:tc>
+              </a:tr>
+            </a:tbl>
+          </a:graphicData>
+        </a:graphic>
+      </p:graphicFrame>
+      <p:sp>
+        <p:nvSpPr>
+          <p:cNvPr id="14" name="Shape 11"/>
           <p:cNvSpPr/>
           <p:nvPr/>
         </p:nvSpPr>
@@ -8872,7 +10921,7 @@
       </p:sp>
       <p:sp>
         <p:nvSpPr>
-          <p:cNvPr id="15" name="Text 13"/>
+          <p:cNvPr id="15" name="Text 12"/>
           <p:cNvSpPr txBox="1"/>
           <p:nvPr/>
         </p:nvSpPr>
@@ -8909,190 +10958,537 @@
           </a:p>
         </p:txBody>
       </p:sp>
-      <p:sp>
-        <p:nvSpPr>
-          <p:cNvPr id="16" name="Text 14"/>
-          <p:cNvSpPr txBox="1"/>
-          <p:nvPr/>
-        </p:nvSpPr>
-        <p:spPr>
-          <a:xfrm>
-            <a:off x="6281928" y="2212848"/>
-            <a:ext cx="5276088" cy="2587752"/>
-          </a:xfrm>
-          <a:prstGeom prst="rect">
-            <a:avLst/>
-          </a:prstGeom>
-          <a:noFill/>
-          <a:ln/>
-        </p:spPr>
-        <p:txBody>
-          <a:bodyPr wrap="square" lIns="0" tIns="0" rIns="0" bIns="0" rtlCol="0" anchor="t"/>
-          <a:lstStyle/>
-          <a:p>
-            <a:pPr algn="l" marL="254000" indent="-254000">
-              <a:lnSpc>
-                <a:spcPct val="80000"/>
-              </a:lnSpc>
-              <a:spcAft>
-                <a:spcPts val="450"/>
-              </a:spcAft>
-              <a:buSzPct val="100000"/>
-              <a:buChar char="•"/>
-            </a:pPr>
-            <a:r>
-              <a:rPr lang="ja-JP" altLang="en-US" sz="2200" dirty="0">
-                <a:solidFill>
-                  <a:srgbClr val="262626"/>
-                </a:solidFill>
-                <a:latin typeface="メイリオ" pitchFamily="34" charset="0"/>
-                <a:ea typeface="メイリオ" pitchFamily="34" charset="-122"/>
-                <a:cs typeface="メイリオ" pitchFamily="34" charset="-120"/>
-              </a:rPr>
-              <a:t>透明な鼻汁だけなら多くは可</a:t>
-            </a:r>
-            <a:endParaRPr lang="ja-JP" sz="2200" dirty="0"/>
-          </a:p>
-          <a:p>
-            <a:pPr algn="l" marL="254000" indent="-254000">
-              <a:lnSpc>
-                <a:spcPct val="80000"/>
-              </a:lnSpc>
-              <a:buSzPct val="100000"/>
-              <a:buChar char="•"/>
-            </a:pPr>
-            <a:r>
-              <a:rPr lang="ja-JP" altLang="en-US" sz="2200" dirty="0">
-                <a:solidFill>
-                  <a:srgbClr val="262626"/>
-                </a:solidFill>
-                <a:latin typeface="メイリオ" pitchFamily="34" charset="0"/>
-                <a:ea typeface="メイリオ" pitchFamily="34" charset="-122"/>
-                <a:cs typeface="メイリオ" pitchFamily="34" charset="-120"/>
-              </a:rPr>
-              <a:t>上気道炎から 2〜4 週たてば</a:t>
-            </a:r>
-            <a:endParaRPr lang="ja-JP" sz="2200" dirty="0"/>
-          </a:p>
-          <a:p>
-            <a:pPr algn="l" marL="254000" indent="-254000">
-              <a:lnSpc>
-                <a:spcPct val="80000"/>
-              </a:lnSpc>
-              <a:spcAft>
-                <a:spcPts val="450"/>
-              </a:spcAft>
-              <a:buSzPct val="100000"/>
-              <a:buChar char="　"/>
-            </a:pPr>
-            <a:r>
-              <a:rPr lang="ja-JP" altLang="en-US" sz="2200" dirty="0">
-                <a:solidFill>
-                  <a:srgbClr val="262626"/>
-                </a:solidFill>
-                <a:latin typeface="メイリオ" pitchFamily="34" charset="0"/>
-                <a:ea typeface="メイリオ" pitchFamily="34" charset="-122"/>
-                <a:cs typeface="メイリオ" pitchFamily="34" charset="-120"/>
-              </a:rPr>
-              <a:t>リスクは下がる</a:t>
-            </a:r>
-            <a:endParaRPr lang="ja-JP" sz="2200" dirty="0"/>
-          </a:p>
-          <a:p>
-            <a:pPr algn="l" marL="254000" indent="-254000">
-              <a:lnSpc>
-                <a:spcPct val="80000"/>
-              </a:lnSpc>
-              <a:spcAft>
-                <a:spcPts val="450"/>
-              </a:spcAft>
-              <a:buSzPct val="100000"/>
-              <a:buChar char="•"/>
-            </a:pPr>
-            <a:r>
-              <a:rPr lang="ja-JP" altLang="en-US" sz="2200" dirty="0">
-                <a:solidFill>
-                  <a:srgbClr val="262626"/>
-                </a:solidFill>
-                <a:latin typeface="メイリオ" pitchFamily="34" charset="0"/>
-                <a:ea typeface="メイリオ" pitchFamily="34" charset="-122"/>
-                <a:cs typeface="メイリオ" pitchFamily="34" charset="-120"/>
-              </a:rPr>
-              <a:t>フェイスマスクか声門上器具で</a:t>
-            </a:r>
-            <a:endParaRPr lang="ja-JP" sz="2200" dirty="0"/>
-          </a:p>
-          <a:p>
-            <a:pPr algn="l" marL="254000" indent="-254000">
-              <a:lnSpc>
-                <a:spcPct val="80000"/>
-              </a:lnSpc>
-              <a:spcAft>
-                <a:spcPts val="450"/>
-              </a:spcAft>
-              <a:buSzPct val="100000"/>
-              <a:buChar char="•"/>
-            </a:pPr>
-            <a:r>
-              <a:rPr lang="ja-JP" altLang="en-US" sz="2200" dirty="0">
-                <a:solidFill>
-                  <a:srgbClr val="262626"/>
-                </a:solidFill>
-                <a:latin typeface="メイリオ" pitchFamily="34" charset="0"/>
-                <a:ea typeface="メイリオ" pitchFamily="34" charset="-122"/>
-                <a:cs typeface="メイリオ" pitchFamily="34" charset="-120"/>
-              </a:rPr>
-              <a:t>プロポフォールで静脈導入</a:t>
-            </a:r>
-            <a:endParaRPr lang="ja-JP" sz="2200" dirty="0"/>
-          </a:p>
-          <a:p>
-            <a:pPr algn="l" marL="254000" indent="-254000">
-              <a:lnSpc>
-                <a:spcPct val="80000"/>
-              </a:lnSpc>
-              <a:buSzPct val="100000"/>
-              <a:buChar char="•"/>
-            </a:pPr>
-            <a:r>
-              <a:rPr lang="ja-JP" altLang="en-US" sz="2200" dirty="0">
-                <a:solidFill>
-                  <a:srgbClr val="262626"/>
-                </a:solidFill>
-                <a:latin typeface="メイリオ" pitchFamily="34" charset="0"/>
-                <a:ea typeface="メイリオ" pitchFamily="34" charset="-122"/>
-                <a:cs typeface="メイリオ" pitchFamily="34" charset="-120"/>
-              </a:rPr>
-              <a:t>術前にサルブタモール吸入を考える</a:t>
-            </a:r>
-            <a:endParaRPr lang="ja-JP" sz="2200" dirty="0"/>
-          </a:p>
-          <a:p>
-            <a:pPr algn="l" marL="254000" indent="-254000">
-              <a:lnSpc>
-                <a:spcPct val="80000"/>
-              </a:lnSpc>
-              <a:buSzPct val="100000"/>
-              <a:buChar char="　"/>
-            </a:pPr>
-            <a:r>
-              <a:rPr lang="ja-JP" altLang="en-US" sz="2200" dirty="0">
-                <a:solidFill>
-                  <a:srgbClr val="262626"/>
-                </a:solidFill>
-                <a:latin typeface="メイリオ" pitchFamily="34" charset="0"/>
-                <a:ea typeface="メイリオ" pitchFamily="34" charset="-122"/>
-                <a:cs typeface="メイリオ" pitchFamily="34" charset="-120"/>
-              </a:rPr>
-              <a:t>（導入 10〜30 分前）</a:t>
-            </a:r>
-            <a:endParaRPr lang="ja-JP" sz="2200" dirty="0"/>
-          </a:p>
-        </p:txBody>
-      </p:sp>
-      <p:sp>
-        <p:nvSpPr>
-          <p:cNvPr id="17" name="Shape 15"/>
+      <p:graphicFrame>
+        <p:nvGraphicFramePr>
+          <p:cNvPr id="16" name="Table 1"/>
+          <p:cNvGraphicFramePr>
+            <a:graphicFrameLocks noGrp="1"/>
+          </p:cNvGraphicFramePr>
+          <p:nvPr>
+            <p:extLst>
+              <p:ext uri="{D42A27DB-BD31-4B8C-83A1-F6EECF244321}">
+                <p14:modId xmlns:p14="http://schemas.microsoft.com/office/powerpoint/2010/main" val="1579011935"/>
+              </p:ext>
+            </p:extLst>
+          </p:nvPr>
+        </p:nvGraphicFramePr>
+        <p:xfrm>
+          <a:off x="6281928" y="2212848"/>
+          <a:ext cx="5276088" cy="914400"/>
+        </p:xfrm>
+        <a:graphic>
+          <a:graphicData uri="http://schemas.openxmlformats.org/drawingml/2006/table">
+            <a:tbl>
+              <a:tblPr/>
+              <a:tblGrid>
+                <a:gridCol w="256032"/>
+                <a:gridCol w="5020056"/>
+              </a:tblGrid>
+              <a:tr h="393192">
+                <a:tc>
+                  <a:txBody>
+                    <a:bodyPr/>
+                    <a:lstStyle/>
+                    <a:p>
+                      <a:pPr algn="l" indent="0" marL="0">
+                        <a:lnSpc>
+                          <a:spcPts val="2640"/>
+                        </a:lnSpc>
+                        <a:buNone/>
+                      </a:pPr>
+                      <a:r>
+                        <a:rPr lang="ja-JP" altLang="en-US" sz="2200" dirty="0">
+                          <a:solidFill>
+                            <a:srgbClr val="262626"/>
+                          </a:solidFill>
+                          <a:latin typeface="メイリオ" pitchFamily="34" charset="0"/>
+                          <a:ea typeface="メイリオ" pitchFamily="34" charset="-122"/>
+                          <a:cs typeface="メイリオ" pitchFamily="34" charset="-120"/>
+                        </a:rPr>
+                        <a:t>•</a:t>
+                      </a:r>
+                      <a:endParaRPr lang="en-US" sz="2200" dirty="0">
+                        <a:latin typeface="メイリオ" charset="0"/>
+                        <a:ea typeface="メイリオ" charset="0"/>
+                        <a:cs typeface="メイリオ" charset="0"/>
+                      </a:endParaRPr>
+                    </a:p>
+                  </a:txBody>
+                  <a:tcPr marL="0" marR="0" marT="0" marB="57607" anchor="t">
+                    <a:lnL w="0" cap="flat" cmpd="sng" algn="ctr">
+                      <a:noFill/>
+                    </a:lnL>
+                    <a:lnR w="0" cap="flat" cmpd="sng" algn="ctr">
+                      <a:noFill/>
+                    </a:lnR>
+                    <a:lnT w="0" cap="flat" cmpd="sng" algn="ctr">
+                      <a:noFill/>
+                    </a:lnT>
+                    <a:lnB w="0" cap="flat" cmpd="sng" algn="ctr">
+                      <a:noFill/>
+                    </a:lnB>
+                  </a:tcPr>
+                </a:tc>
+                <a:tc>
+                  <a:txBody>
+                    <a:bodyPr/>
+                    <a:lstStyle/>
+                    <a:p>
+                      <a:pPr algn="l" indent="0" marL="0">
+                        <a:lnSpc>
+                          <a:spcPts val="2640"/>
+                        </a:lnSpc>
+                        <a:buNone/>
+                      </a:pPr>
+                      <a:r>
+                        <a:rPr lang="ja-JP" altLang="en-US" sz="2200" dirty="0">
+                          <a:solidFill>
+                            <a:srgbClr val="262626"/>
+                          </a:solidFill>
+                          <a:latin typeface="メイリオ" pitchFamily="34" charset="0"/>
+                          <a:ea typeface="メイリオ" pitchFamily="34" charset="-122"/>
+                          <a:cs typeface="メイリオ" pitchFamily="34" charset="-120"/>
+                        </a:rPr>
+                        <a:t>透明な鼻汁だけなら多くは可</a:t>
+                      </a:r>
+                      <a:endParaRPr lang="en-US" sz="2200" dirty="0">
+                        <a:latin typeface="メイリオ" charset="0"/>
+                        <a:ea typeface="メイリオ" charset="0"/>
+                        <a:cs typeface="メイリオ" charset="0"/>
+                      </a:endParaRPr>
+                    </a:p>
+                  </a:txBody>
+                  <a:tcPr marL="0" marR="0" marT="0" marB="57607" anchor="t">
+                    <a:lnL w="0" cap="flat" cmpd="sng" algn="ctr">
+                      <a:noFill/>
+                    </a:lnL>
+                    <a:lnR w="0" cap="flat" cmpd="sng" algn="ctr">
+                      <a:noFill/>
+                    </a:lnR>
+                    <a:lnT w="0" cap="flat" cmpd="sng" algn="ctr">
+                      <a:noFill/>
+                    </a:lnT>
+                    <a:lnB w="0" cap="flat" cmpd="sng" algn="ctr">
+                      <a:noFill/>
+                    </a:lnB>
+                  </a:tcPr>
+                </a:tc>
+              </a:tr>
+              <a:tr h="727862">
+                <a:tc>
+                  <a:txBody>
+                    <a:bodyPr/>
+                    <a:lstStyle/>
+                    <a:p>
+                      <a:pPr algn="l" indent="0" marL="0">
+                        <a:lnSpc>
+                          <a:spcPts val="2640"/>
+                        </a:lnSpc>
+                        <a:buNone/>
+                      </a:pPr>
+                      <a:r>
+                        <a:rPr lang="ja-JP" altLang="en-US" sz="2200" dirty="0">
+                          <a:solidFill>
+                            <a:srgbClr val="262626"/>
+                          </a:solidFill>
+                          <a:latin typeface="メイリオ" pitchFamily="34" charset="0"/>
+                          <a:ea typeface="メイリオ" pitchFamily="34" charset="-122"/>
+                          <a:cs typeface="メイリオ" pitchFamily="34" charset="-120"/>
+                        </a:rPr>
+                        <a:t>•</a:t>
+                      </a:r>
+                      <a:endParaRPr lang="en-US" sz="2200" dirty="0">
+                        <a:latin typeface="メイリオ" charset="0"/>
+                        <a:ea typeface="メイリオ" charset="0"/>
+                        <a:cs typeface="メイリオ" charset="0"/>
+                      </a:endParaRPr>
+                    </a:p>
+                  </a:txBody>
+                  <a:tcPr marL="0" marR="0" marT="0" marB="57607" anchor="t">
+                    <a:lnL w="0" cap="flat" cmpd="sng" algn="ctr">
+                      <a:noFill/>
+                    </a:lnL>
+                    <a:lnR w="0" cap="flat" cmpd="sng" algn="ctr">
+                      <a:noFill/>
+                    </a:lnR>
+                    <a:lnT w="0" cap="flat" cmpd="sng" algn="ctr">
+                      <a:noFill/>
+                    </a:lnT>
+                    <a:lnB w="0" cap="flat" cmpd="sng" algn="ctr">
+                      <a:noFill/>
+                    </a:lnB>
+                  </a:tcPr>
+                </a:tc>
+                <a:tc>
+                  <a:txBody>
+                    <a:bodyPr/>
+                    <a:lstStyle/>
+                    <a:p>
+                      <a:pPr algn="l" indent="0" marL="0">
+                        <a:lnSpc>
+                          <a:spcPts val="2640"/>
+                        </a:lnSpc>
+                        <a:buNone/>
+                      </a:pPr>
+                      <a:r>
+                        <a:rPr lang="ja-JP" altLang="en-US" sz="2200" dirty="0">
+                          <a:solidFill>
+                            <a:srgbClr val="262626"/>
+                          </a:solidFill>
+                          <a:latin typeface="メイリオ" pitchFamily="34" charset="0"/>
+                          <a:ea typeface="メイリオ" pitchFamily="34" charset="-122"/>
+                          <a:cs typeface="メイリオ" pitchFamily="34" charset="-120"/>
+                        </a:rPr>
+                        <a:t>上気道炎から 2〜4 週たてば</a:t>
+                      </a:r>
+                      <a:endParaRPr lang="en-US" sz="2200" dirty="0">
+                        <a:latin typeface="メイリオ" charset="0"/>
+                        <a:ea typeface="メイリオ" charset="0"/>
+                        <a:cs typeface="メイリオ" charset="0"/>
+                      </a:endParaRPr>
+                    </a:p>
+                    <a:p>
+                      <a:pPr algn="l" indent="0" marL="0">
+                        <a:lnSpc>
+                          <a:spcPts val="2640"/>
+                        </a:lnSpc>
+                        <a:buNone/>
+                      </a:pPr>
+                      <a:r>
+                        <a:rPr lang="ja-JP" altLang="en-US" sz="2200" dirty="0">
+                          <a:solidFill>
+                            <a:srgbClr val="262626"/>
+                          </a:solidFill>
+                          <a:latin typeface="メイリオ" pitchFamily="34" charset="0"/>
+                          <a:ea typeface="メイリオ" pitchFamily="34" charset="-122"/>
+                          <a:cs typeface="メイリオ" pitchFamily="34" charset="-120"/>
+                        </a:rPr>
+                        <a:t>リスクは下がる</a:t>
+                      </a:r>
+                      <a:endParaRPr lang="en-US" sz="2200" dirty="0">
+                        <a:latin typeface="メイリオ" charset="0"/>
+                        <a:ea typeface="メイリオ" charset="0"/>
+                        <a:cs typeface="メイリオ" charset="0"/>
+                      </a:endParaRPr>
+                    </a:p>
+                  </a:txBody>
+                  <a:tcPr marL="0" marR="0" marT="0" marB="57607" anchor="t">
+                    <a:lnL w="0" cap="flat" cmpd="sng" algn="ctr">
+                      <a:noFill/>
+                    </a:lnL>
+                    <a:lnR w="0" cap="flat" cmpd="sng" algn="ctr">
+                      <a:noFill/>
+                    </a:lnR>
+                    <a:lnT w="0" cap="flat" cmpd="sng" algn="ctr">
+                      <a:noFill/>
+                    </a:lnT>
+                    <a:lnB w="0" cap="flat" cmpd="sng" algn="ctr">
+                      <a:noFill/>
+                    </a:lnB>
+                  </a:tcPr>
+                </a:tc>
+              </a:tr>
+              <a:tr h="393192">
+                <a:tc>
+                  <a:txBody>
+                    <a:bodyPr/>
+                    <a:lstStyle/>
+                    <a:p>
+                      <a:pPr algn="l" indent="0" marL="0">
+                        <a:lnSpc>
+                          <a:spcPts val="2640"/>
+                        </a:lnSpc>
+                        <a:buNone/>
+                      </a:pPr>
+                      <a:r>
+                        <a:rPr lang="ja-JP" altLang="en-US" sz="2200" dirty="0">
+                          <a:solidFill>
+                            <a:srgbClr val="262626"/>
+                          </a:solidFill>
+                          <a:latin typeface="メイリオ" pitchFamily="34" charset="0"/>
+                          <a:ea typeface="メイリオ" pitchFamily="34" charset="-122"/>
+                          <a:cs typeface="メイリオ" pitchFamily="34" charset="-120"/>
+                        </a:rPr>
+                        <a:t>•</a:t>
+                      </a:r>
+                      <a:endParaRPr lang="en-US" sz="2200" dirty="0">
+                        <a:latin typeface="メイリオ" charset="0"/>
+                        <a:ea typeface="メイリオ" charset="0"/>
+                        <a:cs typeface="メイリオ" charset="0"/>
+                      </a:endParaRPr>
+                    </a:p>
+                  </a:txBody>
+                  <a:tcPr marL="0" marR="0" marT="0" marB="57607" anchor="t">
+                    <a:lnL w="0" cap="flat" cmpd="sng" algn="ctr">
+                      <a:noFill/>
+                    </a:lnL>
+                    <a:lnR w="0" cap="flat" cmpd="sng" algn="ctr">
+                      <a:noFill/>
+                    </a:lnR>
+                    <a:lnT w="0" cap="flat" cmpd="sng" algn="ctr">
+                      <a:noFill/>
+                    </a:lnT>
+                    <a:lnB w="0" cap="flat" cmpd="sng" algn="ctr">
+                      <a:noFill/>
+                    </a:lnB>
+                  </a:tcPr>
+                </a:tc>
+                <a:tc>
+                  <a:txBody>
+                    <a:bodyPr/>
+                    <a:lstStyle/>
+                    <a:p>
+                      <a:pPr algn="l" indent="0" marL="0">
+                        <a:lnSpc>
+                          <a:spcPts val="2640"/>
+                        </a:lnSpc>
+                        <a:buNone/>
+                      </a:pPr>
+                      <a:r>
+                        <a:rPr lang="ja-JP" altLang="en-US" sz="2200" dirty="0">
+                          <a:solidFill>
+                            <a:srgbClr val="262626"/>
+                          </a:solidFill>
+                          <a:latin typeface="メイリオ" pitchFamily="34" charset="0"/>
+                          <a:ea typeface="メイリオ" pitchFamily="34" charset="-122"/>
+                          <a:cs typeface="メイリオ" pitchFamily="34" charset="-120"/>
+                        </a:rPr>
+                        <a:t>フェイスマスクか声門上器具で</a:t>
+                      </a:r>
+                      <a:endParaRPr lang="en-US" sz="2200" dirty="0">
+                        <a:latin typeface="メイリオ" charset="0"/>
+                        <a:ea typeface="メイリオ" charset="0"/>
+                        <a:cs typeface="メイリオ" charset="0"/>
+                      </a:endParaRPr>
+                    </a:p>
+                  </a:txBody>
+                  <a:tcPr marL="0" marR="0" marT="0" marB="57607" anchor="t">
+                    <a:lnL w="0" cap="flat" cmpd="sng" algn="ctr">
+                      <a:noFill/>
+                    </a:lnL>
+                    <a:lnR w="0" cap="flat" cmpd="sng" algn="ctr">
+                      <a:noFill/>
+                    </a:lnR>
+                    <a:lnT w="0" cap="flat" cmpd="sng" algn="ctr">
+                      <a:noFill/>
+                    </a:lnT>
+                    <a:lnB w="0" cap="flat" cmpd="sng" algn="ctr">
+                      <a:noFill/>
+                    </a:lnB>
+                  </a:tcPr>
+                </a:tc>
+              </a:tr>
+              <a:tr h="393192">
+                <a:tc>
+                  <a:txBody>
+                    <a:bodyPr/>
+                    <a:lstStyle/>
+                    <a:p>
+                      <a:pPr algn="l" indent="0" marL="0">
+                        <a:lnSpc>
+                          <a:spcPts val="2640"/>
+                        </a:lnSpc>
+                        <a:buNone/>
+                      </a:pPr>
+                      <a:r>
+                        <a:rPr lang="ja-JP" altLang="en-US" sz="2200" dirty="0">
+                          <a:solidFill>
+                            <a:srgbClr val="262626"/>
+                          </a:solidFill>
+                          <a:latin typeface="メイリオ" pitchFamily="34" charset="0"/>
+                          <a:ea typeface="メイリオ" pitchFamily="34" charset="-122"/>
+                          <a:cs typeface="メイリオ" pitchFamily="34" charset="-120"/>
+                        </a:rPr>
+                        <a:t>•</a:t>
+                      </a:r>
+                      <a:endParaRPr lang="en-US" sz="2200" dirty="0">
+                        <a:latin typeface="メイリオ" charset="0"/>
+                        <a:ea typeface="メイリオ" charset="0"/>
+                        <a:cs typeface="メイリオ" charset="0"/>
+                      </a:endParaRPr>
+                    </a:p>
+                  </a:txBody>
+                  <a:tcPr marL="0" marR="0" marT="0" marB="57607" anchor="t">
+                    <a:lnL w="0" cap="flat" cmpd="sng" algn="ctr">
+                      <a:noFill/>
+                    </a:lnL>
+                    <a:lnR w="0" cap="flat" cmpd="sng" algn="ctr">
+                      <a:noFill/>
+                    </a:lnR>
+                    <a:lnT w="0" cap="flat" cmpd="sng" algn="ctr">
+                      <a:noFill/>
+                    </a:lnT>
+                    <a:lnB w="0" cap="flat" cmpd="sng" algn="ctr">
+                      <a:noFill/>
+                    </a:lnB>
+                  </a:tcPr>
+                </a:tc>
+                <a:tc>
+                  <a:txBody>
+                    <a:bodyPr/>
+                    <a:lstStyle/>
+                    <a:p>
+                      <a:pPr algn="l" indent="0" marL="0">
+                        <a:lnSpc>
+                          <a:spcPts val="2640"/>
+                        </a:lnSpc>
+                        <a:buNone/>
+                      </a:pPr>
+                      <a:r>
+                        <a:rPr lang="ja-JP" altLang="en-US" sz="2200" dirty="0">
+                          <a:solidFill>
+                            <a:srgbClr val="262626"/>
+                          </a:solidFill>
+                          <a:latin typeface="メイリオ" pitchFamily="34" charset="0"/>
+                          <a:ea typeface="メイリオ" pitchFamily="34" charset="-122"/>
+                          <a:cs typeface="メイリオ" pitchFamily="34" charset="-120"/>
+                        </a:rPr>
+                        <a:t>プロポフォールで静脈導入</a:t>
+                      </a:r>
+                      <a:endParaRPr lang="en-US" sz="2200" dirty="0">
+                        <a:latin typeface="メイリオ" charset="0"/>
+                        <a:ea typeface="メイリオ" charset="0"/>
+                        <a:cs typeface="メイリオ" charset="0"/>
+                      </a:endParaRPr>
+                    </a:p>
+                  </a:txBody>
+                  <a:tcPr marL="0" marR="0" marT="0" marB="57607" anchor="t">
+                    <a:lnL w="0" cap="flat" cmpd="sng" algn="ctr">
+                      <a:noFill/>
+                    </a:lnL>
+                    <a:lnR w="0" cap="flat" cmpd="sng" algn="ctr">
+                      <a:noFill/>
+                    </a:lnR>
+                    <a:lnT w="0" cap="flat" cmpd="sng" algn="ctr">
+                      <a:noFill/>
+                    </a:lnT>
+                    <a:lnB w="0" cap="flat" cmpd="sng" algn="ctr">
+                      <a:noFill/>
+                    </a:lnB>
+                  </a:tcPr>
+                </a:tc>
+              </a:tr>
+              <a:tr h="670255">
+                <a:tc>
+                  <a:txBody>
+                    <a:bodyPr/>
+                    <a:lstStyle/>
+                    <a:p>
+                      <a:pPr algn="l" indent="0" marL="0">
+                        <a:lnSpc>
+                          <a:spcPts val="2640"/>
+                        </a:lnSpc>
+                        <a:buNone/>
+                      </a:pPr>
+                      <a:r>
+                        <a:rPr lang="ja-JP" altLang="en-US" sz="2200" dirty="0">
+                          <a:solidFill>
+                            <a:srgbClr val="262626"/>
+                          </a:solidFill>
+                          <a:latin typeface="メイリオ" pitchFamily="34" charset="0"/>
+                          <a:ea typeface="メイリオ" pitchFamily="34" charset="-122"/>
+                          <a:cs typeface="メイリオ" pitchFamily="34" charset="-120"/>
+                        </a:rPr>
+                        <a:t>•</a:t>
+                      </a:r>
+                      <a:endParaRPr lang="en-US" sz="2200" dirty="0">
+                        <a:latin typeface="メイリオ" charset="0"/>
+                        <a:ea typeface="メイリオ" charset="0"/>
+                        <a:cs typeface="メイリオ" charset="0"/>
+                      </a:endParaRPr>
+                    </a:p>
+                  </a:txBody>
+                  <a:tcPr marL="0" marR="0" marT="0" marB="0" anchor="t">
+                    <a:lnL w="0" cap="flat" cmpd="sng" algn="ctr">
+                      <a:noFill/>
+                    </a:lnL>
+                    <a:lnR w="0" cap="flat" cmpd="sng" algn="ctr">
+                      <a:noFill/>
+                    </a:lnR>
+                    <a:lnT w="0" cap="flat" cmpd="sng" algn="ctr">
+                      <a:noFill/>
+                    </a:lnT>
+                    <a:lnB w="0" cap="flat" cmpd="sng" algn="ctr">
+                      <a:noFill/>
+                    </a:lnB>
+                  </a:tcPr>
+                </a:tc>
+                <a:tc>
+                  <a:txBody>
+                    <a:bodyPr/>
+                    <a:lstStyle/>
+                    <a:p>
+                      <a:pPr algn="l" indent="0" marL="0">
+                        <a:lnSpc>
+                          <a:spcPts val="2640"/>
+                        </a:lnSpc>
+                        <a:buNone/>
+                      </a:pPr>
+                      <a:r>
+                        <a:rPr lang="ja-JP" altLang="en-US" sz="2200" dirty="0">
+                          <a:solidFill>
+                            <a:srgbClr val="262626"/>
+                          </a:solidFill>
+                          <a:latin typeface="メイリオ" pitchFamily="34" charset="0"/>
+                          <a:ea typeface="メイリオ" pitchFamily="34" charset="-122"/>
+                          <a:cs typeface="メイリオ" pitchFamily="34" charset="-120"/>
+                        </a:rPr>
+                        <a:t>術前にサルブタモール吸入を考える</a:t>
+                      </a:r>
+                      <a:endParaRPr lang="en-US" sz="2200" dirty="0">
+                        <a:latin typeface="メイリオ" charset="0"/>
+                        <a:ea typeface="メイリオ" charset="0"/>
+                        <a:cs typeface="メイリオ" charset="0"/>
+                      </a:endParaRPr>
+                    </a:p>
+                    <a:p>
+                      <a:pPr algn="l" indent="0" marL="0">
+                        <a:lnSpc>
+                          <a:spcPts val="2640"/>
+                        </a:lnSpc>
+                        <a:buNone/>
+                      </a:pPr>
+                      <a:r>
+                        <a:rPr lang="ja-JP" altLang="en-US" sz="2200" dirty="0">
+                          <a:solidFill>
+                            <a:srgbClr val="262626"/>
+                          </a:solidFill>
+                          <a:latin typeface="メイリオ" pitchFamily="34" charset="0"/>
+                          <a:ea typeface="メイリオ" pitchFamily="34" charset="-122"/>
+                          <a:cs typeface="メイリオ" pitchFamily="34" charset="-120"/>
+                        </a:rPr>
+                        <a:t>（導入 10〜30 分前）</a:t>
+                      </a:r>
+                      <a:endParaRPr lang="en-US" sz="2200" dirty="0">
+                        <a:latin typeface="メイリオ" charset="0"/>
+                        <a:ea typeface="メイリオ" charset="0"/>
+                        <a:cs typeface="メイリオ" charset="0"/>
+                      </a:endParaRPr>
+                    </a:p>
+                  </a:txBody>
+                  <a:tcPr marL="0" marR="0" marT="0" marB="0" anchor="t">
+                    <a:lnL w="0" cap="flat" cmpd="sng" algn="ctr">
+                      <a:noFill/>
+                    </a:lnL>
+                    <a:lnR w="0" cap="flat" cmpd="sng" algn="ctr">
+                      <a:noFill/>
+                    </a:lnR>
+                    <a:lnT w="0" cap="flat" cmpd="sng" algn="ctr">
+                      <a:noFill/>
+                    </a:lnT>
+                    <a:lnB w="0" cap="flat" cmpd="sng" algn="ctr">
+                      <a:noFill/>
+                    </a:lnB>
+                  </a:tcPr>
+                </a:tc>
+              </a:tr>
+            </a:tbl>
+          </a:graphicData>
+        </a:graphic>
+      </p:graphicFrame>
+      <p:sp>
+        <p:nvSpPr>
+          <p:cNvPr id="17" name="Shape 13"/>
           <p:cNvSpPr/>
           <p:nvPr/>
         </p:nvSpPr>
@@ -9117,79 +11513,138 @@
           </a:ln>
         </p:spPr>
       </p:sp>
-      <p:sp>
-        <p:nvSpPr>
-          <p:cNvPr id="18" name="Text 16"/>
-          <p:cNvSpPr txBox="1"/>
-          <p:nvPr/>
-        </p:nvSpPr>
-        <p:spPr>
-          <a:xfrm>
-            <a:off x="566928" y="5157216"/>
-            <a:ext cx="11055096" cy="685800"/>
-          </a:xfrm>
-          <a:prstGeom prst="rect">
-            <a:avLst/>
-          </a:prstGeom>
-          <a:noFill/>
-          <a:ln/>
-        </p:spPr>
-        <p:txBody>
-          <a:bodyPr wrap="square" lIns="0" tIns="0" rIns="0" bIns="0" rtlCol="0" anchor="ctr"/>
-          <a:lstStyle/>
-          <a:p>
-            <a:pPr algn="ctr" indent="0" marL="0">
-              <a:lnSpc>
-                <a:spcPct val="80000"/>
-              </a:lnSpc>
-              <a:buNone/>
-            </a:pPr>
-            <a:r>
-              <a:rPr lang="ja-JP" altLang="en-US" sz="2200" b="1" dirty="0">
-                <a:solidFill>
-                  <a:srgbClr val="262626"/>
-                </a:solidFill>
-                <a:latin typeface="メイリオ" pitchFamily="34" charset="0"/>
-                <a:ea typeface="メイリオ" pitchFamily="34" charset="-122"/>
-                <a:cs typeface="メイリオ" pitchFamily="34" charset="-120"/>
-              </a:rPr>
-              <a:t>喉頭痙攣・気管支攣縮・低酸素に備える。</a:t>
-            </a:r>
-            <a:endParaRPr lang="ja-JP" sz="2200" dirty="0"/>
-          </a:p>
-          <a:p>
-            <a:pPr algn="ctr" indent="0" marL="0">
-              <a:lnSpc>
-                <a:spcPct val="80000"/>
-              </a:lnSpc>
-              <a:buNone/>
-            </a:pPr>
-            <a:r>
-              <a:rPr lang="ja-JP" altLang="en-US" sz="2200" b="1" dirty="0">
-                <a:solidFill>
-                  <a:srgbClr val="C00000"/>
-                </a:solidFill>
-                <a:latin typeface="メイリオ" pitchFamily="34" charset="0"/>
-                <a:ea typeface="メイリオ" pitchFamily="34" charset="-122"/>
-                <a:cs typeface="メイリオ" pitchFamily="34" charset="-120"/>
-              </a:rPr>
-              <a:t>迷えば延期し</a:t>
-            </a:r>
-            <a:r>
-              <a:rPr lang="ja-JP" altLang="en-US" sz="2200" b="1" dirty="0">
-                <a:solidFill>
-                  <a:srgbClr val="262626"/>
-                </a:solidFill>
-                <a:latin typeface="メイリオ" pitchFamily="34" charset="0"/>
-                <a:ea typeface="メイリオ" pitchFamily="34" charset="-122"/>
-                <a:cs typeface="メイリオ" pitchFamily="34" charset="-120"/>
-              </a:rPr>
-              <a:t>、保護者と主治医に共有</a:t>
-            </a:r>
-            <a:endParaRPr lang="ja-JP" sz="2200" dirty="0"/>
-          </a:p>
-        </p:txBody>
-      </p:sp>
+      <p:graphicFrame>
+        <p:nvGraphicFramePr>
+          <p:cNvPr id="18" name="Table 2"/>
+          <p:cNvGraphicFramePr>
+            <a:graphicFrameLocks noGrp="1"/>
+          </p:cNvGraphicFramePr>
+          <p:nvPr>
+            <p:extLst>
+              <p:ext uri="{D42A27DB-BD31-4B8C-83A1-F6EECF244321}">
+                <p14:modId xmlns:p14="http://schemas.microsoft.com/office/powerpoint/2010/main" val="1579011935"/>
+              </p:ext>
+            </p:extLst>
+          </p:nvPr>
+        </p:nvGraphicFramePr>
+        <p:xfrm>
+          <a:off x="566928" y="5164531"/>
+          <a:ext cx="11055096" cy="914400"/>
+        </p:xfrm>
+        <a:graphic>
+          <a:graphicData uri="http://schemas.openxmlformats.org/drawingml/2006/table">
+            <a:tbl>
+              <a:tblPr/>
+              <a:tblGrid>
+                <a:gridCol w="11055096"/>
+              </a:tblGrid>
+              <a:tr h="335585">
+                <a:tc>
+                  <a:txBody>
+                    <a:bodyPr/>
+                    <a:lstStyle/>
+                    <a:p>
+                      <a:pPr algn="ctr" indent="0" marL="0">
+                        <a:lnSpc>
+                          <a:spcPts val="2640"/>
+                        </a:lnSpc>
+                        <a:buNone/>
+                      </a:pPr>
+                      <a:r>
+                        <a:rPr lang="ja-JP" altLang="en-US" sz="2200" b="1" dirty="0">
+                          <a:solidFill>
+                            <a:srgbClr val="262626"/>
+                          </a:solidFill>
+                          <a:latin typeface="メイリオ" pitchFamily="34" charset="0"/>
+                          <a:ea typeface="メイリオ" pitchFamily="34" charset="-122"/>
+                          <a:cs typeface="メイリオ" pitchFamily="34" charset="-120"/>
+                        </a:rPr>
+                        <a:t>喉頭痙攣・気管支攣縮・低酸素に備える。</a:t>
+                      </a:r>
+                      <a:endParaRPr lang="en-US" sz="2200" dirty="0">
+                        <a:latin typeface="メイリオ" charset="0"/>
+                        <a:ea typeface="メイリオ" charset="0"/>
+                        <a:cs typeface="メイリオ" charset="0"/>
+                      </a:endParaRPr>
+                    </a:p>
+                  </a:txBody>
+                  <a:tcPr marL="0" marR="0" marT="0" marB="0" anchor="t">
+                    <a:lnL w="0" cap="flat" cmpd="sng" algn="ctr">
+                      <a:noFill/>
+                    </a:lnL>
+                    <a:lnR w="0" cap="flat" cmpd="sng" algn="ctr">
+                      <a:noFill/>
+                    </a:lnR>
+                    <a:lnT w="0" cap="flat" cmpd="sng" algn="ctr">
+                      <a:noFill/>
+                    </a:lnT>
+                    <a:lnB w="0" cap="flat" cmpd="sng" algn="ctr">
+                      <a:noFill/>
+                    </a:lnB>
+                  </a:tcPr>
+                </a:tc>
+              </a:tr>
+              <a:tr h="335585">
+                <a:tc>
+                  <a:txBody>
+                    <a:bodyPr/>
+                    <a:lstStyle/>
+                    <a:p>
+                      <a:pPr algn="ctr" indent="0" marL="0">
+                        <a:lnSpc>
+                          <a:spcPts val="2640"/>
+                        </a:lnSpc>
+                        <a:buNone/>
+                      </a:pPr>
+                      <a:r>
+                        <a:rPr lang="ja-JP" altLang="en-US" sz="2200" b="1" dirty="0">
+                          <a:solidFill>
+                            <a:srgbClr val="C00000"/>
+                          </a:solidFill>
+                          <a:latin typeface="メイリオ" pitchFamily="34" charset="0"/>
+                          <a:ea typeface="メイリオ" pitchFamily="34" charset="-122"/>
+                          <a:cs typeface="メイリオ" pitchFamily="34" charset="-120"/>
+                        </a:rPr>
+                        <a:t>迷えば延期し</a:t>
+                      </a:r>
+                      <a:r>
+                        <a:rPr lang="ja-JP" altLang="en-US" sz="2200" b="1" dirty="0">
+                          <a:solidFill>
+                            <a:srgbClr val="262626"/>
+                          </a:solidFill>
+                          <a:latin typeface="メイリオ" pitchFamily="34" charset="0"/>
+                          <a:ea typeface="メイリオ" pitchFamily="34" charset="-122"/>
+                          <a:cs typeface="メイリオ" pitchFamily="34" charset="-120"/>
+                        </a:rPr>
+                        <a:t>、保護者と主治医に共有</a:t>
+                      </a:r>
+                      <a:endParaRPr lang="en-US" sz="2200" dirty="0">
+                        <a:latin typeface="メイリオ" charset="0"/>
+                        <a:ea typeface="メイリオ" charset="0"/>
+                        <a:cs typeface="メイリオ" charset="0"/>
+                      </a:endParaRPr>
+                    </a:p>
+                  </a:txBody>
+                  <a:tcPr marL="0" marR="0" marT="0" marB="0" anchor="t">
+                    <a:lnL w="0" cap="flat" cmpd="sng" algn="ctr">
+                      <a:noFill/>
+                    </a:lnL>
+                    <a:lnR w="0" cap="flat" cmpd="sng" algn="ctr">
+                      <a:noFill/>
+                    </a:lnR>
+                    <a:lnT w="0" cap="flat" cmpd="sng" algn="ctr">
+                      <a:noFill/>
+                    </a:lnT>
+                    <a:lnB w="0" cap="flat" cmpd="sng" algn="ctr">
+                      <a:noFill/>
+                    </a:lnB>
+                  </a:tcPr>
+                </a:tc>
+              </a:tr>
+            </a:tbl>
+          </a:graphicData>
+        </a:graphic>
+      </p:graphicFrame>
     </p:spTree>
   </p:cSld>
   <p:clrMapOvr>

--- a/slides/4-9_pulmonary_risk_assessment/4-9_pulmonary_risk_assessment.pptx
+++ b/slides/4-9_pulmonary_risk_assessment/4-9_pulmonary_risk_assessment.pptx
@@ -2557,11 +2557,11 @@
         <p:spPr>
           <a:xfrm>
             <a:off x="502920" y="1691640"/>
-            <a:ext cx="5477256" cy="3063240"/>
+            <a:ext cx="5477256" cy="3145536"/>
           </a:xfrm>
           <a:prstGeom prst="roundRect">
             <a:avLst>
-              <a:gd name="adj" fmla="val 2388"/>
+              <a:gd name="adj" fmla="val 2326"/>
             </a:avLst>
           </a:prstGeom>
           <a:solidFill>
@@ -2624,7 +2624,7 @@
           </p:nvPr>
         </p:nvGraphicFramePr>
         <p:xfrm>
-          <a:off x="630936" y="2249424"/>
+          <a:off x="630936" y="2331720"/>
           <a:ext cx="5221224" cy="914400"/>
         </p:xfrm>
         <a:graphic>
@@ -3098,11 +3098,11 @@
         <p:spPr>
           <a:xfrm>
             <a:off x="6208776" y="1691640"/>
-            <a:ext cx="5477256" cy="3063240"/>
+            <a:ext cx="5477256" cy="3145536"/>
           </a:xfrm>
           <a:prstGeom prst="roundRect">
             <a:avLst>
-              <a:gd name="adj" fmla="val 2388"/>
+              <a:gd name="adj" fmla="val 2326"/>
             </a:avLst>
           </a:prstGeom>
           <a:solidFill>
@@ -3165,7 +3165,7 @@
           </p:nvPr>
         </p:nvGraphicFramePr>
         <p:xfrm>
-          <a:off x="6336792" y="2249424"/>
+          <a:off x="6336792" y="2331720"/>
           <a:ext cx="5221224" cy="914400"/>
         </p:xfrm>
         <a:graphic>
@@ -3638,7 +3638,7 @@
         </p:nvSpPr>
         <p:spPr>
           <a:xfrm>
-            <a:off x="502920" y="5029200"/>
+            <a:off x="502920" y="5111496"/>
             <a:ext cx="11183112" cy="676656"/>
           </a:xfrm>
           <a:prstGeom prst="roundRect">
@@ -3665,7 +3665,7 @@
         </p:nvSpPr>
         <p:spPr>
           <a:xfrm>
-            <a:off x="576072" y="5102352"/>
+            <a:off x="576072" y="5184648"/>
             <a:ext cx="11036808" cy="530352"/>
           </a:xfrm>
           <a:prstGeom prst="rect">
@@ -4185,7 +4185,7 @@
                 <a:gridCol w="4343400"/>
                 <a:gridCol w="2377440"/>
               </a:tblGrid>
-              <a:tr h="411480">
+              <a:tr h="438912">
                 <a:tc>
                   <a:txBody>
                     <a:bodyPr/>
@@ -4215,7 +4215,7 @@
                       </a:endParaRPr>
                     </a:p>
                   </a:txBody>
-                  <a:tcPr marL="76200" marR="76200" marT="38100" marB="38100" anchor="ctr">
+                  <a:tcPr marL="76200" marR="76200" marT="50800" marB="50800" anchor="ctr">
                     <a:lnL w="12700" cap="flat" cmpd="sng" algn="ctr">
                       <a:solidFill>
                         <a:srgbClr val="BFBFBF"/>
@@ -4286,7 +4286,7 @@
                       </a:endParaRPr>
                     </a:p>
                   </a:txBody>
-                  <a:tcPr marL="76200" marR="76200" marT="38100" marB="38100" anchor="ctr">
+                  <a:tcPr marL="76200" marR="76200" marT="50800" marB="50800" anchor="ctr">
                     <a:lnL w="12700" cap="flat" cmpd="sng" algn="ctr">
                       <a:solidFill>
                         <a:srgbClr val="BFBFBF"/>
@@ -4357,7 +4357,7 @@
                       </a:endParaRPr>
                     </a:p>
                   </a:txBody>
-                  <a:tcPr marL="76200" marR="76200" marT="38100" marB="38100" anchor="ctr">
+                  <a:tcPr marL="76200" marR="76200" marT="50800" marB="50800" anchor="ctr">
                     <a:lnL w="12700" cap="flat" cmpd="sng" algn="ctr">
                       <a:solidFill>
                         <a:srgbClr val="BFBFBF"/>
@@ -4400,7 +4400,7 @@
                   </a:tcPr>
                 </a:tc>
               </a:tr>
-              <a:tr h="411480">
+              <a:tr h="438912">
                 <a:tc>
                   <a:txBody>
                     <a:bodyPr/>
@@ -4430,7 +4430,7 @@
                       </a:endParaRPr>
                     </a:p>
                   </a:txBody>
-                  <a:tcPr marL="76200" marR="76200" marT="38100" marB="38100" anchor="ctr">
+                  <a:tcPr marL="76200" marR="76200" marT="50800" marB="50800" anchor="ctr">
                     <a:lnL w="12700" cap="flat" cmpd="sng" algn="ctr">
                       <a:solidFill>
                         <a:srgbClr val="BFBFBF"/>
@@ -4498,7 +4498,7 @@
                       </a:endParaRPr>
                     </a:p>
                   </a:txBody>
-                  <a:tcPr marL="76200" marR="76200" marT="38100" marB="38100" anchor="ctr">
+                  <a:tcPr marL="76200" marR="76200" marT="50800" marB="50800" anchor="ctr">
                     <a:lnL w="12700" cap="flat" cmpd="sng" algn="ctr">
                       <a:solidFill>
                         <a:srgbClr val="BFBFBF"/>
@@ -4566,7 +4566,7 @@
                       </a:endParaRPr>
                     </a:p>
                   </a:txBody>
-                  <a:tcPr marL="76200" marR="76200" marT="38100" marB="38100" anchor="ctr">
+                  <a:tcPr marL="76200" marR="76200" marT="50800" marB="50800" anchor="ctr">
                     <a:lnL w="12700" cap="flat" cmpd="sng" algn="ctr">
                       <a:solidFill>
                         <a:srgbClr val="BFBFBF"/>
@@ -4606,7 +4606,7 @@
                   </a:tcPr>
                 </a:tc>
               </a:tr>
-              <a:tr h="411480">
+              <a:tr h="438912">
                 <a:tc>
                   <a:txBody>
                     <a:bodyPr/>
@@ -4636,7 +4636,7 @@
                       </a:endParaRPr>
                     </a:p>
                   </a:txBody>
-                  <a:tcPr marL="76200" marR="76200" marT="38100" marB="38100" anchor="ctr">
+                  <a:tcPr marL="76200" marR="76200" marT="50800" marB="50800" anchor="ctr">
                     <a:lnL w="12700" cap="flat" cmpd="sng" algn="ctr">
                       <a:solidFill>
                         <a:srgbClr val="BFBFBF"/>
@@ -4704,7 +4704,7 @@
                       </a:endParaRPr>
                     </a:p>
                   </a:txBody>
-                  <a:tcPr marL="76200" marR="76200" marT="38100" marB="38100" anchor="ctr">
+                  <a:tcPr marL="76200" marR="76200" marT="50800" marB="50800" anchor="ctr">
                     <a:lnL w="12700" cap="flat" cmpd="sng" algn="ctr">
                       <a:solidFill>
                         <a:srgbClr val="BFBFBF"/>
@@ -4772,7 +4772,7 @@
                       </a:endParaRPr>
                     </a:p>
                   </a:txBody>
-                  <a:tcPr marL="76200" marR="76200" marT="38100" marB="38100" anchor="ctr">
+                  <a:tcPr marL="76200" marR="76200" marT="50800" marB="50800" anchor="ctr">
                     <a:lnL w="12700" cap="flat" cmpd="sng" algn="ctr">
                       <a:solidFill>
                         <a:srgbClr val="BFBFBF"/>
@@ -4812,7 +4812,7 @@
                   </a:tcPr>
                 </a:tc>
               </a:tr>
-              <a:tr h="411480">
+              <a:tr h="438912">
                 <a:tc>
                   <a:txBody>
                     <a:bodyPr/>
@@ -4842,7 +4842,7 @@
                       </a:endParaRPr>
                     </a:p>
                   </a:txBody>
-                  <a:tcPr marL="76200" marR="76200" marT="38100" marB="38100" anchor="ctr">
+                  <a:tcPr marL="76200" marR="76200" marT="50800" marB="50800" anchor="ctr">
                     <a:lnL w="12700" cap="flat" cmpd="sng" algn="ctr">
                       <a:solidFill>
                         <a:srgbClr val="BFBFBF"/>
@@ -4910,7 +4910,7 @@
                       </a:endParaRPr>
                     </a:p>
                   </a:txBody>
-                  <a:tcPr marL="76200" marR="76200" marT="38100" marB="38100" anchor="ctr">
+                  <a:tcPr marL="76200" marR="76200" marT="50800" marB="50800" anchor="ctr">
                     <a:lnL w="12700" cap="flat" cmpd="sng" algn="ctr">
                       <a:solidFill>
                         <a:srgbClr val="BFBFBF"/>
@@ -4978,7 +4978,7 @@
                       </a:endParaRPr>
                     </a:p>
                   </a:txBody>
-                  <a:tcPr marL="76200" marR="76200" marT="38100" marB="38100" anchor="ctr">
+                  <a:tcPr marL="76200" marR="76200" marT="50800" marB="50800" anchor="ctr">
                     <a:lnL w="12700" cap="flat" cmpd="sng" algn="ctr">
                       <a:solidFill>
                         <a:srgbClr val="BFBFBF"/>
@@ -5018,7 +5018,7 @@
                   </a:tcPr>
                 </a:tc>
               </a:tr>
-              <a:tr h="411480">
+              <a:tr h="438912">
                 <a:tc>
                   <a:txBody>
                     <a:bodyPr/>
@@ -5048,7 +5048,7 @@
                       </a:endParaRPr>
                     </a:p>
                   </a:txBody>
-                  <a:tcPr marL="76200" marR="76200" marT="38100" marB="38100" anchor="ctr">
+                  <a:tcPr marL="76200" marR="76200" marT="50800" marB="50800" anchor="ctr">
                     <a:lnL w="12700" cap="flat" cmpd="sng" algn="ctr">
                       <a:solidFill>
                         <a:srgbClr val="BFBFBF"/>
@@ -5116,7 +5116,7 @@
                       </a:endParaRPr>
                     </a:p>
                   </a:txBody>
-                  <a:tcPr marL="76200" marR="76200" marT="38100" marB="38100" anchor="ctr">
+                  <a:tcPr marL="76200" marR="76200" marT="50800" marB="50800" anchor="ctr">
                     <a:lnL w="12700" cap="flat" cmpd="sng" algn="ctr">
                       <a:solidFill>
                         <a:srgbClr val="BFBFBF"/>
@@ -5184,7 +5184,7 @@
                       </a:endParaRPr>
                     </a:p>
                   </a:txBody>
-                  <a:tcPr marL="76200" marR="76200" marT="38100" marB="38100" anchor="ctr">
+                  <a:tcPr marL="76200" marR="76200" marT="50800" marB="50800" anchor="ctr">
                     <a:lnL w="12700" cap="flat" cmpd="sng" algn="ctr">
                       <a:solidFill>
                         <a:srgbClr val="BFBFBF"/>
@@ -5224,7 +5224,7 @@
                   </a:tcPr>
                 </a:tc>
               </a:tr>
-              <a:tr h="411480">
+              <a:tr h="438912">
                 <a:tc>
                   <a:txBody>
                     <a:bodyPr/>
@@ -5254,7 +5254,7 @@
                       </a:endParaRPr>
                     </a:p>
                   </a:txBody>
-                  <a:tcPr marL="76200" marR="76200" marT="38100" marB="38100" anchor="ctr">
+                  <a:tcPr marL="76200" marR="76200" marT="50800" marB="50800" anchor="ctr">
                     <a:lnL w="12700" cap="flat" cmpd="sng" algn="ctr">
                       <a:solidFill>
                         <a:srgbClr val="BFBFBF"/>
@@ -5322,7 +5322,7 @@
                       </a:endParaRPr>
                     </a:p>
                   </a:txBody>
-                  <a:tcPr marL="76200" marR="76200" marT="38100" marB="38100" anchor="ctr">
+                  <a:tcPr marL="76200" marR="76200" marT="50800" marB="50800" anchor="ctr">
                     <a:lnL w="12700" cap="flat" cmpd="sng" algn="ctr">
                       <a:solidFill>
                         <a:srgbClr val="BFBFBF"/>
@@ -5390,7 +5390,7 @@
                       </a:endParaRPr>
                     </a:p>
                   </a:txBody>
-                  <a:tcPr marL="76200" marR="76200" marT="38100" marB="38100" anchor="ctr">
+                  <a:tcPr marL="76200" marR="76200" marT="50800" marB="50800" anchor="ctr">
                     <a:lnL w="12700" cap="flat" cmpd="sng" algn="ctr">
                       <a:solidFill>
                         <a:srgbClr val="BFBFBF"/>
@@ -5430,7 +5430,7 @@
                   </a:tcPr>
                 </a:tc>
               </a:tr>
-              <a:tr h="411480">
+              <a:tr h="438912">
                 <a:tc>
                   <a:txBody>
                     <a:bodyPr/>
@@ -5460,7 +5460,7 @@
                       </a:endParaRPr>
                     </a:p>
                   </a:txBody>
-                  <a:tcPr marL="76200" marR="76200" marT="38100" marB="38100" anchor="ctr">
+                  <a:tcPr marL="76200" marR="76200" marT="50800" marB="50800" anchor="ctr">
                     <a:lnL w="12700" cap="flat" cmpd="sng" algn="ctr">
                       <a:solidFill>
                         <a:srgbClr val="BFBFBF"/>
@@ -5528,7 +5528,7 @@
                       </a:endParaRPr>
                     </a:p>
                   </a:txBody>
-                  <a:tcPr marL="76200" marR="76200" marT="38100" marB="38100" anchor="ctr">
+                  <a:tcPr marL="76200" marR="76200" marT="50800" marB="50800" anchor="ctr">
                     <a:lnL w="12700" cap="flat" cmpd="sng" algn="ctr">
                       <a:solidFill>
                         <a:srgbClr val="BFBFBF"/>
@@ -5596,7 +5596,7 @@
                       </a:endParaRPr>
                     </a:p>
                   </a:txBody>
-                  <a:tcPr marL="76200" marR="76200" marT="38100" marB="38100" anchor="ctr">
+                  <a:tcPr marL="76200" marR="76200" marT="50800" marB="50800" anchor="ctr">
                     <a:lnL w="12700" cap="flat" cmpd="sng" algn="ctr">
                       <a:solidFill>
                         <a:srgbClr val="BFBFBF"/>
@@ -5636,7 +5636,7 @@
                   </a:tcPr>
                 </a:tc>
               </a:tr>
-              <a:tr h="411480">
+              <a:tr h="438912">
                 <a:tc>
                   <a:txBody>
                     <a:bodyPr/>
@@ -5666,7 +5666,7 @@
                       </a:endParaRPr>
                     </a:p>
                   </a:txBody>
-                  <a:tcPr marL="76200" marR="76200" marT="38100" marB="38100" anchor="ctr">
+                  <a:tcPr marL="76200" marR="76200" marT="50800" marB="50800" anchor="ctr">
                     <a:lnL w="12700" cap="flat" cmpd="sng" algn="ctr">
                       <a:solidFill>
                         <a:srgbClr val="BFBFBF"/>
@@ -5734,7 +5734,7 @@
                       </a:endParaRPr>
                     </a:p>
                   </a:txBody>
-                  <a:tcPr marL="76200" marR="76200" marT="38100" marB="38100" anchor="ctr">
+                  <a:tcPr marL="76200" marR="76200" marT="50800" marB="50800" anchor="ctr">
                     <a:lnL w="12700" cap="flat" cmpd="sng" algn="ctr">
                       <a:solidFill>
                         <a:srgbClr val="BFBFBF"/>
@@ -5802,7 +5802,7 @@
                       </a:endParaRPr>
                     </a:p>
                   </a:txBody>
-                  <a:tcPr marL="76200" marR="76200" marT="38100" marB="38100" anchor="ctr">
+                  <a:tcPr marL="76200" marR="76200" marT="50800" marB="50800" anchor="ctr">
                     <a:lnL w="12700" cap="flat" cmpd="sng" algn="ctr">
                       <a:solidFill>
                         <a:srgbClr val="BFBFBF"/>
@@ -5854,7 +5854,7 @@
         </p:nvSpPr>
         <p:spPr>
           <a:xfrm>
-            <a:off x="502920" y="5257800"/>
+            <a:off x="502920" y="5477256"/>
             <a:ext cx="11183112" cy="420624"/>
           </a:xfrm>
           <a:prstGeom prst="rect">
@@ -7065,7 +7065,7 @@
         </p:nvSpPr>
         <p:spPr>
           <a:xfrm>
-            <a:off x="630936" y="1783080"/>
+            <a:off x="630936" y="1764792"/>
             <a:ext cx="5266944" cy="411480"/>
           </a:xfrm>
           <a:prstGeom prst="rect">
@@ -7111,7 +7111,7 @@
           </p:nvPr>
         </p:nvGraphicFramePr>
         <p:xfrm>
-          <a:off x="630936" y="2231136"/>
+          <a:off x="630936" y="2295144"/>
           <a:ext cx="5266944" cy="914400"/>
         </p:xfrm>
         <a:graphic>
@@ -7122,7 +7122,7 @@
                 <a:gridCol w="256032"/>
                 <a:gridCol w="5010912"/>
               </a:tblGrid>
-              <a:tr h="822960">
+              <a:tr h="715061">
                 <a:tc>
                   <a:txBody>
                     <a:bodyPr/>
@@ -7152,7 +7152,7 @@
                       </a:endParaRPr>
                     </a:p>
                   </a:txBody>
-                  <a:tcPr marL="0" marR="0" marT="0" marB="152705" anchor="t">
+                  <a:tcPr marL="0" marR="0" marT="0" marB="44806" anchor="t">
                     <a:lnL w="0" cap="flat" cmpd="sng" algn="ctr">
                       <a:noFill/>
                     </a:lnL>
@@ -7220,7 +7220,7 @@
                       </a:endParaRPr>
                     </a:p>
                   </a:txBody>
-                  <a:tcPr marL="0" marR="0" marT="0" marB="152705" anchor="t">
+                  <a:tcPr marL="0" marR="0" marT="0" marB="44806" anchor="t">
                     <a:lnL w="0" cap="flat" cmpd="sng" algn="ctr">
                       <a:noFill/>
                     </a:lnL>
@@ -7236,7 +7236,7 @@
                   </a:tcPr>
                 </a:tc>
               </a:tr>
-              <a:tr h="488290">
+              <a:tr h="380390">
                 <a:tc>
                   <a:txBody>
                     <a:bodyPr/>
@@ -7266,7 +7266,7 @@
                       </a:endParaRPr>
                     </a:p>
                   </a:txBody>
-                  <a:tcPr marL="0" marR="0" marT="0" marB="152705" anchor="t">
+                  <a:tcPr marL="0" marR="0" marT="0" marB="44806" anchor="t">
                     <a:lnL w="0" cap="flat" cmpd="sng" algn="ctr">
                       <a:noFill/>
                     </a:lnL>
@@ -7310,7 +7310,7 @@
                       </a:endParaRPr>
                     </a:p>
                   </a:txBody>
-                  <a:tcPr marL="0" marR="0" marT="0" marB="152705" anchor="t">
+                  <a:tcPr marL="0" marR="0" marT="0" marB="44806" anchor="t">
                     <a:lnL w="0" cap="flat" cmpd="sng" algn="ctr">
                       <a:noFill/>
                     </a:lnL>
@@ -7326,7 +7326,7 @@
                   </a:tcPr>
                 </a:tc>
               </a:tr>
-              <a:tr h="822960">
+              <a:tr h="715061">
                 <a:tc>
                   <a:txBody>
                     <a:bodyPr/>
@@ -7356,7 +7356,7 @@
                       </a:endParaRPr>
                     </a:p>
                   </a:txBody>
-                  <a:tcPr marL="0" marR="0" marT="0" marB="152705" anchor="t">
+                  <a:tcPr marL="0" marR="0" marT="0" marB="44806" anchor="t">
                     <a:lnL w="0" cap="flat" cmpd="sng" algn="ctr">
                       <a:noFill/>
                     </a:lnL>
@@ -7424,7 +7424,7 @@
                       </a:endParaRPr>
                     </a:p>
                   </a:txBody>
-                  <a:tcPr marL="0" marR="0" marT="0" marB="152705" anchor="t">
+                  <a:tcPr marL="0" marR="0" marT="0" marB="44806" anchor="t">
                     <a:lnL w="0" cap="flat" cmpd="sng" algn="ctr">
                       <a:noFill/>
                     </a:lnL>
@@ -7440,7 +7440,7 @@
                   </a:tcPr>
                 </a:tc>
               </a:tr>
-              <a:tr h="488290">
+              <a:tr h="380390">
                 <a:tc>
                   <a:txBody>
                     <a:bodyPr/>
@@ -7470,7 +7470,7 @@
                       </a:endParaRPr>
                     </a:p>
                   </a:txBody>
-                  <a:tcPr marL="0" marR="0" marT="0" marB="152705" anchor="t">
+                  <a:tcPr marL="0" marR="0" marT="0" marB="44806" anchor="t">
                     <a:lnL w="0" cap="flat" cmpd="sng" algn="ctr">
                       <a:noFill/>
                     </a:lnL>
@@ -7514,7 +7514,7 @@
                       </a:endParaRPr>
                     </a:p>
                   </a:txBody>
-                  <a:tcPr marL="0" marR="0" marT="0" marB="152705" anchor="t">
+                  <a:tcPr marL="0" marR="0" marT="0" marB="44806" anchor="t">
                     <a:lnL w="0" cap="flat" cmpd="sng" algn="ctr">
                       <a:noFill/>
                     </a:lnL>
@@ -7654,7 +7654,7 @@
         </p:nvSpPr>
         <p:spPr>
           <a:xfrm>
-            <a:off x="6382512" y="1783080"/>
+            <a:off x="6382512" y="1764792"/>
             <a:ext cx="5175504" cy="411480"/>
           </a:xfrm>
           <a:prstGeom prst="rect">
@@ -7700,7 +7700,7 @@
           </p:nvPr>
         </p:nvGraphicFramePr>
         <p:xfrm>
-          <a:off x="6382512" y="2231136"/>
+          <a:off x="6382512" y="2295144"/>
           <a:ext cx="5175504" cy="914400"/>
         </p:xfrm>
         <a:graphic>
@@ -7711,7 +7711,7 @@
                 <a:gridCol w="256032"/>
                 <a:gridCol w="4919472"/>
               </a:tblGrid>
-              <a:tr h="721462">
+              <a:tr h="715061">
                 <a:tc>
                   <a:txBody>
                     <a:bodyPr/>
@@ -7741,7 +7741,7 @@
                       </a:endParaRPr>
                     </a:p>
                   </a:txBody>
-                  <a:tcPr marL="0" marR="0" marT="0" marB="51206" anchor="t">
+                  <a:tcPr marL="0" marR="0" marT="0" marB="44806" anchor="t">
                     <a:lnL w="0" cap="flat" cmpd="sng" algn="ctr">
                       <a:noFill/>
                     </a:lnL>
@@ -7809,7 +7809,7 @@
                       </a:endParaRPr>
                     </a:p>
                   </a:txBody>
-                  <a:tcPr marL="0" marR="0" marT="0" marB="51206" anchor="t">
+                  <a:tcPr marL="0" marR="0" marT="0" marB="44806" anchor="t">
                     <a:lnL w="0" cap="flat" cmpd="sng" algn="ctr">
                       <a:noFill/>
                     </a:lnL>
@@ -7825,7 +7825,7 @@
                   </a:tcPr>
                 </a:tc>
               </a:tr>
-              <a:tr h="386791">
+              <a:tr h="380390">
                 <a:tc>
                   <a:txBody>
                     <a:bodyPr/>
@@ -7855,7 +7855,7 @@
                       </a:endParaRPr>
                     </a:p>
                   </a:txBody>
-                  <a:tcPr marL="0" marR="0" marT="0" marB="51206" anchor="t">
+                  <a:tcPr marL="0" marR="0" marT="0" marB="44806" anchor="t">
                     <a:lnL w="0" cap="flat" cmpd="sng" algn="ctr">
                       <a:noFill/>
                     </a:lnL>
@@ -7899,7 +7899,7 @@
                       </a:endParaRPr>
                     </a:p>
                   </a:txBody>
-                  <a:tcPr marL="0" marR="0" marT="0" marB="51206" anchor="t">
+                  <a:tcPr marL="0" marR="0" marT="0" marB="44806" anchor="t">
                     <a:lnL w="0" cap="flat" cmpd="sng" algn="ctr">
                       <a:noFill/>
                     </a:lnL>
@@ -7915,7 +7915,7 @@
                   </a:tcPr>
                 </a:tc>
               </a:tr>
-              <a:tr h="721462">
+              <a:tr h="715061">
                 <a:tc>
                   <a:txBody>
                     <a:bodyPr/>
@@ -7945,7 +7945,7 @@
                       </a:endParaRPr>
                     </a:p>
                   </a:txBody>
-                  <a:tcPr marL="0" marR="0" marT="0" marB="51206" anchor="t">
+                  <a:tcPr marL="0" marR="0" marT="0" marB="44806" anchor="t">
                     <a:lnL w="0" cap="flat" cmpd="sng" algn="ctr">
                       <a:noFill/>
                     </a:lnL>
@@ -8013,7 +8013,7 @@
                       </a:endParaRPr>
                     </a:p>
                   </a:txBody>
-                  <a:tcPr marL="0" marR="0" marT="0" marB="51206" anchor="t">
+                  <a:tcPr marL="0" marR="0" marT="0" marB="44806" anchor="t">
                     <a:lnL w="0" cap="flat" cmpd="sng" algn="ctr">
                       <a:noFill/>
                     </a:lnL>
@@ -8029,7 +8029,7 @@
                   </a:tcPr>
                 </a:tc>
               </a:tr>
-              <a:tr h="1057046">
+              <a:tr h="1050646">
                 <a:tc>
                   <a:txBody>
                     <a:bodyPr/>
@@ -8059,7 +8059,7 @@
                       </a:endParaRPr>
                     </a:p>
                   </a:txBody>
-                  <a:tcPr marL="0" marR="0" marT="0" marB="51206" anchor="t">
+                  <a:tcPr marL="0" marR="0" marT="0" marB="44806" anchor="t">
                     <a:lnL w="0" cap="flat" cmpd="sng" algn="ctr">
                       <a:noFill/>
                     </a:lnL>
@@ -8151,7 +8151,7 @@
                       </a:endParaRPr>
                     </a:p>
                   </a:txBody>
-                  <a:tcPr marL="0" marR="0" marT="0" marB="51206" anchor="t">
+                  <a:tcPr marL="0" marR="0" marT="0" marB="44806" anchor="t">
                     <a:lnL w="0" cap="flat" cmpd="sng" algn="ctr">
                       <a:noFill/>
                     </a:lnL>
@@ -10341,11 +10341,11 @@
         <p:spPr>
           <a:xfrm>
             <a:off x="502920" y="1691640"/>
-            <a:ext cx="5422392" cy="3182112"/>
+            <a:ext cx="5422392" cy="3081528"/>
           </a:xfrm>
           <a:prstGeom prst="roundRect">
             <a:avLst>
-              <a:gd name="adj" fmla="val 2299"/>
+              <a:gd name="adj" fmla="val 2374"/>
             </a:avLst>
           </a:prstGeom>
           <a:solidFill>
@@ -10362,7 +10362,7 @@
         </p:nvSpPr>
         <p:spPr>
           <a:xfrm>
-            <a:off x="630936" y="1764792"/>
+            <a:off x="630936" y="1746504"/>
             <a:ext cx="5166360" cy="411480"/>
           </a:xfrm>
           <a:prstGeom prst="rect">
@@ -10408,7 +10408,7 @@
           </p:nvPr>
         </p:nvGraphicFramePr>
         <p:xfrm>
-          <a:off x="630936" y="2212848"/>
+          <a:off x="630936" y="2194560"/>
           <a:ext cx="5166360" cy="914400"/>
         </p:xfrm>
         <a:graphic>
@@ -10906,11 +10906,11 @@
         <p:spPr>
           <a:xfrm>
             <a:off x="6153912" y="1691640"/>
-            <a:ext cx="5532120" cy="3182112"/>
+            <a:ext cx="5532120" cy="3081528"/>
           </a:xfrm>
           <a:prstGeom prst="roundRect">
             <a:avLst>
-              <a:gd name="adj" fmla="val 2299"/>
+              <a:gd name="adj" fmla="val 2374"/>
             </a:avLst>
           </a:prstGeom>
           <a:solidFill>
@@ -10927,7 +10927,7 @@
         </p:nvSpPr>
         <p:spPr>
           <a:xfrm>
-            <a:off x="6281928" y="1764792"/>
+            <a:off x="6281928" y="1746504"/>
             <a:ext cx="5276088" cy="411480"/>
           </a:xfrm>
           <a:prstGeom prst="rect">
@@ -10973,7 +10973,7 @@
           </p:nvPr>
         </p:nvGraphicFramePr>
         <p:xfrm>
-          <a:off x="6281928" y="2212848"/>
+          <a:off x="6281928" y="2194560"/>
           <a:ext cx="5276088" cy="914400"/>
         </p:xfrm>
         <a:graphic>
@@ -10984,7 +10984,7 @@
                 <a:gridCol w="256032"/>
                 <a:gridCol w="5020056"/>
               </a:tblGrid>
-              <a:tr h="393192">
+              <a:tr h="377647">
                 <a:tc>
                   <a:txBody>
                     <a:bodyPr/>
@@ -11014,7 +11014,7 @@
                       </a:endParaRPr>
                     </a:p>
                   </a:txBody>
-                  <a:tcPr marL="0" marR="0" marT="0" marB="57607" anchor="t">
+                  <a:tcPr marL="0" marR="0" marT="0" marB="42062" anchor="t">
                     <a:lnL w="0" cap="flat" cmpd="sng" algn="ctr">
                       <a:noFill/>
                     </a:lnL>
@@ -11058,7 +11058,7 @@
                       </a:endParaRPr>
                     </a:p>
                   </a:txBody>
-                  <a:tcPr marL="0" marR="0" marT="0" marB="57607" anchor="t">
+                  <a:tcPr marL="0" marR="0" marT="0" marB="42062" anchor="t">
                     <a:lnL w="0" cap="flat" cmpd="sng" algn="ctr">
                       <a:noFill/>
                     </a:lnL>
@@ -11074,7 +11074,7 @@
                   </a:tcPr>
                 </a:tc>
               </a:tr>
-              <a:tr h="727862">
+              <a:tr h="712318">
                 <a:tc>
                   <a:txBody>
                     <a:bodyPr/>
@@ -11104,7 +11104,7 @@
                       </a:endParaRPr>
                     </a:p>
                   </a:txBody>
-                  <a:tcPr marL="0" marR="0" marT="0" marB="57607" anchor="t">
+                  <a:tcPr marL="0" marR="0" marT="0" marB="42062" anchor="t">
                     <a:lnL w="0" cap="flat" cmpd="sng" algn="ctr">
                       <a:noFill/>
                     </a:lnL>
@@ -11172,7 +11172,7 @@
                       </a:endParaRPr>
                     </a:p>
                   </a:txBody>
-                  <a:tcPr marL="0" marR="0" marT="0" marB="57607" anchor="t">
+                  <a:tcPr marL="0" marR="0" marT="0" marB="42062" anchor="t">
                     <a:lnL w="0" cap="flat" cmpd="sng" algn="ctr">
                       <a:noFill/>
                     </a:lnL>
@@ -11188,7 +11188,7 @@
                   </a:tcPr>
                 </a:tc>
               </a:tr>
-              <a:tr h="393192">
+              <a:tr h="377647">
                 <a:tc>
                   <a:txBody>
                     <a:bodyPr/>
@@ -11218,7 +11218,7 @@
                       </a:endParaRPr>
                     </a:p>
                   </a:txBody>
-                  <a:tcPr marL="0" marR="0" marT="0" marB="57607" anchor="t">
+                  <a:tcPr marL="0" marR="0" marT="0" marB="42062" anchor="t">
                     <a:lnL w="0" cap="flat" cmpd="sng" algn="ctr">
                       <a:noFill/>
                     </a:lnL>
@@ -11262,7 +11262,7 @@
                       </a:endParaRPr>
                     </a:p>
                   </a:txBody>
-                  <a:tcPr marL="0" marR="0" marT="0" marB="57607" anchor="t">
+                  <a:tcPr marL="0" marR="0" marT="0" marB="42062" anchor="t">
                     <a:lnL w="0" cap="flat" cmpd="sng" algn="ctr">
                       <a:noFill/>
                     </a:lnL>
@@ -11278,7 +11278,7 @@
                   </a:tcPr>
                 </a:tc>
               </a:tr>
-              <a:tr h="393192">
+              <a:tr h="377647">
                 <a:tc>
                   <a:txBody>
                     <a:bodyPr/>
@@ -11308,7 +11308,7 @@
                       </a:endParaRPr>
                     </a:p>
                   </a:txBody>
-                  <a:tcPr marL="0" marR="0" marT="0" marB="57607" anchor="t">
+                  <a:tcPr marL="0" marR="0" marT="0" marB="42062" anchor="t">
                     <a:lnL w="0" cap="flat" cmpd="sng" algn="ctr">
                       <a:noFill/>
                     </a:lnL>
@@ -11352,7 +11352,7 @@
                       </a:endParaRPr>
                     </a:p>
                   </a:txBody>
-                  <a:tcPr marL="0" marR="0" marT="0" marB="57607" anchor="t">
+                  <a:tcPr marL="0" marR="0" marT="0" marB="42062" anchor="t">
                     <a:lnL w="0" cap="flat" cmpd="sng" algn="ctr">
                       <a:noFill/>
                     </a:lnL>
@@ -11494,12 +11494,12 @@
         </p:nvSpPr>
         <p:spPr>
           <a:xfrm>
-            <a:off x="502920" y="5093208"/>
-            <a:ext cx="11183112" cy="813816"/>
+            <a:off x="502920" y="4992624"/>
+            <a:ext cx="11183112" cy="914400"/>
           </a:xfrm>
           <a:prstGeom prst="roundRect">
             <a:avLst>
-              <a:gd name="adj" fmla="val 8989"/>
+              <a:gd name="adj" fmla="val 8000"/>
             </a:avLst>
           </a:prstGeom>
           <a:solidFill>
@@ -11528,17 +11528,17 @@
           </p:nvPr>
         </p:nvGraphicFramePr>
         <p:xfrm>
-          <a:off x="566928" y="5164531"/>
-          <a:ext cx="11055096" cy="914400"/>
+          <a:off x="594360" y="5084064"/>
+          <a:ext cx="11000232" cy="914400"/>
         </p:xfrm>
         <a:graphic>
           <a:graphicData uri="http://schemas.openxmlformats.org/drawingml/2006/table">
             <a:tbl>
               <a:tblPr/>
               <a:tblGrid>
-                <a:gridCol w="11055096"/>
+                <a:gridCol w="11000232"/>
               </a:tblGrid>
-              <a:tr h="335585">
+              <a:tr h="365760">
                 <a:tc>
                   <a:txBody>
                     <a:bodyPr/>
@@ -11546,12 +11546,12 @@
                     <a:p>
                       <a:pPr algn="ctr" indent="0" marL="0">
                         <a:lnSpc>
-                          <a:spcPts val="2640"/>
+                          <a:spcPts val="2880"/>
                         </a:lnSpc>
                         <a:buNone/>
                       </a:pPr>
                       <a:r>
-                        <a:rPr lang="ja-JP" altLang="en-US" sz="2200" b="1" dirty="0">
+                        <a:rPr lang="ja-JP" altLang="en-US" sz="2400" b="1" dirty="0">
                           <a:solidFill>
                             <a:srgbClr val="262626"/>
                           </a:solidFill>
@@ -11561,7 +11561,7 @@
                         </a:rPr>
                         <a:t>喉頭痙攣・気管支攣縮・低酸素に備える。</a:t>
                       </a:r>
-                      <a:endParaRPr lang="en-US" sz="2200" dirty="0">
+                      <a:endParaRPr lang="en-US" sz="2400" dirty="0">
                         <a:latin typeface="メイリオ" charset="0"/>
                         <a:ea typeface="メイリオ" charset="0"/>
                         <a:cs typeface="メイリオ" charset="0"/>
@@ -11584,7 +11584,7 @@
                   </a:tcPr>
                 </a:tc>
               </a:tr>
-              <a:tr h="335585">
+              <a:tr h="365760">
                 <a:tc>
                   <a:txBody>
                     <a:bodyPr/>
@@ -11592,12 +11592,12 @@
                     <a:p>
                       <a:pPr algn="ctr" indent="0" marL="0">
                         <a:lnSpc>
-                          <a:spcPts val="2640"/>
+                          <a:spcPts val="2880"/>
                         </a:lnSpc>
                         <a:buNone/>
                       </a:pPr>
                       <a:r>
-                        <a:rPr lang="ja-JP" altLang="en-US" sz="2200" b="1" dirty="0">
+                        <a:rPr lang="ja-JP" altLang="en-US" sz="2400" b="1" dirty="0">
                           <a:solidFill>
                             <a:srgbClr val="C00000"/>
                           </a:solidFill>
@@ -11608,7 +11608,7 @@
                         <a:t>迷えば延期し</a:t>
                       </a:r>
                       <a:r>
-                        <a:rPr lang="ja-JP" altLang="en-US" sz="2200" b="1" dirty="0">
+                        <a:rPr lang="ja-JP" altLang="en-US" sz="2400" b="1" dirty="0">
                           <a:solidFill>
                             <a:srgbClr val="262626"/>
                           </a:solidFill>
@@ -11618,7 +11618,7 @@
                         </a:rPr>
                         <a:t>、保護者と主治医に共有</a:t>
                       </a:r>
-                      <a:endParaRPr lang="en-US" sz="2200" dirty="0">
+                      <a:endParaRPr lang="en-US" sz="2400" dirty="0">
                         <a:latin typeface="メイリオ" charset="0"/>
                         <a:ea typeface="メイリオ" charset="0"/>
                         <a:cs typeface="メイリオ" charset="0"/>
@@ -12101,18 +12101,18 @@
         </p:nvGraphicFramePr>
         <p:xfrm>
           <a:off x="502920" y="1691640"/>
-          <a:ext cx="11155680" cy="914400"/>
+          <a:ext cx="11183112" cy="914400"/>
         </p:xfrm>
         <a:graphic>
           <a:graphicData uri="http://schemas.openxmlformats.org/drawingml/2006/table">
             <a:tbl>
               <a:tblPr/>
               <a:tblGrid>
-                <a:gridCol w="3282696"/>
-                <a:gridCol w="4901184"/>
+                <a:gridCol w="3291840"/>
+                <a:gridCol w="4919472"/>
                 <a:gridCol w="2971800"/>
               </a:tblGrid>
-              <a:tr h="365760">
+              <a:tr h="411480">
                 <a:tc>
                   <a:txBody>
                     <a:bodyPr/>
@@ -12142,7 +12142,7 @@
                       </a:endParaRPr>
                     </a:p>
                   </a:txBody>
-                  <a:tcPr marL="76200" marR="76200" marT="12700" marB="12700" anchor="ctr">
+                  <a:tcPr marL="76200" marR="76200" marT="38100" marB="38100" anchor="ctr">
                     <a:lnL w="12700" cap="flat" cmpd="sng" algn="ctr">
                       <a:solidFill>
                         <a:srgbClr val="BFBFBF"/>
@@ -12213,7 +12213,7 @@
                       </a:endParaRPr>
                     </a:p>
                   </a:txBody>
-                  <a:tcPr marL="76200" marR="76200" marT="12700" marB="12700" anchor="ctr">
+                  <a:tcPr marL="76200" marR="76200" marT="38100" marB="38100" anchor="ctr">
                     <a:lnL w="12700" cap="flat" cmpd="sng" algn="ctr">
                       <a:solidFill>
                         <a:srgbClr val="BFBFBF"/>
@@ -12284,7 +12284,7 @@
                       </a:endParaRPr>
                     </a:p>
                   </a:txBody>
-                  <a:tcPr marL="76200" marR="76200" marT="12700" marB="12700" anchor="ctr">
+                  <a:tcPr marL="76200" marR="76200" marT="38100" marB="38100" anchor="ctr">
                     <a:lnL w="12700" cap="flat" cmpd="sng" algn="ctr">
                       <a:solidFill>
                         <a:srgbClr val="BFBFBF"/>
@@ -12327,7 +12327,7 @@
                   </a:tcPr>
                 </a:tc>
               </a:tr>
-              <a:tr h="1033272">
+              <a:tr h="749808">
                 <a:tc>
                   <a:txBody>
                     <a:bodyPr/>
@@ -12357,7 +12357,7 @@
                       </a:endParaRPr>
                     </a:p>
                   </a:txBody>
-                  <a:tcPr marL="76200" marR="76200" marT="12700" marB="12700" anchor="ctr">
+                  <a:tcPr marL="76200" marR="76200" marT="38100" marB="38100" anchor="ctr">
                     <a:lnL w="12700" cap="flat" cmpd="sng" algn="ctr">
                       <a:solidFill>
                         <a:srgbClr val="BFBFBF"/>
@@ -12416,7 +12416,7 @@
                           <a:ea typeface="メイリオ" pitchFamily="34" charset="-122"/>
                           <a:cs typeface="メイリオ" pitchFamily="34" charset="-120"/>
                         </a:rPr>
-                        <a:t>肺機能検査・胸部 X 線の値だけで</a:t>
+                        <a:t>肺機能検査・胸部 X 線の</a:t>
                       </a:r>
                       <a:endParaRPr lang="en-US" sz="2200" dirty="0">
                         <a:latin typeface="メイリオ" charset="0"/>
@@ -12440,7 +12440,7 @@
                           <a:ea typeface="メイリオ" pitchFamily="34" charset="-122"/>
                           <a:cs typeface="メイリオ" pitchFamily="34" charset="-120"/>
                         </a:rPr>
-                        <a:t>可否を決めない（ACP）</a:t>
+                        <a:t>値だけで可否を決めない（ACP）</a:t>
                       </a:r>
                       <a:endParaRPr lang="en-US" sz="2200" dirty="0">
                         <a:latin typeface="メイリオ" charset="0"/>
@@ -12449,7 +12449,7 @@
                       </a:endParaRPr>
                     </a:p>
                   </a:txBody>
-                  <a:tcPr marL="76200" marR="76200" marT="12700" marB="12700" anchor="ctr">
+                  <a:tcPr marL="76200" marR="76200" marT="38100" marB="38100" anchor="ctr">
                     <a:lnL w="12700" cap="flat" cmpd="sng" algn="ctr">
                       <a:solidFill>
                         <a:srgbClr val="BFBFBF"/>
@@ -12508,7 +12508,7 @@
                           <a:ea typeface="メイリオ" pitchFamily="34" charset="-122"/>
                           <a:cs typeface="メイリオ" pitchFamily="34" charset="-120"/>
                         </a:rPr>
-                        <a:t>原因不明の</a:t>
+                        <a:t>原因不明の呼吸困難</a:t>
                       </a:r>
                       <a:endParaRPr lang="en-US" sz="2200" dirty="0">
                         <a:latin typeface="メイリオ" charset="0"/>
@@ -12532,31 +12532,7 @@
                           <a:ea typeface="メイリオ" pitchFamily="34" charset="-122"/>
                           <a:cs typeface="メイリオ" pitchFamily="34" charset="-120"/>
                         </a:rPr>
-                        <a:t>呼吸困難なら</a:t>
-                      </a:r>
-                      <a:endParaRPr lang="en-US" sz="2200" dirty="0">
-                        <a:latin typeface="メイリオ" charset="0"/>
-                        <a:ea typeface="メイリオ" charset="0"/>
-                        <a:cs typeface="メイリオ" charset="0"/>
-                      </a:endParaRPr>
-                    </a:p>
-                    <a:p>
-                      <a:pPr algn="l" indent="0" marL="0">
-                        <a:lnSpc>
-                          <a:spcPts val="2640"/>
-                        </a:lnSpc>
-                        <a:buNone/>
-                      </a:pPr>
-                      <a:r>
-                        <a:rPr lang="ja-JP" altLang="en-US" sz="2200" dirty="0">
-                          <a:solidFill>
-                            <a:srgbClr val="262626"/>
-                          </a:solidFill>
-                          <a:latin typeface="メイリオ" pitchFamily="34" charset="0"/>
-                          <a:ea typeface="メイリオ" pitchFamily="34" charset="-122"/>
-                          <a:cs typeface="メイリオ" pitchFamily="34" charset="-120"/>
-                        </a:rPr>
-                        <a:t>呼吸器内科</a:t>
+                        <a:t>なら呼吸器内科</a:t>
                       </a:r>
                       <a:endParaRPr lang="en-US" sz="2200" dirty="0">
                         <a:latin typeface="メイリオ" charset="0"/>
@@ -12565,7 +12541,7 @@
                       </a:endParaRPr>
                     </a:p>
                   </a:txBody>
-                  <a:tcPr marL="76200" marR="76200" marT="12700" marB="12700" anchor="ctr">
+                  <a:tcPr marL="76200" marR="76200" marT="38100" marB="38100" anchor="ctr">
                     <a:lnL w="12700" cap="flat" cmpd="sng" algn="ctr">
                       <a:solidFill>
                         <a:srgbClr val="BFBFBF"/>
@@ -12605,7 +12581,7 @@
                   </a:tcPr>
                 </a:tc>
               </a:tr>
-              <a:tr h="704088">
+              <a:tr h="749808">
                 <a:tc>
                   <a:txBody>
                     <a:bodyPr/>
@@ -12635,7 +12611,7 @@
                       </a:endParaRPr>
                     </a:p>
                   </a:txBody>
-                  <a:tcPr marL="76200" marR="76200" marT="12700" marB="12700" anchor="ctr">
+                  <a:tcPr marL="76200" marR="76200" marT="38100" marB="38100" anchor="ctr">
                     <a:lnL w="12700" cap="flat" cmpd="sng" algn="ctr">
                       <a:solidFill>
                         <a:srgbClr val="BFBFBF"/>
@@ -12727,7 +12703,7 @@
                       </a:endParaRPr>
                     </a:p>
                   </a:txBody>
-                  <a:tcPr marL="76200" marR="76200" marT="12700" marB="12700" anchor="ctr">
+                  <a:tcPr marL="76200" marR="76200" marT="38100" marB="38100" anchor="ctr">
                     <a:lnL w="12700" cap="flat" cmpd="sng" algn="ctr">
                       <a:solidFill>
                         <a:srgbClr val="BFBFBF"/>
@@ -12819,7 +12795,7 @@
                       </a:endParaRPr>
                     </a:p>
                   </a:txBody>
-                  <a:tcPr marL="76200" marR="76200" marT="12700" marB="12700" anchor="ctr">
+                  <a:tcPr marL="76200" marR="76200" marT="38100" marB="38100" anchor="ctr">
                     <a:lnL w="12700" cap="flat" cmpd="sng" algn="ctr">
                       <a:solidFill>
                         <a:srgbClr val="BFBFBF"/>
@@ -12859,7 +12835,7 @@
                   </a:tcPr>
                 </a:tc>
               </a:tr>
-              <a:tr h="704088">
+              <a:tr h="749808">
                 <a:tc>
                   <a:txBody>
                     <a:bodyPr/>
@@ -12913,7 +12889,7 @@
                       </a:endParaRPr>
                     </a:p>
                   </a:txBody>
-                  <a:tcPr marL="76200" marR="76200" marT="12700" marB="12700" anchor="ctr">
+                  <a:tcPr marL="76200" marR="76200" marT="38100" marB="38100" anchor="ctr">
                     <a:lnL w="12700" cap="flat" cmpd="sng" algn="ctr">
                       <a:solidFill>
                         <a:srgbClr val="BFBFBF"/>
@@ -13005,7 +12981,7 @@
                       </a:endParaRPr>
                     </a:p>
                   </a:txBody>
-                  <a:tcPr marL="76200" marR="76200" marT="12700" marB="12700" anchor="ctr">
+                  <a:tcPr marL="76200" marR="76200" marT="38100" marB="38100" anchor="ctr">
                     <a:lnL w="12700" cap="flat" cmpd="sng" algn="ctr">
                       <a:solidFill>
                         <a:srgbClr val="BFBFBF"/>
@@ -13073,7 +13049,7 @@
                       </a:endParaRPr>
                     </a:p>
                   </a:txBody>
-                  <a:tcPr marL="76200" marR="76200" marT="12700" marB="12700" anchor="ctr">
+                  <a:tcPr marL="76200" marR="76200" marT="38100" marB="38100" anchor="ctr">
                     <a:lnL w="12700" cap="flat" cmpd="sng" algn="ctr">
                       <a:solidFill>
                         <a:srgbClr val="BFBFBF"/>
@@ -13113,7 +13089,7 @@
                   </a:tcPr>
                 </a:tc>
               </a:tr>
-              <a:tr h="1033272">
+              <a:tr h="1088136">
                 <a:tc>
                   <a:txBody>
                     <a:bodyPr/>
@@ -13191,7 +13167,7 @@
                       </a:endParaRPr>
                     </a:p>
                   </a:txBody>
-                  <a:tcPr marL="76200" marR="76200" marT="12700" marB="12700" anchor="ctr">
+                  <a:tcPr marL="76200" marR="76200" marT="38100" marB="38100" anchor="ctr">
                     <a:lnL w="12700" cap="flat" cmpd="sng" algn="ctr">
                       <a:solidFill>
                         <a:srgbClr val="BFBFBF"/>
@@ -13259,7 +13235,7 @@
                       </a:endParaRPr>
                     </a:p>
                   </a:txBody>
-                  <a:tcPr marL="76200" marR="76200" marT="12700" marB="12700" anchor="ctr">
+                  <a:tcPr marL="76200" marR="76200" marT="38100" marB="38100" anchor="ctr">
                     <a:lnL w="12700" cap="flat" cmpd="sng" algn="ctr">
                       <a:solidFill>
                         <a:srgbClr val="BFBFBF"/>
@@ -13351,7 +13327,7 @@
                       </a:endParaRPr>
                     </a:p>
                   </a:txBody>
-                  <a:tcPr marL="76200" marR="76200" marT="12700" marB="12700" anchor="ctr">
+                  <a:tcPr marL="76200" marR="76200" marT="38100" marB="38100" anchor="ctr">
                     <a:lnL w="12700" cap="flat" cmpd="sng" algn="ctr">
                       <a:solidFill>
                         <a:srgbClr val="BFBFBF"/>
@@ -13391,7 +13367,7 @@
                   </a:tcPr>
                 </a:tc>
               </a:tr>
-              <a:tr h="365760">
+              <a:tr h="411480">
                 <a:tc>
                   <a:txBody>
                     <a:bodyPr/>
@@ -13421,7 +13397,7 @@
                       </a:endParaRPr>
                     </a:p>
                   </a:txBody>
-                  <a:tcPr marL="76200" marR="76200" marT="12700" marB="12700" anchor="ctr">
+                  <a:tcPr marL="76200" marR="76200" marT="38100" marB="38100" anchor="ctr">
                     <a:lnL w="12700" cap="flat" cmpd="sng" algn="ctr">
                       <a:solidFill>
                         <a:srgbClr val="BFBFBF"/>
@@ -13489,7 +13465,7 @@
                       </a:endParaRPr>
                     </a:p>
                   </a:txBody>
-                  <a:tcPr marL="76200" marR="76200" marT="12700" marB="12700" anchor="ctr">
+                  <a:tcPr marL="76200" marR="76200" marT="38100" marB="38100" anchor="ctr">
                     <a:lnL w="12700" cap="flat" cmpd="sng" algn="ctr">
                       <a:solidFill>
                         <a:srgbClr val="BFBFBF"/>
@@ -13557,7 +13533,7 @@
                       </a:endParaRPr>
                     </a:p>
                   </a:txBody>
-                  <a:tcPr marL="76200" marR="76200" marT="12700" marB="12700" anchor="ctr">
+                  <a:tcPr marL="76200" marR="76200" marT="38100" marB="38100" anchor="ctr">
                     <a:lnL w="12700" cap="flat" cmpd="sng" algn="ctr">
                       <a:solidFill>
                         <a:srgbClr val="BFBFBF"/>
@@ -14062,7 +14038,7 @@
           <a:bodyPr wrap="square" lIns="0" tIns="0" rIns="0" bIns="0" rtlCol="0" anchor="ctr"/>
           <a:lstStyle/>
           <a:p>
-            <a:pPr algn="l" marL="355600" indent="-355600">
+            <a:pPr algn="l" marL="330200" indent="-330200">
               <a:spcAft>
                 <a:spcPts val="2400"/>
               </a:spcAft>
@@ -14070,7 +14046,7 @@
               <a:buChar char="•"/>
             </a:pPr>
             <a:r>
-              <a:rPr lang="ja-JP" altLang="en-US" sz="2400" dirty="0">
+              <a:rPr lang="ja-JP" altLang="en-US" sz="2300" dirty="0">
                 <a:solidFill>
                   <a:srgbClr val="262626"/>
                 </a:solidFill>
@@ -14081,7 +14057,7 @@
               <a:t>PPC 5%、起きると 30 日死亡 </a:t>
             </a:r>
             <a:r>
-              <a:rPr lang="ja-JP" altLang="en-US" sz="2400" b="1" dirty="0">
+              <a:rPr lang="ja-JP" altLang="en-US" sz="2300" b="1" dirty="0">
                 <a:solidFill>
                   <a:srgbClr val="C00000"/>
                 </a:solidFill>
@@ -14092,7 +14068,7 @@
               <a:t>19.5%</a:t>
             </a:r>
             <a:r>
-              <a:rPr lang="ja-JP" altLang="en-US" sz="2400" dirty="0">
+              <a:rPr lang="ja-JP" altLang="en-US" sz="2300" dirty="0">
                 <a:solidFill>
                   <a:srgbClr val="262626"/>
                 </a:solidFill>
@@ -14102,10 +14078,10 @@
               </a:rPr>
               <a:t>（なし 0.5%）。ARISCAT で評価</a:t>
             </a:r>
-            <a:endParaRPr lang="ja-JP" sz="2400" dirty="0"/>
-          </a:p>
-          <a:p>
-            <a:pPr algn="l" marL="355600" indent="-355600">
+            <a:endParaRPr lang="ja-JP" sz="2300" dirty="0"/>
+          </a:p>
+          <a:p>
+            <a:pPr algn="l" marL="330200" indent="-330200">
               <a:spcAft>
                 <a:spcPts val="2400"/>
               </a:spcAft>
@@ -14113,7 +14089,7 @@
               <a:buChar char="•"/>
             </a:pPr>
             <a:r>
-              <a:rPr lang="ja-JP" altLang="en-US" sz="2400" dirty="0">
+              <a:rPr lang="ja-JP" altLang="en-US" sz="2300" dirty="0">
                 <a:solidFill>
                   <a:srgbClr val="262626"/>
                 </a:solidFill>
@@ -14124,7 +14100,7 @@
               <a:t>禁煙は</a:t>
             </a:r>
             <a:r>
-              <a:rPr lang="ja-JP" altLang="en-US" sz="2400" b="1" dirty="0">
+              <a:rPr lang="ja-JP" altLang="en-US" sz="2300" b="1" dirty="0">
                 <a:solidFill>
                   <a:srgbClr val="D55E00"/>
                 </a:solidFill>
@@ -14135,7 +14111,7 @@
               <a:t>いつでも遅くない</a:t>
             </a:r>
             <a:r>
-              <a:rPr lang="ja-JP" altLang="en-US" sz="2400" dirty="0">
+              <a:rPr lang="ja-JP" altLang="en-US" sz="2300" dirty="0">
                 <a:solidFill>
                   <a:srgbClr val="262626"/>
                 </a:solidFill>
@@ -14145,10 +14121,10 @@
               </a:rPr>
               <a:t>。4 週以上で呼吸器、3〜4 週で創</a:t>
             </a:r>
-            <a:endParaRPr lang="ja-JP" sz="2400" dirty="0"/>
-          </a:p>
-          <a:p>
-            <a:pPr algn="l" marL="355600" indent="-355600">
+            <a:endParaRPr lang="ja-JP" sz="2300" dirty="0"/>
+          </a:p>
+          <a:p>
+            <a:pPr algn="l" marL="330200" indent="-330200">
               <a:spcAft>
                 <a:spcPts val="2400"/>
               </a:spcAft>
@@ -14156,7 +14132,7 @@
               <a:buChar char="•"/>
             </a:pPr>
             <a:r>
-              <a:rPr lang="ja-JP" altLang="en-US" sz="2400" dirty="0">
+              <a:rPr lang="ja-JP" altLang="en-US" sz="2300" dirty="0">
                 <a:solidFill>
                   <a:srgbClr val="262626"/>
                 </a:solidFill>
@@ -14167,7 +14143,7 @@
               <a:t>吸入薬は続ける。増悪・コントロール不良なら</a:t>
             </a:r>
             <a:r>
-              <a:rPr lang="ja-JP" altLang="en-US" sz="2400" b="1" dirty="0">
+              <a:rPr lang="ja-JP" altLang="en-US" sz="2300" b="1" dirty="0">
                 <a:solidFill>
                   <a:srgbClr val="D55E00"/>
                 </a:solidFill>
@@ -14177,10 +14153,10 @@
               </a:rPr>
               <a:t>延期して相談</a:t>
             </a:r>
-            <a:endParaRPr lang="ja-JP" sz="2400" dirty="0"/>
-          </a:p>
-          <a:p>
-            <a:pPr algn="l" marL="355600" indent="-355600">
+            <a:endParaRPr lang="ja-JP" sz="2300" dirty="0"/>
+          </a:p>
+          <a:p>
+            <a:pPr algn="l" marL="330200" indent="-330200">
               <a:spcAft>
                 <a:spcPts val="2400"/>
               </a:spcAft>
@@ -14188,7 +14164,7 @@
               <a:buChar char="•"/>
             </a:pPr>
             <a:r>
-              <a:rPr lang="ja-JP" altLang="en-US" sz="2400" dirty="0">
+              <a:rPr lang="ja-JP" altLang="en-US" sz="2300" dirty="0">
                 <a:solidFill>
                   <a:srgbClr val="262626"/>
                 </a:solidFill>
@@ -14199,7 +14175,7 @@
               <a:t>STOP-Bang </a:t>
             </a:r>
             <a:r>
-              <a:rPr lang="ja-JP" altLang="en-US" sz="2400" b="1" dirty="0">
+              <a:rPr lang="ja-JP" altLang="en-US" sz="2300" b="1" dirty="0">
                 <a:solidFill>
                   <a:srgbClr val="0072B2"/>
                 </a:solidFill>
@@ -14210,7 +14186,7 @@
               <a:t>3 点以上</a:t>
             </a:r>
             <a:r>
-              <a:rPr lang="ja-JP" altLang="en-US" sz="2400" dirty="0">
+              <a:rPr lang="ja-JP" altLang="en-US" sz="2300" dirty="0">
                 <a:solidFill>
                   <a:srgbClr val="262626"/>
                 </a:solidFill>
@@ -14220,10 +14196,10 @@
               </a:rPr>
               <a:t>で OSA を疑う。CPAP 持参、挿管に備える</a:t>
             </a:r>
-            <a:endParaRPr lang="ja-JP" sz="2400" dirty="0"/>
-          </a:p>
-          <a:p>
-            <a:pPr algn="l" marL="355600" indent="-355600">
+            <a:endParaRPr lang="ja-JP" sz="2300" dirty="0"/>
+          </a:p>
+          <a:p>
+            <a:pPr algn="l" marL="330200" indent="-330200">
               <a:spcAft>
                 <a:spcPts val="2400"/>
               </a:spcAft>
@@ -14231,7 +14207,7 @@
               <a:buChar char="•"/>
             </a:pPr>
             <a:r>
-              <a:rPr lang="ja-JP" altLang="en-US" sz="2400" dirty="0">
+              <a:rPr lang="ja-JP" altLang="en-US" sz="2300" dirty="0">
                 <a:solidFill>
                   <a:srgbClr val="262626"/>
                 </a:solidFill>
@@ -14242,7 +14218,7 @@
               <a:t>小児の上気道炎：発熱・膿性鼻汁・湿性咳嗽なら</a:t>
             </a:r>
             <a:r>
-              <a:rPr lang="ja-JP" altLang="en-US" sz="2400" b="1" dirty="0">
+              <a:rPr lang="ja-JP" altLang="en-US" sz="2300" b="1" dirty="0">
                 <a:solidFill>
                   <a:srgbClr val="D55E00"/>
                 </a:solidFill>
@@ -14252,7 +14228,7 @@
               </a:rPr>
               <a:t>延期を考える</a:t>
             </a:r>
-            <a:endParaRPr lang="ja-JP" sz="2400" dirty="0"/>
+            <a:endParaRPr lang="ja-JP" sz="2300" dirty="0"/>
           </a:p>
         </p:txBody>
       </p:sp>
